--- a/tareas/02-investigacion-menu-mdi/Investigacion-MDI.pptx
+++ b/tareas/02-investigacion-menu-mdi/Investigacion-MDI.pptx
@@ -2,7 +2,7 @@
 <file path=ppt/presentation.xml><?xml version="1.0" encoding="utf-8"?>
 <p:presentation xmlns:a="http://schemas.openxmlformats.org/drawingml/2006/main" xmlns:r="http://schemas.openxmlformats.org/officeDocument/2006/relationships" xmlns:p="http://schemas.openxmlformats.org/presentationml/2006/main" saveSubsetFonts="1">
   <p:sldMasterIdLst>
-    <p:sldMasterId id="2147483648" r:id="rId1"/>
+    <p:sldMasterId id="2147483660" r:id="rId1"/>
   </p:sldMasterIdLst>
   <p:sldIdLst>
     <p:sldId id="256" r:id="rId2"/>
@@ -24,10 +24,10 @@
   <p:notesSz cx="6858000" cy="9144000"/>
   <p:defaultTextStyle>
     <a:defPPr>
-      <a:defRPr lang="es-GT"/>
+      <a:defRPr lang="en-US"/>
     </a:defPPr>
-    <a:lvl1pPr marL="0" algn="l" defTabSz="614477" rtl="0" eaLnBrk="1" latinLnBrk="0" hangingPunct="1">
-      <a:defRPr sz="1210" kern="1200">
+    <a:lvl1pPr marL="0" algn="l" defTabSz="457200" rtl="0" eaLnBrk="1" latinLnBrk="0" hangingPunct="1">
+      <a:defRPr sz="1800" kern="1200">
         <a:solidFill>
           <a:schemeClr val="tx1"/>
         </a:solidFill>
@@ -36,8 +36,8 @@
         <a:cs typeface="+mn-cs"/>
       </a:defRPr>
     </a:lvl1pPr>
-    <a:lvl2pPr marL="307238" algn="l" defTabSz="614477" rtl="0" eaLnBrk="1" latinLnBrk="0" hangingPunct="1">
-      <a:defRPr sz="1210" kern="1200">
+    <a:lvl2pPr marL="457200" algn="l" defTabSz="457200" rtl="0" eaLnBrk="1" latinLnBrk="0" hangingPunct="1">
+      <a:defRPr sz="1800" kern="1200">
         <a:solidFill>
           <a:schemeClr val="tx1"/>
         </a:solidFill>
@@ -46,8 +46,8 @@
         <a:cs typeface="+mn-cs"/>
       </a:defRPr>
     </a:lvl2pPr>
-    <a:lvl3pPr marL="614477" algn="l" defTabSz="614477" rtl="0" eaLnBrk="1" latinLnBrk="0" hangingPunct="1">
-      <a:defRPr sz="1210" kern="1200">
+    <a:lvl3pPr marL="914400" algn="l" defTabSz="457200" rtl="0" eaLnBrk="1" latinLnBrk="0" hangingPunct="1">
+      <a:defRPr sz="1800" kern="1200">
         <a:solidFill>
           <a:schemeClr val="tx1"/>
         </a:solidFill>
@@ -56,8 +56,8 @@
         <a:cs typeface="+mn-cs"/>
       </a:defRPr>
     </a:lvl3pPr>
-    <a:lvl4pPr marL="921715" algn="l" defTabSz="614477" rtl="0" eaLnBrk="1" latinLnBrk="0" hangingPunct="1">
-      <a:defRPr sz="1210" kern="1200">
+    <a:lvl4pPr marL="1371600" algn="l" defTabSz="457200" rtl="0" eaLnBrk="1" latinLnBrk="0" hangingPunct="1">
+      <a:defRPr sz="1800" kern="1200">
         <a:solidFill>
           <a:schemeClr val="tx1"/>
         </a:solidFill>
@@ -66,8 +66,8 @@
         <a:cs typeface="+mn-cs"/>
       </a:defRPr>
     </a:lvl4pPr>
-    <a:lvl5pPr marL="1228954" algn="l" defTabSz="614477" rtl="0" eaLnBrk="1" latinLnBrk="0" hangingPunct="1">
-      <a:defRPr sz="1210" kern="1200">
+    <a:lvl5pPr marL="1828800" algn="l" defTabSz="457200" rtl="0" eaLnBrk="1" latinLnBrk="0" hangingPunct="1">
+      <a:defRPr sz="1800" kern="1200">
         <a:solidFill>
           <a:schemeClr val="tx1"/>
         </a:solidFill>
@@ -76,8 +76,8 @@
         <a:cs typeface="+mn-cs"/>
       </a:defRPr>
     </a:lvl5pPr>
-    <a:lvl6pPr marL="1536192" algn="l" defTabSz="614477" rtl="0" eaLnBrk="1" latinLnBrk="0" hangingPunct="1">
-      <a:defRPr sz="1210" kern="1200">
+    <a:lvl6pPr marL="2286000" algn="l" defTabSz="457200" rtl="0" eaLnBrk="1" latinLnBrk="0" hangingPunct="1">
+      <a:defRPr sz="1800" kern="1200">
         <a:solidFill>
           <a:schemeClr val="tx1"/>
         </a:solidFill>
@@ -86,8 +86,8 @@
         <a:cs typeface="+mn-cs"/>
       </a:defRPr>
     </a:lvl6pPr>
-    <a:lvl7pPr marL="1843430" algn="l" defTabSz="614477" rtl="0" eaLnBrk="1" latinLnBrk="0" hangingPunct="1">
-      <a:defRPr sz="1210" kern="1200">
+    <a:lvl7pPr marL="2743200" algn="l" defTabSz="457200" rtl="0" eaLnBrk="1" latinLnBrk="0" hangingPunct="1">
+      <a:defRPr sz="1800" kern="1200">
         <a:solidFill>
           <a:schemeClr val="tx1"/>
         </a:solidFill>
@@ -96,8 +96,8 @@
         <a:cs typeface="+mn-cs"/>
       </a:defRPr>
     </a:lvl7pPr>
-    <a:lvl8pPr marL="2150669" algn="l" defTabSz="614477" rtl="0" eaLnBrk="1" latinLnBrk="0" hangingPunct="1">
-      <a:defRPr sz="1210" kern="1200">
+    <a:lvl8pPr marL="3200400" algn="l" defTabSz="457200" rtl="0" eaLnBrk="1" latinLnBrk="0" hangingPunct="1">
+      <a:defRPr sz="1800" kern="1200">
         <a:solidFill>
           <a:schemeClr val="tx1"/>
         </a:solidFill>
@@ -106,8 +106,8 @@
         <a:cs typeface="+mn-cs"/>
       </a:defRPr>
     </a:lvl8pPr>
-    <a:lvl9pPr marL="2457907" algn="l" defTabSz="614477" rtl="0" eaLnBrk="1" latinLnBrk="0" hangingPunct="1">
-      <a:defRPr sz="1210" kern="1200">
+    <a:lvl9pPr marL="3657600" algn="l" defTabSz="457200" rtl="0" eaLnBrk="1" latinLnBrk="0" hangingPunct="1">
+      <a:defRPr sz="1800" kern="1200">
         <a:solidFill>
           <a:schemeClr val="tx1"/>
         </a:solidFill>
@@ -139,13 +139,7 @@
       </p:grpSpPr>
       <p:sp>
         <p:nvSpPr>
-          <p:cNvPr id="2" name="Título 1">
-            <a:extLst>
-              <a:ext uri="{FF2B5EF4-FFF2-40B4-BE49-F238E27FC236}">
-                <a16:creationId xmlns:a16="http://schemas.microsoft.com/office/drawing/2014/main" id="{E1D2AA1B-131B-9E52-AF26-BA29A3EA0C63}"/>
-              </a:ext>
-            </a:extLst>
-          </p:cNvPr>
+          <p:cNvPr id="2" name="Title 1"/>
           <p:cNvSpPr>
             <a:spLocks noGrp="1"/>
           </p:cNvSpPr>
@@ -155,15 +149,15 @@
         </p:nvSpPr>
         <p:spPr>
           <a:xfrm>
-            <a:off x="914400" y="897890"/>
-            <a:ext cx="5486400" cy="1910080"/>
+            <a:off x="692973" y="1158240"/>
+            <a:ext cx="5295395" cy="2663665"/>
           </a:xfrm>
         </p:spPr>
         <p:txBody>
           <a:bodyPr anchor="b"/>
           <a:lstStyle>
-            <a:lvl1pPr algn="ctr">
-              <a:defRPr sz="3600"/>
+            <a:lvl1pPr>
+              <a:defRPr sz="4320"/>
             </a:lvl1pPr>
           </a:lstStyle>
           <a:p>
@@ -171,19 +165,13 @@
               <a:rPr lang="es-ES"/>
               <a:t>Haga clic para modificar el estilo de título del patrón</a:t>
             </a:r>
-            <a:endParaRPr lang="es-GT"/>
-          </a:p>
-        </p:txBody>
-      </p:sp>
-      <p:sp>
-        <p:nvSpPr>
-          <p:cNvPr id="3" name="Subtítulo 2">
-            <a:extLst>
-              <a:ext uri="{FF2B5EF4-FFF2-40B4-BE49-F238E27FC236}">
-                <a16:creationId xmlns:a16="http://schemas.microsoft.com/office/drawing/2014/main" id="{72767F6B-262C-3517-E8EC-1E3842B98A94}"/>
-              </a:ext>
-            </a:extLst>
-          </p:cNvPr>
+            <a:endParaRPr lang="en-US" dirty="0"/>
+          </a:p>
+        </p:txBody>
+      </p:sp>
+      <p:sp>
+        <p:nvSpPr>
+          <p:cNvPr id="3" name="Subtitle 2"/>
           <p:cNvSpPr>
             <a:spLocks noGrp="1"/>
           </p:cNvSpPr>
@@ -193,48 +181,103 @@
         </p:nvSpPr>
         <p:spPr>
           <a:xfrm>
-            <a:off x="914400" y="2881630"/>
-            <a:ext cx="5486400" cy="1324610"/>
+            <a:off x="692973" y="3821904"/>
+            <a:ext cx="5295395" cy="689136"/>
           </a:xfrm>
         </p:spPr>
         <p:txBody>
-          <a:bodyPr/>
+          <a:bodyPr anchor="t"/>
           <a:lstStyle>
-            <a:lvl1pPr marL="0" indent="0" algn="ctr">
-              <a:buNone/>
-              <a:defRPr sz="1440"/>
+            <a:lvl1pPr marL="0" indent="0" algn="l">
+              <a:buNone/>
+              <a:defRPr cap="all">
+                <a:solidFill>
+                  <a:schemeClr val="bg2">
+                    <a:lumMod val="40000"/>
+                    <a:lumOff val="60000"/>
+                  </a:schemeClr>
+                </a:solidFill>
+              </a:defRPr>
             </a:lvl1pPr>
             <a:lvl2pPr marL="274320" indent="0" algn="ctr">
               <a:buNone/>
-              <a:defRPr sz="1200"/>
+              <a:defRPr>
+                <a:solidFill>
+                  <a:schemeClr val="tx1">
+                    <a:tint val="75000"/>
+                  </a:schemeClr>
+                </a:solidFill>
+              </a:defRPr>
             </a:lvl2pPr>
             <a:lvl3pPr marL="548640" indent="0" algn="ctr">
               <a:buNone/>
-              <a:defRPr sz="1080"/>
+              <a:defRPr>
+                <a:solidFill>
+                  <a:schemeClr val="tx1">
+                    <a:tint val="75000"/>
+                  </a:schemeClr>
+                </a:solidFill>
+              </a:defRPr>
             </a:lvl3pPr>
             <a:lvl4pPr marL="822960" indent="0" algn="ctr">
               <a:buNone/>
-              <a:defRPr sz="960"/>
+              <a:defRPr>
+                <a:solidFill>
+                  <a:schemeClr val="tx1">
+                    <a:tint val="75000"/>
+                  </a:schemeClr>
+                </a:solidFill>
+              </a:defRPr>
             </a:lvl4pPr>
             <a:lvl5pPr marL="1097280" indent="0" algn="ctr">
               <a:buNone/>
-              <a:defRPr sz="960"/>
+              <a:defRPr>
+                <a:solidFill>
+                  <a:schemeClr val="tx1">
+                    <a:tint val="75000"/>
+                  </a:schemeClr>
+                </a:solidFill>
+              </a:defRPr>
             </a:lvl5pPr>
             <a:lvl6pPr marL="1371600" indent="0" algn="ctr">
               <a:buNone/>
-              <a:defRPr sz="960"/>
+              <a:defRPr>
+                <a:solidFill>
+                  <a:schemeClr val="tx1">
+                    <a:tint val="75000"/>
+                  </a:schemeClr>
+                </a:solidFill>
+              </a:defRPr>
             </a:lvl6pPr>
             <a:lvl7pPr marL="1645920" indent="0" algn="ctr">
               <a:buNone/>
-              <a:defRPr sz="960"/>
+              <a:defRPr>
+                <a:solidFill>
+                  <a:schemeClr val="tx1">
+                    <a:tint val="75000"/>
+                  </a:schemeClr>
+                </a:solidFill>
+              </a:defRPr>
             </a:lvl7pPr>
             <a:lvl8pPr marL="1920240" indent="0" algn="ctr">
               <a:buNone/>
-              <a:defRPr sz="960"/>
+              <a:defRPr>
+                <a:solidFill>
+                  <a:schemeClr val="tx1">
+                    <a:tint val="75000"/>
+                  </a:schemeClr>
+                </a:solidFill>
+              </a:defRPr>
             </a:lvl8pPr>
             <a:lvl9pPr marL="2194560" indent="0" algn="ctr">
               <a:buNone/>
-              <a:defRPr sz="960"/>
+              <a:defRPr>
+                <a:solidFill>
+                  <a:schemeClr val="tx1">
+                    <a:tint val="75000"/>
+                  </a:schemeClr>
+                </a:solidFill>
+              </a:defRPr>
             </a:lvl9pPr>
           </a:lstStyle>
           <a:p>
@@ -242,19 +285,13 @@
               <a:rPr lang="es-ES"/>
               <a:t>Haga clic para modificar el estilo de subtítulo del patrón</a:t>
             </a:r>
-            <a:endParaRPr lang="es-GT"/>
-          </a:p>
-        </p:txBody>
-      </p:sp>
-      <p:sp>
-        <p:nvSpPr>
-          <p:cNvPr id="4" name="Marcador de fecha 3">
-            <a:extLst>
-              <a:ext uri="{FF2B5EF4-FFF2-40B4-BE49-F238E27FC236}">
-                <a16:creationId xmlns:a16="http://schemas.microsoft.com/office/drawing/2014/main" id="{63EED8B4-1024-15BE-23B5-5468913F39D8}"/>
-              </a:ext>
-            </a:extLst>
-          </p:cNvPr>
+            <a:endParaRPr lang="en-US" dirty="0"/>
+          </a:p>
+        </p:txBody>
+      </p:sp>
+      <p:sp>
+        <p:nvSpPr>
+          <p:cNvPr id="4" name="Date Placeholder 3"/>
           <p:cNvSpPr>
             <a:spLocks noGrp="1"/>
           </p:cNvSpPr>
@@ -267,7 +304,7 @@
           <a:bodyPr/>
           <a:lstStyle/>
           <a:p>
-            <a:fld id="{938F7005-820C-452D-BD0A-9792EB6D2BE3}" type="datetimeFigureOut">
+            <a:fld id="{E03C0CA2-AF3B-45DA-B95C-F3B757DF4AEA}" type="datetimeFigureOut">
               <a:rPr lang="es-GT" smtClean="0"/>
               <a:t>7/08/2026</a:t>
             </a:fld>
@@ -277,13 +314,7 @@
       </p:sp>
       <p:sp>
         <p:nvSpPr>
-          <p:cNvPr id="5" name="Marcador de pie de página 4">
-            <a:extLst>
-              <a:ext uri="{FF2B5EF4-FFF2-40B4-BE49-F238E27FC236}">
-                <a16:creationId xmlns:a16="http://schemas.microsoft.com/office/drawing/2014/main" id="{2D8866A4-71B8-A597-53A0-A7A0359997E7}"/>
-              </a:ext>
-            </a:extLst>
-          </p:cNvPr>
+          <p:cNvPr id="5" name="Footer Placeholder 4"/>
           <p:cNvSpPr>
             <a:spLocks noGrp="1"/>
           </p:cNvSpPr>
@@ -302,13 +333,7 @@
       </p:sp>
       <p:sp>
         <p:nvSpPr>
-          <p:cNvPr id="6" name="Marcador de número de diapositiva 5">
-            <a:extLst>
-              <a:ext uri="{FF2B5EF4-FFF2-40B4-BE49-F238E27FC236}">
-                <a16:creationId xmlns:a16="http://schemas.microsoft.com/office/drawing/2014/main" id="{8EBBA461-C792-551E-2DA4-31E8A26E30F8}"/>
-              </a:ext>
-            </a:extLst>
-          </p:cNvPr>
+          <p:cNvPr id="6" name="Slide Number Placeholder 5"/>
           <p:cNvSpPr>
             <a:spLocks noGrp="1"/>
           </p:cNvSpPr>
@@ -321,7 +346,7 @@
           <a:bodyPr/>
           <a:lstStyle/>
           <a:p>
-            <a:fld id="{A2FD0973-D230-4D6C-8B64-DA38D2160AAC}" type="slidenum">
+            <a:fld id="{F5A1B9F3-D9AB-4E80-BD88-E1CDBD879FEC}" type="slidenum">
               <a:rPr lang="es-GT" smtClean="0"/>
               <a:t>‹Nº›</a:t>
             </a:fld>
@@ -332,7 +357,7 @@
     </p:spTree>
     <p:extLst>
       <p:ext uri="{BB962C8B-B14F-4D97-AF65-F5344CB8AC3E}">
-        <p14:creationId xmlns:p14="http://schemas.microsoft.com/office/powerpoint/2010/main" val="4287112997"/>
+        <p14:creationId xmlns:p14="http://schemas.microsoft.com/office/powerpoint/2010/main" val="1950713687"/>
       </p:ext>
     </p:extLst>
   </p:cSld>
@@ -343,6 +368,2572 @@
 </file>
 
 <file path=ppt/slideLayouts/slideLayout10.xml><?xml version="1.0" encoding="utf-8"?>
+<p:sldLayout xmlns:a="http://schemas.openxmlformats.org/drawingml/2006/main" xmlns:r="http://schemas.openxmlformats.org/officeDocument/2006/relationships" xmlns:p="http://schemas.openxmlformats.org/presentationml/2006/main" preserve="1">
+  <p:cSld name="Imagen panorámica con descripción">
+    <p:spTree>
+      <p:nvGrpSpPr>
+        <p:cNvPr id="1" name=""/>
+        <p:cNvGrpSpPr/>
+        <p:nvPr/>
+      </p:nvGrpSpPr>
+      <p:grpSpPr>
+        <a:xfrm>
+          <a:off x="0" y="0"/>
+          <a:ext cx="0" cy="0"/>
+          <a:chOff x="0" y="0"/>
+          <a:chExt cx="0" cy="0"/>
+        </a:xfrm>
+      </p:grpSpPr>
+      <p:sp>
+        <p:nvSpPr>
+          <p:cNvPr id="2" name="Title 1"/>
+          <p:cNvSpPr>
+            <a:spLocks noGrp="1"/>
+          </p:cNvSpPr>
+          <p:nvPr>
+            <p:ph type="title"/>
+          </p:nvPr>
+        </p:nvSpPr>
+        <p:spPr>
+          <a:xfrm>
+            <a:off x="692974" y="3840470"/>
+            <a:ext cx="5295394" cy="453390"/>
+          </a:xfrm>
+        </p:spPr>
+        <p:txBody>
+          <a:bodyPr anchor="b">
+            <a:normAutofit/>
+          </a:bodyPr>
+          <a:lstStyle>
+            <a:lvl1pPr algn="l">
+              <a:defRPr sz="1440" b="0"/>
+            </a:lvl1pPr>
+          </a:lstStyle>
+          <a:p>
+            <a:r>
+              <a:rPr lang="es-ES"/>
+              <a:t>Haga clic para modificar el estilo de título del patrón</a:t>
+            </a:r>
+            <a:endParaRPr lang="en-US" dirty="0"/>
+          </a:p>
+        </p:txBody>
+      </p:sp>
+      <p:sp>
+        <p:nvSpPr>
+          <p:cNvPr id="3" name="Picture Placeholder 2"/>
+          <p:cNvSpPr>
+            <a:spLocks noGrp="1" noChangeAspect="1"/>
+          </p:cNvSpPr>
+          <p:nvPr>
+            <p:ph type="pic" idx="1"/>
+          </p:nvPr>
+        </p:nvSpPr>
+        <p:spPr>
+          <a:xfrm>
+            <a:off x="692973" y="548640"/>
+            <a:ext cx="5295395" cy="2912533"/>
+          </a:xfrm>
+          <a:prstGeom prst="roundRect">
+            <a:avLst>
+              <a:gd name="adj" fmla="val 1858"/>
+            </a:avLst>
+          </a:prstGeom>
+          <a:effectLst>
+            <a:outerShdw blurRad="50800" dist="50800" dir="5400000" algn="tl" rotWithShape="0">
+              <a:srgbClr val="000000">
+                <a:alpha val="43000"/>
+              </a:srgbClr>
+            </a:outerShdw>
+          </a:effectLst>
+        </p:spPr>
+        <p:txBody>
+          <a:bodyPr anchor="t">
+            <a:normAutofit/>
+          </a:bodyPr>
+          <a:lstStyle>
+            <a:lvl1pPr marL="0" indent="0" algn="ctr">
+              <a:buNone/>
+              <a:defRPr sz="960"/>
+            </a:lvl1pPr>
+            <a:lvl2pPr marL="274320" indent="0">
+              <a:buNone/>
+              <a:defRPr sz="960"/>
+            </a:lvl2pPr>
+            <a:lvl3pPr marL="548640" indent="0">
+              <a:buNone/>
+              <a:defRPr sz="960"/>
+            </a:lvl3pPr>
+            <a:lvl4pPr marL="822960" indent="0">
+              <a:buNone/>
+              <a:defRPr sz="960"/>
+            </a:lvl4pPr>
+            <a:lvl5pPr marL="1097280" indent="0">
+              <a:buNone/>
+              <a:defRPr sz="960"/>
+            </a:lvl5pPr>
+            <a:lvl6pPr marL="1371600" indent="0">
+              <a:buNone/>
+              <a:defRPr sz="960"/>
+            </a:lvl6pPr>
+            <a:lvl7pPr marL="1645920" indent="0">
+              <a:buNone/>
+              <a:defRPr sz="960"/>
+            </a:lvl7pPr>
+            <a:lvl8pPr marL="1920240" indent="0">
+              <a:buNone/>
+              <a:defRPr sz="960"/>
+            </a:lvl8pPr>
+            <a:lvl9pPr marL="2194560" indent="0">
+              <a:buNone/>
+              <a:defRPr sz="960"/>
+            </a:lvl9pPr>
+          </a:lstStyle>
+          <a:p>
+            <a:r>
+              <a:rPr lang="es-ES"/>
+              <a:t>Haga clic en el icono para agregar una imagen</a:t>
+            </a:r>
+            <a:endParaRPr lang="en-US" dirty="0"/>
+          </a:p>
+        </p:txBody>
+      </p:sp>
+      <p:sp>
+        <p:nvSpPr>
+          <p:cNvPr id="4" name="Text Placeholder 3"/>
+          <p:cNvSpPr>
+            <a:spLocks noGrp="1"/>
+          </p:cNvSpPr>
+          <p:nvPr>
+            <p:ph type="body" sz="half" idx="2"/>
+          </p:nvPr>
+        </p:nvSpPr>
+        <p:spPr>
+          <a:xfrm>
+            <a:off x="692973" y="4293860"/>
+            <a:ext cx="5295394" cy="394970"/>
+          </a:xfrm>
+        </p:spPr>
+        <p:txBody>
+          <a:bodyPr>
+            <a:normAutofit/>
+          </a:bodyPr>
+          <a:lstStyle>
+            <a:lvl1pPr marL="0" indent="0">
+              <a:buNone/>
+              <a:defRPr sz="720"/>
+            </a:lvl1pPr>
+            <a:lvl2pPr marL="274320" indent="0">
+              <a:buNone/>
+              <a:defRPr sz="720"/>
+            </a:lvl2pPr>
+            <a:lvl3pPr marL="548640" indent="0">
+              <a:buNone/>
+              <a:defRPr sz="600"/>
+            </a:lvl3pPr>
+            <a:lvl4pPr marL="822960" indent="0">
+              <a:buNone/>
+              <a:defRPr sz="540"/>
+            </a:lvl4pPr>
+            <a:lvl5pPr marL="1097280" indent="0">
+              <a:buNone/>
+              <a:defRPr sz="540"/>
+            </a:lvl5pPr>
+            <a:lvl6pPr marL="1371600" indent="0">
+              <a:buNone/>
+              <a:defRPr sz="540"/>
+            </a:lvl6pPr>
+            <a:lvl7pPr marL="1645920" indent="0">
+              <a:buNone/>
+              <a:defRPr sz="540"/>
+            </a:lvl7pPr>
+            <a:lvl8pPr marL="1920240" indent="0">
+              <a:buNone/>
+              <a:defRPr sz="540"/>
+            </a:lvl8pPr>
+            <a:lvl9pPr marL="2194560" indent="0">
+              <a:buNone/>
+              <a:defRPr sz="540"/>
+            </a:lvl9pPr>
+          </a:lstStyle>
+          <a:p>
+            <a:pPr lvl="0"/>
+            <a:r>
+              <a:rPr lang="es-ES"/>
+              <a:t>Haga clic para modificar los estilos de texto del patrón</a:t>
+            </a:r>
+          </a:p>
+        </p:txBody>
+      </p:sp>
+      <p:sp>
+        <p:nvSpPr>
+          <p:cNvPr id="5" name="Date Placeholder 4"/>
+          <p:cNvSpPr>
+            <a:spLocks noGrp="1"/>
+          </p:cNvSpPr>
+          <p:nvPr>
+            <p:ph type="dt" sz="half" idx="10"/>
+          </p:nvPr>
+        </p:nvSpPr>
+        <p:spPr/>
+        <p:txBody>
+          <a:bodyPr/>
+          <a:lstStyle/>
+          <a:p>
+            <a:fld id="{E03C0CA2-AF3B-45DA-B95C-F3B757DF4AEA}" type="datetimeFigureOut">
+              <a:rPr lang="es-GT" smtClean="0"/>
+              <a:t>7/08/2026</a:t>
+            </a:fld>
+            <a:endParaRPr lang="es-GT"/>
+          </a:p>
+        </p:txBody>
+      </p:sp>
+      <p:sp>
+        <p:nvSpPr>
+          <p:cNvPr id="6" name="Footer Placeholder 5"/>
+          <p:cNvSpPr>
+            <a:spLocks noGrp="1"/>
+          </p:cNvSpPr>
+          <p:nvPr>
+            <p:ph type="ftr" sz="quarter" idx="11"/>
+          </p:nvPr>
+        </p:nvSpPr>
+        <p:spPr/>
+        <p:txBody>
+          <a:bodyPr/>
+          <a:lstStyle/>
+          <a:p>
+            <a:endParaRPr lang="es-GT"/>
+          </a:p>
+        </p:txBody>
+      </p:sp>
+      <p:sp>
+        <p:nvSpPr>
+          <p:cNvPr id="7" name="Slide Number Placeholder 6"/>
+          <p:cNvSpPr>
+            <a:spLocks noGrp="1"/>
+          </p:cNvSpPr>
+          <p:nvPr>
+            <p:ph type="sldNum" sz="quarter" idx="12"/>
+          </p:nvPr>
+        </p:nvSpPr>
+        <p:spPr/>
+        <p:txBody>
+          <a:bodyPr/>
+          <a:lstStyle/>
+          <a:p>
+            <a:fld id="{F5A1B9F3-D9AB-4E80-BD88-E1CDBD879FEC}" type="slidenum">
+              <a:rPr lang="es-GT" smtClean="0"/>
+              <a:t>‹Nº›</a:t>
+            </a:fld>
+            <a:endParaRPr lang="es-GT"/>
+          </a:p>
+        </p:txBody>
+      </p:sp>
+    </p:spTree>
+    <p:extLst>
+      <p:ext uri="{BB962C8B-B14F-4D97-AF65-F5344CB8AC3E}">
+        <p14:creationId xmlns:p14="http://schemas.microsoft.com/office/powerpoint/2010/main" val="2263406366"/>
+      </p:ext>
+    </p:extLst>
+  </p:cSld>
+  <p:clrMapOvr>
+    <a:masterClrMapping/>
+  </p:clrMapOvr>
+</p:sldLayout>
+</file>
+
+<file path=ppt/slideLayouts/slideLayout11.xml><?xml version="1.0" encoding="utf-8"?>
+<p:sldLayout xmlns:a="http://schemas.openxmlformats.org/drawingml/2006/main" xmlns:r="http://schemas.openxmlformats.org/officeDocument/2006/relationships" xmlns:p="http://schemas.openxmlformats.org/presentationml/2006/main" preserve="1">
+  <p:cSld name="Título y descripción">
+    <p:spTree>
+      <p:nvGrpSpPr>
+        <p:cNvPr id="1" name=""/>
+        <p:cNvGrpSpPr/>
+        <p:nvPr/>
+      </p:nvGrpSpPr>
+      <p:grpSpPr>
+        <a:xfrm>
+          <a:off x="0" y="0"/>
+          <a:ext cx="0" cy="0"/>
+          <a:chOff x="0" y="0"/>
+          <a:chExt cx="0" cy="0"/>
+        </a:xfrm>
+      </p:grpSpPr>
+      <p:sp>
+        <p:nvSpPr>
+          <p:cNvPr id="2" name="Title 1"/>
+          <p:cNvSpPr>
+            <a:spLocks noGrp="1"/>
+          </p:cNvSpPr>
+          <p:nvPr>
+            <p:ph type="title"/>
+          </p:nvPr>
+        </p:nvSpPr>
+        <p:spPr>
+          <a:xfrm>
+            <a:off x="692973" y="1158240"/>
+            <a:ext cx="5295395" cy="1584960"/>
+          </a:xfrm>
+        </p:spPr>
+        <p:txBody>
+          <a:bodyPr/>
+          <a:lstStyle>
+            <a:lvl1pPr>
+              <a:defRPr sz="2880"/>
+            </a:lvl1pPr>
+          </a:lstStyle>
+          <a:p>
+            <a:r>
+              <a:rPr lang="es-ES"/>
+              <a:t>Haga clic para modificar el estilo de título del patrón</a:t>
+            </a:r>
+            <a:endParaRPr lang="en-US" dirty="0"/>
+          </a:p>
+        </p:txBody>
+      </p:sp>
+      <p:sp>
+        <p:nvSpPr>
+          <p:cNvPr id="8" name="Text Placeholder 3"/>
+          <p:cNvSpPr>
+            <a:spLocks noGrp="1"/>
+          </p:cNvSpPr>
+          <p:nvPr>
+            <p:ph type="body" sz="half" idx="2"/>
+          </p:nvPr>
+        </p:nvSpPr>
+        <p:spPr>
+          <a:xfrm>
+            <a:off x="692973" y="2926080"/>
+            <a:ext cx="5295395" cy="1889760"/>
+          </a:xfrm>
+        </p:spPr>
+        <p:txBody>
+          <a:bodyPr anchor="ctr">
+            <a:normAutofit/>
+          </a:bodyPr>
+          <a:lstStyle>
+            <a:lvl1pPr marL="0" indent="0">
+              <a:buNone/>
+              <a:defRPr sz="1080"/>
+            </a:lvl1pPr>
+            <a:lvl2pPr marL="274320" indent="0">
+              <a:buNone/>
+              <a:defRPr sz="720"/>
+            </a:lvl2pPr>
+            <a:lvl3pPr marL="548640" indent="0">
+              <a:buNone/>
+              <a:defRPr sz="600"/>
+            </a:lvl3pPr>
+            <a:lvl4pPr marL="822960" indent="0">
+              <a:buNone/>
+              <a:defRPr sz="540"/>
+            </a:lvl4pPr>
+            <a:lvl5pPr marL="1097280" indent="0">
+              <a:buNone/>
+              <a:defRPr sz="540"/>
+            </a:lvl5pPr>
+            <a:lvl6pPr marL="1371600" indent="0">
+              <a:buNone/>
+              <a:defRPr sz="540"/>
+            </a:lvl6pPr>
+            <a:lvl7pPr marL="1645920" indent="0">
+              <a:buNone/>
+              <a:defRPr sz="540"/>
+            </a:lvl7pPr>
+            <a:lvl8pPr marL="1920240" indent="0">
+              <a:buNone/>
+              <a:defRPr sz="540"/>
+            </a:lvl8pPr>
+            <a:lvl9pPr marL="2194560" indent="0">
+              <a:buNone/>
+              <a:defRPr sz="540"/>
+            </a:lvl9pPr>
+          </a:lstStyle>
+          <a:p>
+            <a:pPr lvl="0"/>
+            <a:r>
+              <a:rPr lang="es-ES"/>
+              <a:t>Haga clic para modificar los estilos de texto del patrón</a:t>
+            </a:r>
+          </a:p>
+        </p:txBody>
+      </p:sp>
+      <p:sp>
+        <p:nvSpPr>
+          <p:cNvPr id="4" name="Date Placeholder 3"/>
+          <p:cNvSpPr>
+            <a:spLocks noGrp="1"/>
+          </p:cNvSpPr>
+          <p:nvPr>
+            <p:ph type="dt" sz="half" idx="10"/>
+          </p:nvPr>
+        </p:nvSpPr>
+        <p:spPr/>
+        <p:txBody>
+          <a:bodyPr/>
+          <a:lstStyle/>
+          <a:p>
+            <a:fld id="{E03C0CA2-AF3B-45DA-B95C-F3B757DF4AEA}" type="datetimeFigureOut">
+              <a:rPr lang="es-GT" smtClean="0"/>
+              <a:t>7/08/2026</a:t>
+            </a:fld>
+            <a:endParaRPr lang="es-GT"/>
+          </a:p>
+        </p:txBody>
+      </p:sp>
+      <p:sp>
+        <p:nvSpPr>
+          <p:cNvPr id="5" name="Footer Placeholder 4"/>
+          <p:cNvSpPr>
+            <a:spLocks noGrp="1"/>
+          </p:cNvSpPr>
+          <p:nvPr>
+            <p:ph type="ftr" sz="quarter" idx="11"/>
+          </p:nvPr>
+        </p:nvSpPr>
+        <p:spPr/>
+        <p:txBody>
+          <a:bodyPr/>
+          <a:lstStyle/>
+          <a:p>
+            <a:endParaRPr lang="es-GT"/>
+          </a:p>
+        </p:txBody>
+      </p:sp>
+      <p:sp>
+        <p:nvSpPr>
+          <p:cNvPr id="6" name="Slide Number Placeholder 5"/>
+          <p:cNvSpPr>
+            <a:spLocks noGrp="1"/>
+          </p:cNvSpPr>
+          <p:nvPr>
+            <p:ph type="sldNum" sz="quarter" idx="12"/>
+          </p:nvPr>
+        </p:nvSpPr>
+        <p:spPr/>
+        <p:txBody>
+          <a:bodyPr/>
+          <a:lstStyle/>
+          <a:p>
+            <a:fld id="{F5A1B9F3-D9AB-4E80-BD88-E1CDBD879FEC}" type="slidenum">
+              <a:rPr lang="es-GT" smtClean="0"/>
+              <a:t>‹Nº›</a:t>
+            </a:fld>
+            <a:endParaRPr lang="es-GT"/>
+          </a:p>
+        </p:txBody>
+      </p:sp>
+    </p:spTree>
+    <p:extLst>
+      <p:ext uri="{BB962C8B-B14F-4D97-AF65-F5344CB8AC3E}">
+        <p14:creationId xmlns:p14="http://schemas.microsoft.com/office/powerpoint/2010/main" val="1805114959"/>
+      </p:ext>
+    </p:extLst>
+  </p:cSld>
+  <p:clrMapOvr>
+    <a:masterClrMapping/>
+  </p:clrMapOvr>
+</p:sldLayout>
+</file>
+
+<file path=ppt/slideLayouts/slideLayout12.xml><?xml version="1.0" encoding="utf-8"?>
+<p:sldLayout xmlns:a="http://schemas.openxmlformats.org/drawingml/2006/main" xmlns:r="http://schemas.openxmlformats.org/officeDocument/2006/relationships" xmlns:p="http://schemas.openxmlformats.org/presentationml/2006/main" preserve="1">
+  <p:cSld name="Cita con descripción">
+    <p:spTree>
+      <p:nvGrpSpPr>
+        <p:cNvPr id="1" name=""/>
+        <p:cNvGrpSpPr/>
+        <p:nvPr/>
+      </p:nvGrpSpPr>
+      <p:grpSpPr>
+        <a:xfrm>
+          <a:off x="0" y="0"/>
+          <a:ext cx="0" cy="0"/>
+          <a:chOff x="0" y="0"/>
+          <a:chExt cx="0" cy="0"/>
+        </a:xfrm>
+      </p:grpSpPr>
+      <p:sp>
+        <p:nvSpPr>
+          <p:cNvPr id="2" name="Title 1"/>
+          <p:cNvSpPr>
+            <a:spLocks noGrp="1"/>
+          </p:cNvSpPr>
+          <p:nvPr>
+            <p:ph type="title"/>
+          </p:nvPr>
+        </p:nvSpPr>
+        <p:spPr>
+          <a:xfrm>
+            <a:off x="944881" y="1158240"/>
+            <a:ext cx="4799589" cy="1858699"/>
+          </a:xfrm>
+        </p:spPr>
+        <p:txBody>
+          <a:bodyPr/>
+          <a:lstStyle>
+            <a:lvl1pPr>
+              <a:defRPr sz="2880"/>
+            </a:lvl1pPr>
+          </a:lstStyle>
+          <a:p>
+            <a:r>
+              <a:rPr lang="es-ES"/>
+              <a:t>Haga clic para modificar el estilo de título del patrón</a:t>
+            </a:r>
+            <a:endParaRPr lang="en-US" dirty="0"/>
+          </a:p>
+        </p:txBody>
+      </p:sp>
+      <p:sp>
+        <p:nvSpPr>
+          <p:cNvPr id="11" name="Text Placeholder 3"/>
+          <p:cNvSpPr>
+            <a:spLocks noGrp="1"/>
+          </p:cNvSpPr>
+          <p:nvPr>
+            <p:ph type="body" sz="half" idx="14"/>
+          </p:nvPr>
+        </p:nvSpPr>
+        <p:spPr>
+          <a:xfrm>
+            <a:off x="1158241" y="3016939"/>
+            <a:ext cx="4367789" cy="273739"/>
+          </a:xfrm>
+        </p:spPr>
+        <p:txBody>
+          <a:bodyPr vert="horz" lIns="91440" tIns="45720" rIns="91440" bIns="45720" rtlCol="0" anchor="t">
+            <a:normAutofit/>
+          </a:bodyPr>
+          <a:lstStyle>
+            <a:lvl1pPr marL="0" indent="0">
+              <a:buNone/>
+              <a:defRPr lang="en-US" sz="840" b="0" i="0" kern="1200" cap="small" dirty="0">
+                <a:solidFill>
+                  <a:schemeClr val="bg2">
+                    <a:lumMod val="40000"/>
+                    <a:lumOff val="60000"/>
+                  </a:schemeClr>
+                </a:solidFill>
+                <a:latin typeface="+mj-lt"/>
+                <a:ea typeface="+mj-ea"/>
+                <a:cs typeface="+mj-cs"/>
+              </a:defRPr>
+            </a:lvl1pPr>
+            <a:lvl2pPr marL="274320" indent="0">
+              <a:buNone/>
+              <a:defRPr sz="720"/>
+            </a:lvl2pPr>
+            <a:lvl3pPr marL="548640" indent="0">
+              <a:buNone/>
+              <a:defRPr sz="600"/>
+            </a:lvl3pPr>
+            <a:lvl4pPr marL="822960" indent="0">
+              <a:buNone/>
+              <a:defRPr sz="540"/>
+            </a:lvl4pPr>
+            <a:lvl5pPr marL="1097280" indent="0">
+              <a:buNone/>
+              <a:defRPr sz="540"/>
+            </a:lvl5pPr>
+            <a:lvl6pPr marL="1371600" indent="0">
+              <a:buNone/>
+              <a:defRPr sz="540"/>
+            </a:lvl6pPr>
+            <a:lvl7pPr marL="1645920" indent="0">
+              <a:buNone/>
+              <a:defRPr sz="540"/>
+            </a:lvl7pPr>
+            <a:lvl8pPr marL="1920240" indent="0">
+              <a:buNone/>
+              <a:defRPr sz="540"/>
+            </a:lvl8pPr>
+            <a:lvl9pPr marL="2194560" indent="0">
+              <a:buNone/>
+              <a:defRPr sz="540"/>
+            </a:lvl9pPr>
+          </a:lstStyle>
+          <a:p>
+            <a:pPr marL="0" lvl="0" indent="0">
+              <a:buNone/>
+            </a:pPr>
+            <a:r>
+              <a:rPr lang="es-ES"/>
+              <a:t>Haga clic para modificar los estilos de texto del patrón</a:t>
+            </a:r>
+          </a:p>
+        </p:txBody>
+      </p:sp>
+      <p:sp>
+        <p:nvSpPr>
+          <p:cNvPr id="10" name="Text Placeholder 3"/>
+          <p:cNvSpPr>
+            <a:spLocks noGrp="1"/>
+          </p:cNvSpPr>
+          <p:nvPr>
+            <p:ph type="body" sz="half" idx="2"/>
+          </p:nvPr>
+        </p:nvSpPr>
+        <p:spPr>
+          <a:xfrm>
+            <a:off x="692973" y="3480526"/>
+            <a:ext cx="5295395" cy="1341120"/>
+          </a:xfrm>
+        </p:spPr>
+        <p:txBody>
+          <a:bodyPr anchor="ctr">
+            <a:normAutofit/>
+          </a:bodyPr>
+          <a:lstStyle>
+            <a:lvl1pPr marL="0" indent="0">
+              <a:buNone/>
+              <a:defRPr sz="1080"/>
+            </a:lvl1pPr>
+            <a:lvl2pPr marL="274320" indent="0">
+              <a:buNone/>
+              <a:defRPr sz="720"/>
+            </a:lvl2pPr>
+            <a:lvl3pPr marL="548640" indent="0">
+              <a:buNone/>
+              <a:defRPr sz="600"/>
+            </a:lvl3pPr>
+            <a:lvl4pPr marL="822960" indent="0">
+              <a:buNone/>
+              <a:defRPr sz="540"/>
+            </a:lvl4pPr>
+            <a:lvl5pPr marL="1097280" indent="0">
+              <a:buNone/>
+              <a:defRPr sz="540"/>
+            </a:lvl5pPr>
+            <a:lvl6pPr marL="1371600" indent="0">
+              <a:buNone/>
+              <a:defRPr sz="540"/>
+            </a:lvl6pPr>
+            <a:lvl7pPr marL="1645920" indent="0">
+              <a:buNone/>
+              <a:defRPr sz="540"/>
+            </a:lvl7pPr>
+            <a:lvl8pPr marL="1920240" indent="0">
+              <a:buNone/>
+              <a:defRPr sz="540"/>
+            </a:lvl8pPr>
+            <a:lvl9pPr marL="2194560" indent="0">
+              <a:buNone/>
+              <a:defRPr sz="540"/>
+            </a:lvl9pPr>
+          </a:lstStyle>
+          <a:p>
+            <a:pPr lvl="0"/>
+            <a:r>
+              <a:rPr lang="es-ES"/>
+              <a:t>Haga clic para modificar los estilos de texto del patrón</a:t>
+            </a:r>
+          </a:p>
+        </p:txBody>
+      </p:sp>
+      <p:sp>
+        <p:nvSpPr>
+          <p:cNvPr id="4" name="Date Placeholder 3"/>
+          <p:cNvSpPr>
+            <a:spLocks noGrp="1"/>
+          </p:cNvSpPr>
+          <p:nvPr>
+            <p:ph type="dt" sz="half" idx="10"/>
+          </p:nvPr>
+        </p:nvSpPr>
+        <p:spPr/>
+        <p:txBody>
+          <a:bodyPr/>
+          <a:lstStyle/>
+          <a:p>
+            <a:fld id="{E03C0CA2-AF3B-45DA-B95C-F3B757DF4AEA}" type="datetimeFigureOut">
+              <a:rPr lang="es-GT" smtClean="0"/>
+              <a:t>7/08/2026</a:t>
+            </a:fld>
+            <a:endParaRPr lang="es-GT"/>
+          </a:p>
+        </p:txBody>
+      </p:sp>
+      <p:sp>
+        <p:nvSpPr>
+          <p:cNvPr id="5" name="Footer Placeholder 4"/>
+          <p:cNvSpPr>
+            <a:spLocks noGrp="1"/>
+          </p:cNvSpPr>
+          <p:nvPr>
+            <p:ph type="ftr" sz="quarter" idx="11"/>
+          </p:nvPr>
+        </p:nvSpPr>
+        <p:spPr/>
+        <p:txBody>
+          <a:bodyPr/>
+          <a:lstStyle/>
+          <a:p>
+            <a:endParaRPr lang="es-GT"/>
+          </a:p>
+        </p:txBody>
+      </p:sp>
+      <p:sp>
+        <p:nvSpPr>
+          <p:cNvPr id="6" name="Slide Number Placeholder 5"/>
+          <p:cNvSpPr>
+            <a:spLocks noGrp="1"/>
+          </p:cNvSpPr>
+          <p:nvPr>
+            <p:ph type="sldNum" sz="quarter" idx="12"/>
+          </p:nvPr>
+        </p:nvSpPr>
+        <p:spPr/>
+        <p:txBody>
+          <a:bodyPr/>
+          <a:lstStyle/>
+          <a:p>
+            <a:fld id="{F5A1B9F3-D9AB-4E80-BD88-E1CDBD879FEC}" type="slidenum">
+              <a:rPr lang="es-GT" smtClean="0"/>
+              <a:t>‹Nº›</a:t>
+            </a:fld>
+            <a:endParaRPr lang="es-GT"/>
+          </a:p>
+        </p:txBody>
+      </p:sp>
+      <p:sp>
+        <p:nvSpPr>
+          <p:cNvPr id="12" name="TextBox 11"/>
+          <p:cNvSpPr txBox="1"/>
+          <p:nvPr/>
+        </p:nvSpPr>
+        <p:spPr>
+          <a:xfrm>
+            <a:off x="538977" y="777003"/>
+            <a:ext cx="481147" cy="1218795"/>
+          </a:xfrm>
+          <a:prstGeom prst="rect">
+            <a:avLst/>
+          </a:prstGeom>
+          <a:noFill/>
+        </p:spPr>
+        <p:txBody>
+          <a:bodyPr wrap="square" rtlCol="0">
+            <a:spAutoFit/>
+          </a:bodyPr>
+          <a:lstStyle>
+            <a:defPPr>
+              <a:defRPr lang="en-US"/>
+            </a:defPPr>
+            <a:lvl1pPr algn="r">
+              <a:defRPr sz="12200" b="0" i="0">
+                <a:solidFill>
+                  <a:schemeClr val="bg2">
+                    <a:lumMod val="40000"/>
+                    <a:lumOff val="60000"/>
+                  </a:schemeClr>
+                </a:solidFill>
+                <a:latin typeface="Arial"/>
+                <a:ea typeface="+mj-ea"/>
+                <a:cs typeface="+mj-cs"/>
+              </a:defRPr>
+            </a:lvl1pPr>
+          </a:lstStyle>
+          <a:p>
+            <a:pPr lvl="0"/>
+            <a:r>
+              <a:rPr lang="en-US" sz="7320" dirty="0"/>
+              <a:t>“</a:t>
+            </a:r>
+          </a:p>
+        </p:txBody>
+      </p:sp>
+      <p:sp>
+        <p:nvSpPr>
+          <p:cNvPr id="15" name="TextBox 14"/>
+          <p:cNvSpPr txBox="1"/>
+          <p:nvPr/>
+        </p:nvSpPr>
+        <p:spPr>
+          <a:xfrm>
+            <a:off x="5598294" y="2091030"/>
+            <a:ext cx="481147" cy="1218795"/>
+          </a:xfrm>
+          <a:prstGeom prst="rect">
+            <a:avLst/>
+          </a:prstGeom>
+          <a:noFill/>
+        </p:spPr>
+        <p:txBody>
+          <a:bodyPr wrap="square" rtlCol="0">
+            <a:spAutoFit/>
+          </a:bodyPr>
+          <a:lstStyle>
+            <a:defPPr>
+              <a:defRPr lang="en-US"/>
+            </a:defPPr>
+            <a:lvl1pPr algn="r">
+              <a:defRPr sz="12200" b="0" i="0">
+                <a:solidFill>
+                  <a:schemeClr val="bg2">
+                    <a:lumMod val="40000"/>
+                    <a:lumOff val="60000"/>
+                  </a:schemeClr>
+                </a:solidFill>
+                <a:latin typeface="Arial"/>
+                <a:ea typeface="+mj-ea"/>
+                <a:cs typeface="+mj-cs"/>
+              </a:defRPr>
+            </a:lvl1pPr>
+          </a:lstStyle>
+          <a:p>
+            <a:pPr lvl="0"/>
+            <a:r>
+              <a:rPr lang="en-US" sz="7320" dirty="0"/>
+              <a:t>”</a:t>
+            </a:r>
+          </a:p>
+        </p:txBody>
+      </p:sp>
+    </p:spTree>
+    <p:extLst>
+      <p:ext uri="{BB962C8B-B14F-4D97-AF65-F5344CB8AC3E}">
+        <p14:creationId xmlns:p14="http://schemas.microsoft.com/office/powerpoint/2010/main" val="3673488916"/>
+      </p:ext>
+    </p:extLst>
+  </p:cSld>
+  <p:clrMapOvr>
+    <a:masterClrMapping/>
+  </p:clrMapOvr>
+</p:sldLayout>
+</file>
+
+<file path=ppt/slideLayouts/slideLayout13.xml><?xml version="1.0" encoding="utf-8"?>
+<p:sldLayout xmlns:a="http://schemas.openxmlformats.org/drawingml/2006/main" xmlns:r="http://schemas.openxmlformats.org/officeDocument/2006/relationships" xmlns:p="http://schemas.openxmlformats.org/presentationml/2006/main" preserve="1">
+  <p:cSld name="Tarjeta de nombre">
+    <p:spTree>
+      <p:nvGrpSpPr>
+        <p:cNvPr id="1" name=""/>
+        <p:cNvGrpSpPr/>
+        <p:nvPr/>
+      </p:nvGrpSpPr>
+      <p:grpSpPr>
+        <a:xfrm>
+          <a:off x="0" y="0"/>
+          <a:ext cx="0" cy="0"/>
+          <a:chOff x="0" y="0"/>
+          <a:chExt cx="0" cy="0"/>
+        </a:xfrm>
+      </p:grpSpPr>
+      <p:sp>
+        <p:nvSpPr>
+          <p:cNvPr id="2" name="Title 1"/>
+          <p:cNvSpPr>
+            <a:spLocks noGrp="1"/>
+          </p:cNvSpPr>
+          <p:nvPr>
+            <p:ph type="title"/>
+          </p:nvPr>
+        </p:nvSpPr>
+        <p:spPr>
+          <a:xfrm>
+            <a:off x="692972" y="2499361"/>
+            <a:ext cx="5295396" cy="1322544"/>
+          </a:xfrm>
+        </p:spPr>
+        <p:txBody>
+          <a:bodyPr anchor="b"/>
+          <a:lstStyle>
+            <a:lvl1pPr algn="l">
+              <a:defRPr sz="2400" b="0" cap="none"/>
+            </a:lvl1pPr>
+          </a:lstStyle>
+          <a:p>
+            <a:r>
+              <a:rPr lang="es-ES"/>
+              <a:t>Haga clic para modificar el estilo de título del patrón</a:t>
+            </a:r>
+            <a:endParaRPr lang="en-US" dirty="0"/>
+          </a:p>
+        </p:txBody>
+      </p:sp>
+      <p:sp>
+        <p:nvSpPr>
+          <p:cNvPr id="3" name="Text Placeholder 2"/>
+          <p:cNvSpPr>
+            <a:spLocks noGrp="1"/>
+          </p:cNvSpPr>
+          <p:nvPr>
+            <p:ph type="body" idx="1"/>
+          </p:nvPr>
+        </p:nvSpPr>
+        <p:spPr>
+          <a:xfrm>
+            <a:off x="692973" y="3821905"/>
+            <a:ext cx="5295395" cy="688320"/>
+          </a:xfrm>
+        </p:spPr>
+        <p:txBody>
+          <a:bodyPr anchor="t"/>
+          <a:lstStyle>
+            <a:lvl1pPr marL="0" indent="0" algn="l">
+              <a:buNone/>
+              <a:defRPr sz="1200" cap="none">
+                <a:solidFill>
+                  <a:schemeClr val="bg2">
+                    <a:lumMod val="40000"/>
+                    <a:lumOff val="60000"/>
+                  </a:schemeClr>
+                </a:solidFill>
+              </a:defRPr>
+            </a:lvl1pPr>
+            <a:lvl2pPr marL="274320" indent="0">
+              <a:buNone/>
+              <a:defRPr sz="1080">
+                <a:solidFill>
+                  <a:schemeClr val="tx1">
+                    <a:tint val="75000"/>
+                  </a:schemeClr>
+                </a:solidFill>
+              </a:defRPr>
+            </a:lvl2pPr>
+            <a:lvl3pPr marL="548640" indent="0">
+              <a:buNone/>
+              <a:defRPr sz="960">
+                <a:solidFill>
+                  <a:schemeClr val="tx1">
+                    <a:tint val="75000"/>
+                  </a:schemeClr>
+                </a:solidFill>
+              </a:defRPr>
+            </a:lvl3pPr>
+            <a:lvl4pPr marL="822960" indent="0">
+              <a:buNone/>
+              <a:defRPr sz="840">
+                <a:solidFill>
+                  <a:schemeClr val="tx1">
+                    <a:tint val="75000"/>
+                  </a:schemeClr>
+                </a:solidFill>
+              </a:defRPr>
+            </a:lvl4pPr>
+            <a:lvl5pPr marL="1097280" indent="0">
+              <a:buNone/>
+              <a:defRPr sz="840">
+                <a:solidFill>
+                  <a:schemeClr val="tx1">
+                    <a:tint val="75000"/>
+                  </a:schemeClr>
+                </a:solidFill>
+              </a:defRPr>
+            </a:lvl5pPr>
+            <a:lvl6pPr marL="1371600" indent="0">
+              <a:buNone/>
+              <a:defRPr sz="840">
+                <a:solidFill>
+                  <a:schemeClr val="tx1">
+                    <a:tint val="75000"/>
+                  </a:schemeClr>
+                </a:solidFill>
+              </a:defRPr>
+            </a:lvl6pPr>
+            <a:lvl7pPr marL="1645920" indent="0">
+              <a:buNone/>
+              <a:defRPr sz="840">
+                <a:solidFill>
+                  <a:schemeClr val="tx1">
+                    <a:tint val="75000"/>
+                  </a:schemeClr>
+                </a:solidFill>
+              </a:defRPr>
+            </a:lvl7pPr>
+            <a:lvl8pPr marL="1920240" indent="0">
+              <a:buNone/>
+              <a:defRPr sz="840">
+                <a:solidFill>
+                  <a:schemeClr val="tx1">
+                    <a:tint val="75000"/>
+                  </a:schemeClr>
+                </a:solidFill>
+              </a:defRPr>
+            </a:lvl8pPr>
+            <a:lvl9pPr marL="2194560" indent="0">
+              <a:buNone/>
+              <a:defRPr sz="840">
+                <a:solidFill>
+                  <a:schemeClr val="tx1">
+                    <a:tint val="75000"/>
+                  </a:schemeClr>
+                </a:solidFill>
+              </a:defRPr>
+            </a:lvl9pPr>
+          </a:lstStyle>
+          <a:p>
+            <a:pPr lvl="0"/>
+            <a:r>
+              <a:rPr lang="es-ES"/>
+              <a:t>Haga clic para modificar los estilos de texto del patrón</a:t>
+            </a:r>
+          </a:p>
+        </p:txBody>
+      </p:sp>
+      <p:sp>
+        <p:nvSpPr>
+          <p:cNvPr id="4" name="Date Placeholder 3"/>
+          <p:cNvSpPr>
+            <a:spLocks noGrp="1"/>
+          </p:cNvSpPr>
+          <p:nvPr>
+            <p:ph type="dt" sz="half" idx="10"/>
+          </p:nvPr>
+        </p:nvSpPr>
+        <p:spPr/>
+        <p:txBody>
+          <a:bodyPr/>
+          <a:lstStyle/>
+          <a:p>
+            <a:fld id="{E03C0CA2-AF3B-45DA-B95C-F3B757DF4AEA}" type="datetimeFigureOut">
+              <a:rPr lang="es-GT" smtClean="0"/>
+              <a:t>7/08/2026</a:t>
+            </a:fld>
+            <a:endParaRPr lang="es-GT"/>
+          </a:p>
+        </p:txBody>
+      </p:sp>
+      <p:sp>
+        <p:nvSpPr>
+          <p:cNvPr id="5" name="Footer Placeholder 4"/>
+          <p:cNvSpPr>
+            <a:spLocks noGrp="1"/>
+          </p:cNvSpPr>
+          <p:nvPr>
+            <p:ph type="ftr" sz="quarter" idx="11"/>
+          </p:nvPr>
+        </p:nvSpPr>
+        <p:spPr/>
+        <p:txBody>
+          <a:bodyPr/>
+          <a:lstStyle/>
+          <a:p>
+            <a:endParaRPr lang="es-GT"/>
+          </a:p>
+        </p:txBody>
+      </p:sp>
+      <p:sp>
+        <p:nvSpPr>
+          <p:cNvPr id="6" name="Slide Number Placeholder 5"/>
+          <p:cNvSpPr>
+            <a:spLocks noGrp="1"/>
+          </p:cNvSpPr>
+          <p:nvPr>
+            <p:ph type="sldNum" sz="quarter" idx="12"/>
+          </p:nvPr>
+        </p:nvSpPr>
+        <p:spPr/>
+        <p:txBody>
+          <a:bodyPr/>
+          <a:lstStyle/>
+          <a:p>
+            <a:fld id="{F5A1B9F3-D9AB-4E80-BD88-E1CDBD879FEC}" type="slidenum">
+              <a:rPr lang="es-GT" smtClean="0"/>
+              <a:t>‹Nº›</a:t>
+            </a:fld>
+            <a:endParaRPr lang="es-GT"/>
+          </a:p>
+        </p:txBody>
+      </p:sp>
+    </p:spTree>
+    <p:extLst>
+      <p:ext uri="{BB962C8B-B14F-4D97-AF65-F5344CB8AC3E}">
+        <p14:creationId xmlns:p14="http://schemas.microsoft.com/office/powerpoint/2010/main" val="4188680481"/>
+      </p:ext>
+    </p:extLst>
+  </p:cSld>
+  <p:clrMapOvr>
+    <a:masterClrMapping/>
+  </p:clrMapOvr>
+</p:sldLayout>
+</file>
+
+<file path=ppt/slideLayouts/slideLayout14.xml><?xml version="1.0" encoding="utf-8"?>
+<p:sldLayout xmlns:a="http://schemas.openxmlformats.org/drawingml/2006/main" xmlns:r="http://schemas.openxmlformats.org/officeDocument/2006/relationships" xmlns:p="http://schemas.openxmlformats.org/presentationml/2006/main" preserve="1">
+  <p:cSld name="Columna 3">
+    <p:spTree>
+      <p:nvGrpSpPr>
+        <p:cNvPr id="1" name=""/>
+        <p:cNvGrpSpPr/>
+        <p:nvPr/>
+      </p:nvGrpSpPr>
+      <p:grpSpPr>
+        <a:xfrm>
+          <a:off x="0" y="0"/>
+          <a:ext cx="0" cy="0"/>
+          <a:chOff x="0" y="0"/>
+          <a:chExt cx="0" cy="0"/>
+        </a:xfrm>
+      </p:grpSpPr>
+      <p:sp>
+        <p:nvSpPr>
+          <p:cNvPr id="2" name="Title 1"/>
+          <p:cNvSpPr>
+            <a:spLocks noGrp="1"/>
+          </p:cNvSpPr>
+          <p:nvPr>
+            <p:ph type="title"/>
+          </p:nvPr>
+        </p:nvSpPr>
+        <p:spPr/>
+        <p:txBody>
+          <a:bodyPr/>
+          <a:lstStyle>
+            <a:lvl1pPr>
+              <a:defRPr sz="2520"/>
+            </a:lvl1pPr>
+          </a:lstStyle>
+          <a:p>
+            <a:r>
+              <a:rPr lang="es-ES"/>
+              <a:t>Haga clic para modificar el estilo de título del patrón</a:t>
+            </a:r>
+            <a:endParaRPr lang="en-US" dirty="0"/>
+          </a:p>
+        </p:txBody>
+      </p:sp>
+      <p:sp>
+        <p:nvSpPr>
+          <p:cNvPr id="3" name="Text Placeholder 2"/>
+          <p:cNvSpPr>
+            <a:spLocks noGrp="1"/>
+          </p:cNvSpPr>
+          <p:nvPr>
+            <p:ph type="body" idx="1"/>
+          </p:nvPr>
+        </p:nvSpPr>
+        <p:spPr>
+          <a:xfrm>
+            <a:off x="379768" y="1584960"/>
+            <a:ext cx="1768120" cy="461010"/>
+          </a:xfrm>
+        </p:spPr>
+        <p:txBody>
+          <a:bodyPr anchor="b">
+            <a:noAutofit/>
+          </a:bodyPr>
+          <a:lstStyle>
+            <a:lvl1pPr marL="0" indent="0">
+              <a:buNone/>
+              <a:defRPr sz="1440" b="0">
+                <a:solidFill>
+                  <a:schemeClr val="bg2">
+                    <a:lumMod val="40000"/>
+                    <a:lumOff val="60000"/>
+                  </a:schemeClr>
+                </a:solidFill>
+              </a:defRPr>
+            </a:lvl1pPr>
+            <a:lvl2pPr marL="274320" indent="0">
+              <a:buNone/>
+              <a:defRPr sz="1200" b="1"/>
+            </a:lvl2pPr>
+            <a:lvl3pPr marL="548640" indent="0">
+              <a:buNone/>
+              <a:defRPr sz="1080" b="1"/>
+            </a:lvl3pPr>
+            <a:lvl4pPr marL="822960" indent="0">
+              <a:buNone/>
+              <a:defRPr sz="960" b="1"/>
+            </a:lvl4pPr>
+            <a:lvl5pPr marL="1097280" indent="0">
+              <a:buNone/>
+              <a:defRPr sz="960" b="1"/>
+            </a:lvl5pPr>
+            <a:lvl6pPr marL="1371600" indent="0">
+              <a:buNone/>
+              <a:defRPr sz="960" b="1"/>
+            </a:lvl6pPr>
+            <a:lvl7pPr marL="1645920" indent="0">
+              <a:buNone/>
+              <a:defRPr sz="960" b="1"/>
+            </a:lvl7pPr>
+            <a:lvl8pPr marL="1920240" indent="0">
+              <a:buNone/>
+              <a:defRPr sz="960" b="1"/>
+            </a:lvl8pPr>
+            <a:lvl9pPr marL="2194560" indent="0">
+              <a:buNone/>
+              <a:defRPr sz="960" b="1"/>
+            </a:lvl9pPr>
+          </a:lstStyle>
+          <a:p>
+            <a:pPr lvl="0"/>
+            <a:r>
+              <a:rPr lang="es-ES"/>
+              <a:t>Haga clic para modificar los estilos de texto del patrón</a:t>
+            </a:r>
+          </a:p>
+        </p:txBody>
+      </p:sp>
+      <p:sp>
+        <p:nvSpPr>
+          <p:cNvPr id="16" name="Text Placeholder 3"/>
+          <p:cNvSpPr>
+            <a:spLocks noGrp="1"/>
+          </p:cNvSpPr>
+          <p:nvPr>
+            <p:ph type="body" sz="half" idx="15"/>
+          </p:nvPr>
+        </p:nvSpPr>
+        <p:spPr>
+          <a:xfrm>
+            <a:off x="391478" y="2133600"/>
+            <a:ext cx="1756410" cy="2871470"/>
+          </a:xfrm>
+        </p:spPr>
+        <p:txBody>
+          <a:bodyPr anchor="t">
+            <a:normAutofit/>
+          </a:bodyPr>
+          <a:lstStyle>
+            <a:lvl1pPr marL="0" indent="0">
+              <a:buNone/>
+              <a:defRPr sz="840"/>
+            </a:lvl1pPr>
+            <a:lvl2pPr marL="274320" indent="0">
+              <a:buNone/>
+              <a:defRPr sz="720"/>
+            </a:lvl2pPr>
+            <a:lvl3pPr marL="548640" indent="0">
+              <a:buNone/>
+              <a:defRPr sz="600"/>
+            </a:lvl3pPr>
+            <a:lvl4pPr marL="822960" indent="0">
+              <a:buNone/>
+              <a:defRPr sz="540"/>
+            </a:lvl4pPr>
+            <a:lvl5pPr marL="1097280" indent="0">
+              <a:buNone/>
+              <a:defRPr sz="540"/>
+            </a:lvl5pPr>
+            <a:lvl6pPr marL="1371600" indent="0">
+              <a:buNone/>
+              <a:defRPr sz="540"/>
+            </a:lvl6pPr>
+            <a:lvl7pPr marL="1645920" indent="0">
+              <a:buNone/>
+              <a:defRPr sz="540"/>
+            </a:lvl7pPr>
+            <a:lvl8pPr marL="1920240" indent="0">
+              <a:buNone/>
+              <a:defRPr sz="540"/>
+            </a:lvl8pPr>
+            <a:lvl9pPr marL="2194560" indent="0">
+              <a:buNone/>
+              <a:defRPr sz="540"/>
+            </a:lvl9pPr>
+          </a:lstStyle>
+          <a:p>
+            <a:pPr lvl="0"/>
+            <a:r>
+              <a:rPr lang="es-ES"/>
+              <a:t>Haga clic para modificar los estilos de texto del patrón</a:t>
+            </a:r>
+          </a:p>
+        </p:txBody>
+      </p:sp>
+      <p:sp>
+        <p:nvSpPr>
+          <p:cNvPr id="5" name="Text Placeholder 4"/>
+          <p:cNvSpPr>
+            <a:spLocks noGrp="1"/>
+          </p:cNvSpPr>
+          <p:nvPr>
+            <p:ph type="body" sz="quarter" idx="3"/>
+          </p:nvPr>
+        </p:nvSpPr>
+        <p:spPr>
+          <a:xfrm>
+            <a:off x="2330196" y="1584960"/>
+            <a:ext cx="1761745" cy="461010"/>
+          </a:xfrm>
+        </p:spPr>
+        <p:txBody>
+          <a:bodyPr anchor="b">
+            <a:noAutofit/>
+          </a:bodyPr>
+          <a:lstStyle>
+            <a:lvl1pPr marL="0" indent="0">
+              <a:buNone/>
+              <a:defRPr sz="1440" b="0">
+                <a:solidFill>
+                  <a:schemeClr val="bg2">
+                    <a:lumMod val="40000"/>
+                    <a:lumOff val="60000"/>
+                  </a:schemeClr>
+                </a:solidFill>
+              </a:defRPr>
+            </a:lvl1pPr>
+            <a:lvl2pPr marL="274320" indent="0">
+              <a:buNone/>
+              <a:defRPr sz="1200" b="1"/>
+            </a:lvl2pPr>
+            <a:lvl3pPr marL="548640" indent="0">
+              <a:buNone/>
+              <a:defRPr sz="1080" b="1"/>
+            </a:lvl3pPr>
+            <a:lvl4pPr marL="822960" indent="0">
+              <a:buNone/>
+              <a:defRPr sz="960" b="1"/>
+            </a:lvl4pPr>
+            <a:lvl5pPr marL="1097280" indent="0">
+              <a:buNone/>
+              <a:defRPr sz="960" b="1"/>
+            </a:lvl5pPr>
+            <a:lvl6pPr marL="1371600" indent="0">
+              <a:buNone/>
+              <a:defRPr sz="960" b="1"/>
+            </a:lvl6pPr>
+            <a:lvl7pPr marL="1645920" indent="0">
+              <a:buNone/>
+              <a:defRPr sz="960" b="1"/>
+            </a:lvl7pPr>
+            <a:lvl8pPr marL="1920240" indent="0">
+              <a:buNone/>
+              <a:defRPr sz="960" b="1"/>
+            </a:lvl8pPr>
+            <a:lvl9pPr marL="2194560" indent="0">
+              <a:buNone/>
+              <a:defRPr sz="960" b="1"/>
+            </a:lvl9pPr>
+          </a:lstStyle>
+          <a:p>
+            <a:pPr lvl="0"/>
+            <a:r>
+              <a:rPr lang="es-ES"/>
+              <a:t>Haga clic para modificar los estilos de texto del patrón</a:t>
+            </a:r>
+          </a:p>
+        </p:txBody>
+      </p:sp>
+      <p:sp>
+        <p:nvSpPr>
+          <p:cNvPr id="19" name="Text Placeholder 3"/>
+          <p:cNvSpPr>
+            <a:spLocks noGrp="1"/>
+          </p:cNvSpPr>
+          <p:nvPr>
+            <p:ph type="body" sz="half" idx="16"/>
+          </p:nvPr>
+        </p:nvSpPr>
+        <p:spPr>
+          <a:xfrm>
+            <a:off x="2323864" y="2133600"/>
+            <a:ext cx="1768076" cy="2871470"/>
+          </a:xfrm>
+        </p:spPr>
+        <p:txBody>
+          <a:bodyPr anchor="t">
+            <a:normAutofit/>
+          </a:bodyPr>
+          <a:lstStyle>
+            <a:lvl1pPr marL="0" indent="0">
+              <a:buNone/>
+              <a:defRPr sz="840"/>
+            </a:lvl1pPr>
+            <a:lvl2pPr marL="274320" indent="0">
+              <a:buNone/>
+              <a:defRPr sz="720"/>
+            </a:lvl2pPr>
+            <a:lvl3pPr marL="548640" indent="0">
+              <a:buNone/>
+              <a:defRPr sz="600"/>
+            </a:lvl3pPr>
+            <a:lvl4pPr marL="822960" indent="0">
+              <a:buNone/>
+              <a:defRPr sz="540"/>
+            </a:lvl4pPr>
+            <a:lvl5pPr marL="1097280" indent="0">
+              <a:buNone/>
+              <a:defRPr sz="540"/>
+            </a:lvl5pPr>
+            <a:lvl6pPr marL="1371600" indent="0">
+              <a:buNone/>
+              <a:defRPr sz="540"/>
+            </a:lvl6pPr>
+            <a:lvl7pPr marL="1645920" indent="0">
+              <a:buNone/>
+              <a:defRPr sz="540"/>
+            </a:lvl7pPr>
+            <a:lvl8pPr marL="1920240" indent="0">
+              <a:buNone/>
+              <a:defRPr sz="540"/>
+            </a:lvl8pPr>
+            <a:lvl9pPr marL="2194560" indent="0">
+              <a:buNone/>
+              <a:defRPr sz="540"/>
+            </a:lvl9pPr>
+          </a:lstStyle>
+          <a:p>
+            <a:pPr lvl="0"/>
+            <a:r>
+              <a:rPr lang="es-ES"/>
+              <a:t>Haga clic para modificar los estilos de texto del patrón</a:t>
+            </a:r>
+          </a:p>
+        </p:txBody>
+      </p:sp>
+      <p:sp>
+        <p:nvSpPr>
+          <p:cNvPr id="14" name="Text Placeholder 4"/>
+          <p:cNvSpPr>
+            <a:spLocks noGrp="1"/>
+          </p:cNvSpPr>
+          <p:nvPr>
+            <p:ph type="body" sz="quarter" idx="13"/>
+          </p:nvPr>
+        </p:nvSpPr>
+        <p:spPr>
+          <a:xfrm>
+            <a:off x="4274820" y="1584960"/>
+            <a:ext cx="1759268" cy="461010"/>
+          </a:xfrm>
+        </p:spPr>
+        <p:txBody>
+          <a:bodyPr anchor="b">
+            <a:noAutofit/>
+          </a:bodyPr>
+          <a:lstStyle>
+            <a:lvl1pPr marL="0" indent="0">
+              <a:buNone/>
+              <a:defRPr sz="1440" b="0">
+                <a:solidFill>
+                  <a:schemeClr val="bg2">
+                    <a:lumMod val="40000"/>
+                    <a:lumOff val="60000"/>
+                  </a:schemeClr>
+                </a:solidFill>
+              </a:defRPr>
+            </a:lvl1pPr>
+            <a:lvl2pPr marL="274320" indent="0">
+              <a:buNone/>
+              <a:defRPr sz="1200" b="1"/>
+            </a:lvl2pPr>
+            <a:lvl3pPr marL="548640" indent="0">
+              <a:buNone/>
+              <a:defRPr sz="1080" b="1"/>
+            </a:lvl3pPr>
+            <a:lvl4pPr marL="822960" indent="0">
+              <a:buNone/>
+              <a:defRPr sz="960" b="1"/>
+            </a:lvl4pPr>
+            <a:lvl5pPr marL="1097280" indent="0">
+              <a:buNone/>
+              <a:defRPr sz="960" b="1"/>
+            </a:lvl5pPr>
+            <a:lvl6pPr marL="1371600" indent="0">
+              <a:buNone/>
+              <a:defRPr sz="960" b="1"/>
+            </a:lvl6pPr>
+            <a:lvl7pPr marL="1645920" indent="0">
+              <a:buNone/>
+              <a:defRPr sz="960" b="1"/>
+            </a:lvl7pPr>
+            <a:lvl8pPr marL="1920240" indent="0">
+              <a:buNone/>
+              <a:defRPr sz="960" b="1"/>
+            </a:lvl8pPr>
+            <a:lvl9pPr marL="2194560" indent="0">
+              <a:buNone/>
+              <a:defRPr sz="960" b="1"/>
+            </a:lvl9pPr>
+          </a:lstStyle>
+          <a:p>
+            <a:pPr lvl="0"/>
+            <a:r>
+              <a:rPr lang="es-ES"/>
+              <a:t>Haga clic para modificar los estilos de texto del patrón</a:t>
+            </a:r>
+          </a:p>
+        </p:txBody>
+      </p:sp>
+      <p:sp>
+        <p:nvSpPr>
+          <p:cNvPr id="20" name="Text Placeholder 3"/>
+          <p:cNvSpPr>
+            <a:spLocks noGrp="1"/>
+          </p:cNvSpPr>
+          <p:nvPr>
+            <p:ph type="body" sz="half" idx="17"/>
+          </p:nvPr>
+        </p:nvSpPr>
+        <p:spPr>
+          <a:xfrm>
+            <a:off x="4274820" y="2133600"/>
+            <a:ext cx="1759268" cy="2871470"/>
+          </a:xfrm>
+        </p:spPr>
+        <p:txBody>
+          <a:bodyPr anchor="t">
+            <a:normAutofit/>
+          </a:bodyPr>
+          <a:lstStyle>
+            <a:lvl1pPr marL="0" indent="0">
+              <a:buNone/>
+              <a:defRPr sz="840"/>
+            </a:lvl1pPr>
+            <a:lvl2pPr marL="274320" indent="0">
+              <a:buNone/>
+              <a:defRPr sz="720"/>
+            </a:lvl2pPr>
+            <a:lvl3pPr marL="548640" indent="0">
+              <a:buNone/>
+              <a:defRPr sz="600"/>
+            </a:lvl3pPr>
+            <a:lvl4pPr marL="822960" indent="0">
+              <a:buNone/>
+              <a:defRPr sz="540"/>
+            </a:lvl4pPr>
+            <a:lvl5pPr marL="1097280" indent="0">
+              <a:buNone/>
+              <a:defRPr sz="540"/>
+            </a:lvl5pPr>
+            <a:lvl6pPr marL="1371600" indent="0">
+              <a:buNone/>
+              <a:defRPr sz="540"/>
+            </a:lvl6pPr>
+            <a:lvl7pPr marL="1645920" indent="0">
+              <a:buNone/>
+              <a:defRPr sz="540"/>
+            </a:lvl7pPr>
+            <a:lvl8pPr marL="1920240" indent="0">
+              <a:buNone/>
+              <a:defRPr sz="540"/>
+            </a:lvl8pPr>
+            <a:lvl9pPr marL="2194560" indent="0">
+              <a:buNone/>
+              <a:defRPr sz="540"/>
+            </a:lvl9pPr>
+          </a:lstStyle>
+          <a:p>
+            <a:pPr lvl="0"/>
+            <a:r>
+              <a:rPr lang="es-ES"/>
+              <a:t>Haga clic para modificar los estilos de texto del patrón</a:t>
+            </a:r>
+          </a:p>
+        </p:txBody>
+      </p:sp>
+      <p:cxnSp>
+        <p:nvCxnSpPr>
+          <p:cNvPr id="17" name="Straight Connector 16"/>
+          <p:cNvCxnSpPr/>
+          <p:nvPr/>
+        </p:nvCxnSpPr>
+        <p:spPr>
+          <a:xfrm>
+            <a:off x="2235685" y="1706880"/>
+            <a:ext cx="0" cy="3169920"/>
+          </a:xfrm>
+          <a:prstGeom prst="line">
+            <a:avLst/>
+          </a:prstGeom>
+          <a:ln w="12700" cmpd="sng">
+            <a:solidFill>
+              <a:schemeClr val="bg2">
+                <a:lumMod val="40000"/>
+                <a:lumOff val="60000"/>
+                <a:alpha val="40000"/>
+              </a:schemeClr>
+            </a:solidFill>
+          </a:ln>
+        </p:spPr>
+        <p:style>
+          <a:lnRef idx="2">
+            <a:schemeClr val="accent1"/>
+          </a:lnRef>
+          <a:fillRef idx="0">
+            <a:schemeClr val="accent1"/>
+          </a:fillRef>
+          <a:effectRef idx="1">
+            <a:schemeClr val="accent1"/>
+          </a:effectRef>
+          <a:fontRef idx="minor">
+            <a:schemeClr val="tx1"/>
+          </a:fontRef>
+        </p:style>
+      </p:cxnSp>
+      <p:cxnSp>
+        <p:nvCxnSpPr>
+          <p:cNvPr id="18" name="Straight Connector 17"/>
+          <p:cNvCxnSpPr/>
+          <p:nvPr/>
+        </p:nvCxnSpPr>
+        <p:spPr>
+          <a:xfrm>
+            <a:off x="4177336" y="1706880"/>
+            <a:ext cx="0" cy="3173506"/>
+          </a:xfrm>
+          <a:prstGeom prst="line">
+            <a:avLst/>
+          </a:prstGeom>
+          <a:ln w="12700" cmpd="sng">
+            <a:solidFill>
+              <a:schemeClr val="bg2">
+                <a:lumMod val="40000"/>
+                <a:lumOff val="60000"/>
+                <a:alpha val="40000"/>
+              </a:schemeClr>
+            </a:solidFill>
+          </a:ln>
+        </p:spPr>
+        <p:style>
+          <a:lnRef idx="2">
+            <a:schemeClr val="accent1"/>
+          </a:lnRef>
+          <a:fillRef idx="0">
+            <a:schemeClr val="accent1"/>
+          </a:fillRef>
+          <a:effectRef idx="1">
+            <a:schemeClr val="accent1"/>
+          </a:effectRef>
+          <a:fontRef idx="minor">
+            <a:schemeClr val="tx1"/>
+          </a:fontRef>
+        </p:style>
+      </p:cxnSp>
+      <p:sp>
+        <p:nvSpPr>
+          <p:cNvPr id="7" name="Date Placeholder 3"/>
+          <p:cNvSpPr>
+            <a:spLocks noGrp="1"/>
+          </p:cNvSpPr>
+          <p:nvPr>
+            <p:ph type="dt" sz="half" idx="10"/>
+          </p:nvPr>
+        </p:nvSpPr>
+        <p:spPr/>
+        <p:txBody>
+          <a:bodyPr/>
+          <a:lstStyle/>
+          <a:p>
+            <a:fld id="{E03C0CA2-AF3B-45DA-B95C-F3B757DF4AEA}" type="datetimeFigureOut">
+              <a:rPr lang="es-GT" smtClean="0"/>
+              <a:t>7/08/2026</a:t>
+            </a:fld>
+            <a:endParaRPr lang="es-GT"/>
+          </a:p>
+        </p:txBody>
+      </p:sp>
+      <p:sp>
+        <p:nvSpPr>
+          <p:cNvPr id="4" name="Footer Placeholder 4"/>
+          <p:cNvSpPr>
+            <a:spLocks noGrp="1"/>
+          </p:cNvSpPr>
+          <p:nvPr>
+            <p:ph type="ftr" sz="quarter" idx="11"/>
+          </p:nvPr>
+        </p:nvSpPr>
+        <p:spPr/>
+        <p:txBody>
+          <a:bodyPr/>
+          <a:lstStyle/>
+          <a:p>
+            <a:endParaRPr lang="es-GT"/>
+          </a:p>
+        </p:txBody>
+      </p:sp>
+      <p:sp>
+        <p:nvSpPr>
+          <p:cNvPr id="6" name="Slide Number Placeholder 5"/>
+          <p:cNvSpPr>
+            <a:spLocks noGrp="1"/>
+          </p:cNvSpPr>
+          <p:nvPr>
+            <p:ph type="sldNum" sz="quarter" idx="12"/>
+          </p:nvPr>
+        </p:nvSpPr>
+        <p:spPr/>
+        <p:txBody>
+          <a:bodyPr/>
+          <a:lstStyle/>
+          <a:p>
+            <a:fld id="{F5A1B9F3-D9AB-4E80-BD88-E1CDBD879FEC}" type="slidenum">
+              <a:rPr lang="es-GT" smtClean="0"/>
+              <a:t>‹Nº›</a:t>
+            </a:fld>
+            <a:endParaRPr lang="es-GT"/>
+          </a:p>
+        </p:txBody>
+      </p:sp>
+    </p:spTree>
+    <p:extLst>
+      <p:ext uri="{BB962C8B-B14F-4D97-AF65-F5344CB8AC3E}">
+        <p14:creationId xmlns:p14="http://schemas.microsoft.com/office/powerpoint/2010/main" val="1846563142"/>
+      </p:ext>
+    </p:extLst>
+  </p:cSld>
+  <p:clrMapOvr>
+    <a:masterClrMapping/>
+  </p:clrMapOvr>
+</p:sldLayout>
+</file>
+
+<file path=ppt/slideLayouts/slideLayout15.xml><?xml version="1.0" encoding="utf-8"?>
+<p:sldLayout xmlns:a="http://schemas.openxmlformats.org/drawingml/2006/main" xmlns:r="http://schemas.openxmlformats.org/officeDocument/2006/relationships" xmlns:p="http://schemas.openxmlformats.org/presentationml/2006/main" preserve="1">
+  <p:cSld name="Columna de imagen 3">
+    <p:spTree>
+      <p:nvGrpSpPr>
+        <p:cNvPr id="1" name=""/>
+        <p:cNvGrpSpPr/>
+        <p:nvPr/>
+      </p:nvGrpSpPr>
+      <p:grpSpPr>
+        <a:xfrm>
+          <a:off x="0" y="0"/>
+          <a:ext cx="0" cy="0"/>
+          <a:chOff x="0" y="0"/>
+          <a:chExt cx="0" cy="0"/>
+        </a:xfrm>
+      </p:grpSpPr>
+      <p:sp>
+        <p:nvSpPr>
+          <p:cNvPr id="2" name="Title 1"/>
+          <p:cNvSpPr>
+            <a:spLocks noGrp="1"/>
+          </p:cNvSpPr>
+          <p:nvPr>
+            <p:ph type="title"/>
+          </p:nvPr>
+        </p:nvSpPr>
+        <p:spPr/>
+        <p:txBody>
+          <a:bodyPr/>
+          <a:lstStyle>
+            <a:lvl1pPr>
+              <a:defRPr sz="2520"/>
+            </a:lvl1pPr>
+          </a:lstStyle>
+          <a:p>
+            <a:r>
+              <a:rPr lang="es-ES"/>
+              <a:t>Haga clic para modificar el estilo de título del patrón</a:t>
+            </a:r>
+            <a:endParaRPr lang="en-US" dirty="0"/>
+          </a:p>
+        </p:txBody>
+      </p:sp>
+      <p:sp>
+        <p:nvSpPr>
+          <p:cNvPr id="3" name="Text Placeholder 2"/>
+          <p:cNvSpPr>
+            <a:spLocks noGrp="1"/>
+          </p:cNvSpPr>
+          <p:nvPr>
+            <p:ph type="body" idx="1"/>
+          </p:nvPr>
+        </p:nvSpPr>
+        <p:spPr>
+          <a:xfrm>
+            <a:off x="391478" y="3400759"/>
+            <a:ext cx="1764030" cy="461010"/>
+          </a:xfrm>
+        </p:spPr>
+        <p:txBody>
+          <a:bodyPr anchor="b">
+            <a:noAutofit/>
+          </a:bodyPr>
+          <a:lstStyle>
+            <a:lvl1pPr marL="0" indent="0">
+              <a:buNone/>
+              <a:defRPr sz="1440" b="0">
+                <a:solidFill>
+                  <a:schemeClr val="bg2">
+                    <a:lumMod val="40000"/>
+                    <a:lumOff val="60000"/>
+                  </a:schemeClr>
+                </a:solidFill>
+              </a:defRPr>
+            </a:lvl1pPr>
+            <a:lvl2pPr marL="274320" indent="0">
+              <a:buNone/>
+              <a:defRPr sz="1200" b="1"/>
+            </a:lvl2pPr>
+            <a:lvl3pPr marL="548640" indent="0">
+              <a:buNone/>
+              <a:defRPr sz="1080" b="1"/>
+            </a:lvl3pPr>
+            <a:lvl4pPr marL="822960" indent="0">
+              <a:buNone/>
+              <a:defRPr sz="960" b="1"/>
+            </a:lvl4pPr>
+            <a:lvl5pPr marL="1097280" indent="0">
+              <a:buNone/>
+              <a:defRPr sz="960" b="1"/>
+            </a:lvl5pPr>
+            <a:lvl6pPr marL="1371600" indent="0">
+              <a:buNone/>
+              <a:defRPr sz="960" b="1"/>
+            </a:lvl6pPr>
+            <a:lvl7pPr marL="1645920" indent="0">
+              <a:buNone/>
+              <a:defRPr sz="960" b="1"/>
+            </a:lvl7pPr>
+            <a:lvl8pPr marL="1920240" indent="0">
+              <a:buNone/>
+              <a:defRPr sz="960" b="1"/>
+            </a:lvl8pPr>
+            <a:lvl9pPr marL="2194560" indent="0">
+              <a:buNone/>
+              <a:defRPr sz="960" b="1"/>
+            </a:lvl9pPr>
+          </a:lstStyle>
+          <a:p>
+            <a:pPr lvl="0"/>
+            <a:r>
+              <a:rPr lang="es-ES"/>
+              <a:t>Haga clic para modificar los estilos de texto del patrón</a:t>
+            </a:r>
+          </a:p>
+        </p:txBody>
+      </p:sp>
+      <p:sp>
+        <p:nvSpPr>
+          <p:cNvPr id="29" name="Picture Placeholder 2"/>
+          <p:cNvSpPr>
+            <a:spLocks noGrp="1" noChangeAspect="1"/>
+          </p:cNvSpPr>
+          <p:nvPr>
+            <p:ph type="pic" idx="15"/>
+          </p:nvPr>
+        </p:nvSpPr>
+        <p:spPr>
+          <a:xfrm>
+            <a:off x="391478" y="1767840"/>
+            <a:ext cx="1764030" cy="1219200"/>
+          </a:xfrm>
+          <a:prstGeom prst="roundRect">
+            <a:avLst>
+              <a:gd name="adj" fmla="val 1858"/>
+            </a:avLst>
+          </a:prstGeom>
+          <a:effectLst>
+            <a:outerShdw blurRad="50800" dist="50800" dir="5400000" algn="tl" rotWithShape="0">
+              <a:srgbClr val="000000">
+                <a:alpha val="43000"/>
+              </a:srgbClr>
+            </a:outerShdw>
+          </a:effectLst>
+        </p:spPr>
+        <p:txBody>
+          <a:bodyPr anchor="t">
+            <a:normAutofit/>
+          </a:bodyPr>
+          <a:lstStyle>
+            <a:lvl1pPr marL="0" indent="0" algn="ctr">
+              <a:buNone/>
+              <a:defRPr sz="960"/>
+            </a:lvl1pPr>
+            <a:lvl2pPr marL="274320" indent="0">
+              <a:buNone/>
+              <a:defRPr sz="960"/>
+            </a:lvl2pPr>
+            <a:lvl3pPr marL="548640" indent="0">
+              <a:buNone/>
+              <a:defRPr sz="960"/>
+            </a:lvl3pPr>
+            <a:lvl4pPr marL="822960" indent="0">
+              <a:buNone/>
+              <a:defRPr sz="960"/>
+            </a:lvl4pPr>
+            <a:lvl5pPr marL="1097280" indent="0">
+              <a:buNone/>
+              <a:defRPr sz="960"/>
+            </a:lvl5pPr>
+            <a:lvl6pPr marL="1371600" indent="0">
+              <a:buNone/>
+              <a:defRPr sz="960"/>
+            </a:lvl6pPr>
+            <a:lvl7pPr marL="1645920" indent="0">
+              <a:buNone/>
+              <a:defRPr sz="960"/>
+            </a:lvl7pPr>
+            <a:lvl8pPr marL="1920240" indent="0">
+              <a:buNone/>
+              <a:defRPr sz="960"/>
+            </a:lvl8pPr>
+            <a:lvl9pPr marL="2194560" indent="0">
+              <a:buNone/>
+              <a:defRPr sz="960"/>
+            </a:lvl9pPr>
+          </a:lstStyle>
+          <a:p>
+            <a:r>
+              <a:rPr lang="es-ES"/>
+              <a:t>Haga clic en el icono para agregar una imagen</a:t>
+            </a:r>
+            <a:endParaRPr lang="en-US" dirty="0"/>
+          </a:p>
+        </p:txBody>
+      </p:sp>
+      <p:sp>
+        <p:nvSpPr>
+          <p:cNvPr id="22" name="Text Placeholder 3"/>
+          <p:cNvSpPr>
+            <a:spLocks noGrp="1"/>
+          </p:cNvSpPr>
+          <p:nvPr>
+            <p:ph type="body" sz="half" idx="18"/>
+          </p:nvPr>
+        </p:nvSpPr>
+        <p:spPr>
+          <a:xfrm>
+            <a:off x="391478" y="3861769"/>
+            <a:ext cx="1764030" cy="527351"/>
+          </a:xfrm>
+        </p:spPr>
+        <p:txBody>
+          <a:bodyPr anchor="t">
+            <a:normAutofit/>
+          </a:bodyPr>
+          <a:lstStyle>
+            <a:lvl1pPr marL="0" indent="0">
+              <a:buNone/>
+              <a:defRPr sz="840"/>
+            </a:lvl1pPr>
+            <a:lvl2pPr marL="274320" indent="0">
+              <a:buNone/>
+              <a:defRPr sz="720"/>
+            </a:lvl2pPr>
+            <a:lvl3pPr marL="548640" indent="0">
+              <a:buNone/>
+              <a:defRPr sz="600"/>
+            </a:lvl3pPr>
+            <a:lvl4pPr marL="822960" indent="0">
+              <a:buNone/>
+              <a:defRPr sz="540"/>
+            </a:lvl4pPr>
+            <a:lvl5pPr marL="1097280" indent="0">
+              <a:buNone/>
+              <a:defRPr sz="540"/>
+            </a:lvl5pPr>
+            <a:lvl6pPr marL="1371600" indent="0">
+              <a:buNone/>
+              <a:defRPr sz="540"/>
+            </a:lvl6pPr>
+            <a:lvl7pPr marL="1645920" indent="0">
+              <a:buNone/>
+              <a:defRPr sz="540"/>
+            </a:lvl7pPr>
+            <a:lvl8pPr marL="1920240" indent="0">
+              <a:buNone/>
+              <a:defRPr sz="540"/>
+            </a:lvl8pPr>
+            <a:lvl9pPr marL="2194560" indent="0">
+              <a:buNone/>
+              <a:defRPr sz="540"/>
+            </a:lvl9pPr>
+          </a:lstStyle>
+          <a:p>
+            <a:pPr lvl="0"/>
+            <a:r>
+              <a:rPr lang="es-ES"/>
+              <a:t>Haga clic para modificar los estilos de texto del patrón</a:t>
+            </a:r>
+          </a:p>
+        </p:txBody>
+      </p:sp>
+      <p:sp>
+        <p:nvSpPr>
+          <p:cNvPr id="5" name="Text Placeholder 4"/>
+          <p:cNvSpPr>
+            <a:spLocks noGrp="1"/>
+          </p:cNvSpPr>
+          <p:nvPr>
+            <p:ph type="body" sz="quarter" idx="3"/>
+          </p:nvPr>
+        </p:nvSpPr>
+        <p:spPr>
+          <a:xfrm>
+            <a:off x="2333625" y="3400759"/>
+            <a:ext cx="1758315" cy="461010"/>
+          </a:xfrm>
+        </p:spPr>
+        <p:txBody>
+          <a:bodyPr anchor="b">
+            <a:noAutofit/>
+          </a:bodyPr>
+          <a:lstStyle>
+            <a:lvl1pPr marL="0" indent="0">
+              <a:buNone/>
+              <a:defRPr sz="1440" b="0">
+                <a:solidFill>
+                  <a:schemeClr val="bg2">
+                    <a:lumMod val="40000"/>
+                    <a:lumOff val="60000"/>
+                  </a:schemeClr>
+                </a:solidFill>
+              </a:defRPr>
+            </a:lvl1pPr>
+            <a:lvl2pPr marL="274320" indent="0">
+              <a:buNone/>
+              <a:defRPr sz="1200" b="1"/>
+            </a:lvl2pPr>
+            <a:lvl3pPr marL="548640" indent="0">
+              <a:buNone/>
+              <a:defRPr sz="1080" b="1"/>
+            </a:lvl3pPr>
+            <a:lvl4pPr marL="822960" indent="0">
+              <a:buNone/>
+              <a:defRPr sz="960" b="1"/>
+            </a:lvl4pPr>
+            <a:lvl5pPr marL="1097280" indent="0">
+              <a:buNone/>
+              <a:defRPr sz="960" b="1"/>
+            </a:lvl5pPr>
+            <a:lvl6pPr marL="1371600" indent="0">
+              <a:buNone/>
+              <a:defRPr sz="960" b="1"/>
+            </a:lvl6pPr>
+            <a:lvl7pPr marL="1645920" indent="0">
+              <a:buNone/>
+              <a:defRPr sz="960" b="1"/>
+            </a:lvl7pPr>
+            <a:lvl8pPr marL="1920240" indent="0">
+              <a:buNone/>
+              <a:defRPr sz="960" b="1"/>
+            </a:lvl8pPr>
+            <a:lvl9pPr marL="2194560" indent="0">
+              <a:buNone/>
+              <a:defRPr sz="960" b="1"/>
+            </a:lvl9pPr>
+          </a:lstStyle>
+          <a:p>
+            <a:pPr lvl="0"/>
+            <a:r>
+              <a:rPr lang="es-ES"/>
+              <a:t>Haga clic para modificar los estilos de texto del patrón</a:t>
+            </a:r>
+          </a:p>
+        </p:txBody>
+      </p:sp>
+      <p:sp>
+        <p:nvSpPr>
+          <p:cNvPr id="30" name="Picture Placeholder 2"/>
+          <p:cNvSpPr>
+            <a:spLocks noGrp="1" noChangeAspect="1"/>
+          </p:cNvSpPr>
+          <p:nvPr>
+            <p:ph type="pic" idx="21"/>
+          </p:nvPr>
+        </p:nvSpPr>
+        <p:spPr>
+          <a:xfrm>
+            <a:off x="2333625" y="1767840"/>
+            <a:ext cx="1758315" cy="1219200"/>
+          </a:xfrm>
+          <a:prstGeom prst="roundRect">
+            <a:avLst>
+              <a:gd name="adj" fmla="val 1858"/>
+            </a:avLst>
+          </a:prstGeom>
+          <a:effectLst>
+            <a:outerShdw blurRad="50800" dist="50800" dir="5400000" algn="tl" rotWithShape="0">
+              <a:srgbClr val="000000">
+                <a:alpha val="43000"/>
+              </a:srgbClr>
+            </a:outerShdw>
+          </a:effectLst>
+        </p:spPr>
+        <p:txBody>
+          <a:bodyPr anchor="t">
+            <a:normAutofit/>
+          </a:bodyPr>
+          <a:lstStyle>
+            <a:lvl1pPr marL="0" indent="0" algn="ctr">
+              <a:buNone/>
+              <a:defRPr sz="960"/>
+            </a:lvl1pPr>
+            <a:lvl2pPr marL="274320" indent="0">
+              <a:buNone/>
+              <a:defRPr sz="960"/>
+            </a:lvl2pPr>
+            <a:lvl3pPr marL="548640" indent="0">
+              <a:buNone/>
+              <a:defRPr sz="960"/>
+            </a:lvl3pPr>
+            <a:lvl4pPr marL="822960" indent="0">
+              <a:buNone/>
+              <a:defRPr sz="960"/>
+            </a:lvl4pPr>
+            <a:lvl5pPr marL="1097280" indent="0">
+              <a:buNone/>
+              <a:defRPr sz="960"/>
+            </a:lvl5pPr>
+            <a:lvl6pPr marL="1371600" indent="0">
+              <a:buNone/>
+              <a:defRPr sz="960"/>
+            </a:lvl6pPr>
+            <a:lvl7pPr marL="1645920" indent="0">
+              <a:buNone/>
+              <a:defRPr sz="960"/>
+            </a:lvl7pPr>
+            <a:lvl8pPr marL="1920240" indent="0">
+              <a:buNone/>
+              <a:defRPr sz="960"/>
+            </a:lvl8pPr>
+            <a:lvl9pPr marL="2194560" indent="0">
+              <a:buNone/>
+              <a:defRPr sz="960"/>
+            </a:lvl9pPr>
+          </a:lstStyle>
+          <a:p>
+            <a:r>
+              <a:rPr lang="es-ES"/>
+              <a:t>Haga clic en el icono para agregar una imagen</a:t>
+            </a:r>
+            <a:endParaRPr lang="en-US" dirty="0"/>
+          </a:p>
+        </p:txBody>
+      </p:sp>
+      <p:sp>
+        <p:nvSpPr>
+          <p:cNvPr id="23" name="Text Placeholder 3"/>
+          <p:cNvSpPr>
+            <a:spLocks noGrp="1"/>
+          </p:cNvSpPr>
+          <p:nvPr>
+            <p:ph type="body" sz="half" idx="19"/>
+          </p:nvPr>
+        </p:nvSpPr>
+        <p:spPr>
+          <a:xfrm>
+            <a:off x="2332813" y="3861769"/>
+            <a:ext cx="1760644" cy="527351"/>
+          </a:xfrm>
+        </p:spPr>
+        <p:txBody>
+          <a:bodyPr anchor="t">
+            <a:normAutofit/>
+          </a:bodyPr>
+          <a:lstStyle>
+            <a:lvl1pPr marL="0" indent="0">
+              <a:buNone/>
+              <a:defRPr sz="840"/>
+            </a:lvl1pPr>
+            <a:lvl2pPr marL="274320" indent="0">
+              <a:buNone/>
+              <a:defRPr sz="720"/>
+            </a:lvl2pPr>
+            <a:lvl3pPr marL="548640" indent="0">
+              <a:buNone/>
+              <a:defRPr sz="600"/>
+            </a:lvl3pPr>
+            <a:lvl4pPr marL="822960" indent="0">
+              <a:buNone/>
+              <a:defRPr sz="540"/>
+            </a:lvl4pPr>
+            <a:lvl5pPr marL="1097280" indent="0">
+              <a:buNone/>
+              <a:defRPr sz="540"/>
+            </a:lvl5pPr>
+            <a:lvl6pPr marL="1371600" indent="0">
+              <a:buNone/>
+              <a:defRPr sz="540"/>
+            </a:lvl6pPr>
+            <a:lvl7pPr marL="1645920" indent="0">
+              <a:buNone/>
+              <a:defRPr sz="540"/>
+            </a:lvl7pPr>
+            <a:lvl8pPr marL="1920240" indent="0">
+              <a:buNone/>
+              <a:defRPr sz="540"/>
+            </a:lvl8pPr>
+            <a:lvl9pPr marL="2194560" indent="0">
+              <a:buNone/>
+              <a:defRPr sz="540"/>
+            </a:lvl9pPr>
+          </a:lstStyle>
+          <a:p>
+            <a:pPr lvl="0"/>
+            <a:r>
+              <a:rPr lang="es-ES"/>
+              <a:t>Haga clic para modificar los estilos de texto del patrón</a:t>
+            </a:r>
+          </a:p>
+        </p:txBody>
+      </p:sp>
+      <p:sp>
+        <p:nvSpPr>
+          <p:cNvPr id="14" name="Text Placeholder 4"/>
+          <p:cNvSpPr>
+            <a:spLocks noGrp="1"/>
+          </p:cNvSpPr>
+          <p:nvPr>
+            <p:ph type="body" sz="quarter" idx="13"/>
+          </p:nvPr>
+        </p:nvSpPr>
+        <p:spPr>
+          <a:xfrm>
+            <a:off x="4274820" y="3400759"/>
+            <a:ext cx="1759268" cy="461010"/>
+          </a:xfrm>
+        </p:spPr>
+        <p:txBody>
+          <a:bodyPr anchor="b">
+            <a:noAutofit/>
+          </a:bodyPr>
+          <a:lstStyle>
+            <a:lvl1pPr marL="0" indent="0">
+              <a:buNone/>
+              <a:defRPr sz="1440" b="0">
+                <a:solidFill>
+                  <a:schemeClr val="bg2">
+                    <a:lumMod val="40000"/>
+                    <a:lumOff val="60000"/>
+                  </a:schemeClr>
+                </a:solidFill>
+              </a:defRPr>
+            </a:lvl1pPr>
+            <a:lvl2pPr marL="274320" indent="0">
+              <a:buNone/>
+              <a:defRPr sz="1200" b="1"/>
+            </a:lvl2pPr>
+            <a:lvl3pPr marL="548640" indent="0">
+              <a:buNone/>
+              <a:defRPr sz="1080" b="1"/>
+            </a:lvl3pPr>
+            <a:lvl4pPr marL="822960" indent="0">
+              <a:buNone/>
+              <a:defRPr sz="960" b="1"/>
+            </a:lvl4pPr>
+            <a:lvl5pPr marL="1097280" indent="0">
+              <a:buNone/>
+              <a:defRPr sz="960" b="1"/>
+            </a:lvl5pPr>
+            <a:lvl6pPr marL="1371600" indent="0">
+              <a:buNone/>
+              <a:defRPr sz="960" b="1"/>
+            </a:lvl6pPr>
+            <a:lvl7pPr marL="1645920" indent="0">
+              <a:buNone/>
+              <a:defRPr sz="960" b="1"/>
+            </a:lvl7pPr>
+            <a:lvl8pPr marL="1920240" indent="0">
+              <a:buNone/>
+              <a:defRPr sz="960" b="1"/>
+            </a:lvl8pPr>
+            <a:lvl9pPr marL="2194560" indent="0">
+              <a:buNone/>
+              <a:defRPr sz="960" b="1"/>
+            </a:lvl9pPr>
+          </a:lstStyle>
+          <a:p>
+            <a:pPr lvl="0"/>
+            <a:r>
+              <a:rPr lang="es-ES"/>
+              <a:t>Haga clic para modificar los estilos de texto del patrón</a:t>
+            </a:r>
+          </a:p>
+        </p:txBody>
+      </p:sp>
+      <p:sp>
+        <p:nvSpPr>
+          <p:cNvPr id="31" name="Picture Placeholder 2"/>
+          <p:cNvSpPr>
+            <a:spLocks noGrp="1" noChangeAspect="1"/>
+          </p:cNvSpPr>
+          <p:nvPr>
+            <p:ph type="pic" idx="22"/>
+          </p:nvPr>
+        </p:nvSpPr>
+        <p:spPr>
+          <a:xfrm>
+            <a:off x="4274820" y="1767840"/>
+            <a:ext cx="1759268" cy="1219200"/>
+          </a:xfrm>
+          <a:prstGeom prst="roundRect">
+            <a:avLst>
+              <a:gd name="adj" fmla="val 1858"/>
+            </a:avLst>
+          </a:prstGeom>
+          <a:effectLst>
+            <a:outerShdw blurRad="50800" dist="50800" dir="5400000" algn="tl" rotWithShape="0">
+              <a:srgbClr val="000000">
+                <a:alpha val="43000"/>
+              </a:srgbClr>
+            </a:outerShdw>
+          </a:effectLst>
+        </p:spPr>
+        <p:txBody>
+          <a:bodyPr anchor="t">
+            <a:normAutofit/>
+          </a:bodyPr>
+          <a:lstStyle>
+            <a:lvl1pPr marL="0" indent="0" algn="ctr">
+              <a:buNone/>
+              <a:defRPr sz="960"/>
+            </a:lvl1pPr>
+            <a:lvl2pPr marL="274320" indent="0">
+              <a:buNone/>
+              <a:defRPr sz="960"/>
+            </a:lvl2pPr>
+            <a:lvl3pPr marL="548640" indent="0">
+              <a:buNone/>
+              <a:defRPr sz="960"/>
+            </a:lvl3pPr>
+            <a:lvl4pPr marL="822960" indent="0">
+              <a:buNone/>
+              <a:defRPr sz="960"/>
+            </a:lvl4pPr>
+            <a:lvl5pPr marL="1097280" indent="0">
+              <a:buNone/>
+              <a:defRPr sz="960"/>
+            </a:lvl5pPr>
+            <a:lvl6pPr marL="1371600" indent="0">
+              <a:buNone/>
+              <a:defRPr sz="960"/>
+            </a:lvl6pPr>
+            <a:lvl7pPr marL="1645920" indent="0">
+              <a:buNone/>
+              <a:defRPr sz="960"/>
+            </a:lvl7pPr>
+            <a:lvl8pPr marL="1920240" indent="0">
+              <a:buNone/>
+              <a:defRPr sz="960"/>
+            </a:lvl8pPr>
+            <a:lvl9pPr marL="2194560" indent="0">
+              <a:buNone/>
+              <a:defRPr sz="960"/>
+            </a:lvl9pPr>
+          </a:lstStyle>
+          <a:p>
+            <a:r>
+              <a:rPr lang="es-ES"/>
+              <a:t>Haga clic en el icono para agregar una imagen</a:t>
+            </a:r>
+            <a:endParaRPr lang="en-US" dirty="0"/>
+          </a:p>
+        </p:txBody>
+      </p:sp>
+      <p:sp>
+        <p:nvSpPr>
+          <p:cNvPr id="24" name="Text Placeholder 3"/>
+          <p:cNvSpPr>
+            <a:spLocks noGrp="1"/>
+          </p:cNvSpPr>
+          <p:nvPr>
+            <p:ph type="body" sz="half" idx="20"/>
+          </p:nvPr>
+        </p:nvSpPr>
+        <p:spPr>
+          <a:xfrm>
+            <a:off x="4274745" y="3861767"/>
+            <a:ext cx="1761598" cy="527351"/>
+          </a:xfrm>
+        </p:spPr>
+        <p:txBody>
+          <a:bodyPr anchor="t">
+            <a:normAutofit/>
+          </a:bodyPr>
+          <a:lstStyle>
+            <a:lvl1pPr marL="0" indent="0">
+              <a:buNone/>
+              <a:defRPr sz="840"/>
+            </a:lvl1pPr>
+            <a:lvl2pPr marL="274320" indent="0">
+              <a:buNone/>
+              <a:defRPr sz="720"/>
+            </a:lvl2pPr>
+            <a:lvl3pPr marL="548640" indent="0">
+              <a:buNone/>
+              <a:defRPr sz="600"/>
+            </a:lvl3pPr>
+            <a:lvl4pPr marL="822960" indent="0">
+              <a:buNone/>
+              <a:defRPr sz="540"/>
+            </a:lvl4pPr>
+            <a:lvl5pPr marL="1097280" indent="0">
+              <a:buNone/>
+              <a:defRPr sz="540"/>
+            </a:lvl5pPr>
+            <a:lvl6pPr marL="1371600" indent="0">
+              <a:buNone/>
+              <a:defRPr sz="540"/>
+            </a:lvl6pPr>
+            <a:lvl7pPr marL="1645920" indent="0">
+              <a:buNone/>
+              <a:defRPr sz="540"/>
+            </a:lvl7pPr>
+            <a:lvl8pPr marL="1920240" indent="0">
+              <a:buNone/>
+              <a:defRPr sz="540"/>
+            </a:lvl8pPr>
+            <a:lvl9pPr marL="2194560" indent="0">
+              <a:buNone/>
+              <a:defRPr sz="540"/>
+            </a:lvl9pPr>
+          </a:lstStyle>
+          <a:p>
+            <a:pPr lvl="0"/>
+            <a:r>
+              <a:rPr lang="es-ES"/>
+              <a:t>Haga clic para modificar los estilos de texto del patrón</a:t>
+            </a:r>
+          </a:p>
+        </p:txBody>
+      </p:sp>
+      <p:cxnSp>
+        <p:nvCxnSpPr>
+          <p:cNvPr id="19" name="Straight Connector 18"/>
+          <p:cNvCxnSpPr/>
+          <p:nvPr/>
+        </p:nvCxnSpPr>
+        <p:spPr>
+          <a:xfrm>
+            <a:off x="2235685" y="1706880"/>
+            <a:ext cx="0" cy="3169920"/>
+          </a:xfrm>
+          <a:prstGeom prst="line">
+            <a:avLst/>
+          </a:prstGeom>
+          <a:ln w="12700" cmpd="sng">
+            <a:solidFill>
+              <a:schemeClr val="bg2">
+                <a:lumMod val="40000"/>
+                <a:lumOff val="60000"/>
+                <a:alpha val="40000"/>
+              </a:schemeClr>
+            </a:solidFill>
+          </a:ln>
+        </p:spPr>
+        <p:style>
+          <a:lnRef idx="2">
+            <a:schemeClr val="accent1"/>
+          </a:lnRef>
+          <a:fillRef idx="0">
+            <a:schemeClr val="accent1"/>
+          </a:fillRef>
+          <a:effectRef idx="1">
+            <a:schemeClr val="accent1"/>
+          </a:effectRef>
+          <a:fontRef idx="minor">
+            <a:schemeClr val="tx1"/>
+          </a:fontRef>
+        </p:style>
+      </p:cxnSp>
+      <p:cxnSp>
+        <p:nvCxnSpPr>
+          <p:cNvPr id="20" name="Straight Connector 19"/>
+          <p:cNvCxnSpPr/>
+          <p:nvPr/>
+        </p:nvCxnSpPr>
+        <p:spPr>
+          <a:xfrm>
+            <a:off x="4177336" y="1706880"/>
+            <a:ext cx="0" cy="3173506"/>
+          </a:xfrm>
+          <a:prstGeom prst="line">
+            <a:avLst/>
+          </a:prstGeom>
+          <a:ln w="12700" cmpd="sng">
+            <a:solidFill>
+              <a:schemeClr val="bg2">
+                <a:lumMod val="40000"/>
+                <a:lumOff val="60000"/>
+                <a:alpha val="40000"/>
+              </a:schemeClr>
+            </a:solidFill>
+          </a:ln>
+        </p:spPr>
+        <p:style>
+          <a:lnRef idx="2">
+            <a:schemeClr val="accent1"/>
+          </a:lnRef>
+          <a:fillRef idx="0">
+            <a:schemeClr val="accent1"/>
+          </a:fillRef>
+          <a:effectRef idx="1">
+            <a:schemeClr val="accent1"/>
+          </a:effectRef>
+          <a:fontRef idx="minor">
+            <a:schemeClr val="tx1"/>
+          </a:fontRef>
+        </p:style>
+      </p:cxnSp>
+      <p:sp>
+        <p:nvSpPr>
+          <p:cNvPr id="7" name="Date Placeholder 3"/>
+          <p:cNvSpPr>
+            <a:spLocks noGrp="1"/>
+          </p:cNvSpPr>
+          <p:nvPr>
+            <p:ph type="dt" sz="half" idx="10"/>
+          </p:nvPr>
+        </p:nvSpPr>
+        <p:spPr/>
+        <p:txBody>
+          <a:bodyPr/>
+          <a:lstStyle/>
+          <a:p>
+            <a:fld id="{E03C0CA2-AF3B-45DA-B95C-F3B757DF4AEA}" type="datetimeFigureOut">
+              <a:rPr lang="es-GT" smtClean="0"/>
+              <a:t>7/08/2026</a:t>
+            </a:fld>
+            <a:endParaRPr lang="es-GT"/>
+          </a:p>
+        </p:txBody>
+      </p:sp>
+      <p:sp>
+        <p:nvSpPr>
+          <p:cNvPr id="4" name="Footer Placeholder 4"/>
+          <p:cNvSpPr>
+            <a:spLocks noGrp="1"/>
+          </p:cNvSpPr>
+          <p:nvPr>
+            <p:ph type="ftr" sz="quarter" idx="11"/>
+          </p:nvPr>
+        </p:nvSpPr>
+        <p:spPr/>
+        <p:txBody>
+          <a:bodyPr/>
+          <a:lstStyle/>
+          <a:p>
+            <a:endParaRPr lang="es-GT"/>
+          </a:p>
+        </p:txBody>
+      </p:sp>
+      <p:sp>
+        <p:nvSpPr>
+          <p:cNvPr id="6" name="Slide Number Placeholder 5"/>
+          <p:cNvSpPr>
+            <a:spLocks noGrp="1"/>
+          </p:cNvSpPr>
+          <p:nvPr>
+            <p:ph type="sldNum" sz="quarter" idx="12"/>
+          </p:nvPr>
+        </p:nvSpPr>
+        <p:spPr/>
+        <p:txBody>
+          <a:bodyPr/>
+          <a:lstStyle/>
+          <a:p>
+            <a:fld id="{F5A1B9F3-D9AB-4E80-BD88-E1CDBD879FEC}" type="slidenum">
+              <a:rPr lang="es-GT" smtClean="0"/>
+              <a:t>‹Nº›</a:t>
+            </a:fld>
+            <a:endParaRPr lang="es-GT"/>
+          </a:p>
+        </p:txBody>
+      </p:sp>
+    </p:spTree>
+    <p:extLst>
+      <p:ext uri="{BB962C8B-B14F-4D97-AF65-F5344CB8AC3E}">
+        <p14:creationId xmlns:p14="http://schemas.microsoft.com/office/powerpoint/2010/main" val="4263759500"/>
+      </p:ext>
+    </p:extLst>
+  </p:cSld>
+  <p:clrMapOvr>
+    <a:masterClrMapping/>
+  </p:clrMapOvr>
+</p:sldLayout>
+</file>
+
+<file path=ppt/slideLayouts/slideLayout16.xml><?xml version="1.0" encoding="utf-8"?>
 <p:sldLayout xmlns:a="http://schemas.openxmlformats.org/drawingml/2006/main" xmlns:r="http://schemas.openxmlformats.org/officeDocument/2006/relationships" xmlns:p="http://schemas.openxmlformats.org/presentationml/2006/main" type="vertTx" preserve="1">
   <p:cSld name="Título y texto vertical">
     <p:spTree>
@@ -361,13 +2952,7 @@
       </p:grpSpPr>
       <p:sp>
         <p:nvSpPr>
-          <p:cNvPr id="2" name="Título 1">
-            <a:extLst>
-              <a:ext uri="{FF2B5EF4-FFF2-40B4-BE49-F238E27FC236}">
-                <a16:creationId xmlns:a16="http://schemas.microsoft.com/office/drawing/2014/main" id="{473AFC1C-0EFE-21A3-7097-8A28E693D672}"/>
-              </a:ext>
-            </a:extLst>
-          </p:cNvPr>
+          <p:cNvPr id="2" name="Title 1"/>
           <p:cNvSpPr>
             <a:spLocks noGrp="1"/>
           </p:cNvSpPr>
@@ -384,19 +2969,13 @@
               <a:rPr lang="es-ES"/>
               <a:t>Haga clic para modificar el estilo de título del patrón</a:t>
             </a:r>
-            <a:endParaRPr lang="es-GT"/>
-          </a:p>
-        </p:txBody>
-      </p:sp>
-      <p:sp>
-        <p:nvSpPr>
-          <p:cNvPr id="3" name="Marcador de texto vertical 2">
-            <a:extLst>
-              <a:ext uri="{FF2B5EF4-FFF2-40B4-BE49-F238E27FC236}">
-                <a16:creationId xmlns:a16="http://schemas.microsoft.com/office/drawing/2014/main" id="{DA27DF4F-F045-A517-5797-599508608D13}"/>
-              </a:ext>
-            </a:extLst>
-          </p:cNvPr>
+            <a:endParaRPr lang="en-US" dirty="0"/>
+          </a:p>
+        </p:txBody>
+      </p:sp>
+      <p:sp>
+        <p:nvSpPr>
+          <p:cNvPr id="3" name="Vertical Text Placeholder 2"/>
           <p:cNvSpPr>
             <a:spLocks noGrp="1"/>
           </p:cNvSpPr>
@@ -406,7 +2985,7 @@
         </p:nvSpPr>
         <p:spPr/>
         <p:txBody>
-          <a:bodyPr vert="eaVert"/>
+          <a:bodyPr vert="eaVert" anchor="t" anchorCtr="0"/>
           <a:lstStyle/>
           <a:p>
             <a:pPr lvl="0"/>
@@ -442,19 +3021,13 @@
               <a:rPr lang="es-ES"/>
               <a:t>Quinto nivel</a:t>
             </a:r>
-            <a:endParaRPr lang="es-GT"/>
-          </a:p>
-        </p:txBody>
-      </p:sp>
-      <p:sp>
-        <p:nvSpPr>
-          <p:cNvPr id="4" name="Marcador de fecha 3">
-            <a:extLst>
-              <a:ext uri="{FF2B5EF4-FFF2-40B4-BE49-F238E27FC236}">
-                <a16:creationId xmlns:a16="http://schemas.microsoft.com/office/drawing/2014/main" id="{CC56A4CD-CABB-5F0E-777B-8EB91D8951D3}"/>
-              </a:ext>
-            </a:extLst>
-          </p:cNvPr>
+            <a:endParaRPr lang="en-US" dirty="0"/>
+          </a:p>
+        </p:txBody>
+      </p:sp>
+      <p:sp>
+        <p:nvSpPr>
+          <p:cNvPr id="4" name="Date Placeholder 3"/>
           <p:cNvSpPr>
             <a:spLocks noGrp="1"/>
           </p:cNvSpPr>
@@ -467,7 +3040,7 @@
           <a:bodyPr/>
           <a:lstStyle/>
           <a:p>
-            <a:fld id="{938F7005-820C-452D-BD0A-9792EB6D2BE3}" type="datetimeFigureOut">
+            <a:fld id="{E03C0CA2-AF3B-45DA-B95C-F3B757DF4AEA}" type="datetimeFigureOut">
               <a:rPr lang="es-GT" smtClean="0"/>
               <a:t>7/08/2026</a:t>
             </a:fld>
@@ -477,13 +3050,7 @@
       </p:sp>
       <p:sp>
         <p:nvSpPr>
-          <p:cNvPr id="5" name="Marcador de pie de página 4">
-            <a:extLst>
-              <a:ext uri="{FF2B5EF4-FFF2-40B4-BE49-F238E27FC236}">
-                <a16:creationId xmlns:a16="http://schemas.microsoft.com/office/drawing/2014/main" id="{127B111E-7C57-6E39-0229-03ECC978FFA8}"/>
-              </a:ext>
-            </a:extLst>
-          </p:cNvPr>
+          <p:cNvPr id="5" name="Footer Placeholder 4"/>
           <p:cNvSpPr>
             <a:spLocks noGrp="1"/>
           </p:cNvSpPr>
@@ -502,13 +3069,7 @@
       </p:sp>
       <p:sp>
         <p:nvSpPr>
-          <p:cNvPr id="6" name="Marcador de número de diapositiva 5">
-            <a:extLst>
-              <a:ext uri="{FF2B5EF4-FFF2-40B4-BE49-F238E27FC236}">
-                <a16:creationId xmlns:a16="http://schemas.microsoft.com/office/drawing/2014/main" id="{A00BF44F-CA93-2AA6-C5C3-0CB93292F14E}"/>
-              </a:ext>
-            </a:extLst>
-          </p:cNvPr>
+          <p:cNvPr id="6" name="Slide Number Placeholder 5"/>
           <p:cNvSpPr>
             <a:spLocks noGrp="1"/>
           </p:cNvSpPr>
@@ -521,7 +3082,7 @@
           <a:bodyPr/>
           <a:lstStyle/>
           <a:p>
-            <a:fld id="{A2FD0973-D230-4D6C-8B64-DA38D2160AAC}" type="slidenum">
+            <a:fld id="{F5A1B9F3-D9AB-4E80-BD88-E1CDBD879FEC}" type="slidenum">
               <a:rPr lang="es-GT" smtClean="0"/>
               <a:t>‹Nº›</a:t>
             </a:fld>
@@ -532,7 +3093,7 @@
     </p:spTree>
     <p:extLst>
       <p:ext uri="{BB962C8B-B14F-4D97-AF65-F5344CB8AC3E}">
-        <p14:creationId xmlns:p14="http://schemas.microsoft.com/office/powerpoint/2010/main" val="2112610499"/>
+        <p14:creationId xmlns:p14="http://schemas.microsoft.com/office/powerpoint/2010/main" val="2255993234"/>
       </p:ext>
     </p:extLst>
   </p:cSld>
@@ -542,7 +3103,7 @@
 </p:sldLayout>
 </file>
 
-<file path=ppt/slideLayouts/slideLayout11.xml><?xml version="1.0" encoding="utf-8"?>
+<file path=ppt/slideLayouts/slideLayout17.xml><?xml version="1.0" encoding="utf-8"?>
 <p:sldLayout xmlns:a="http://schemas.openxmlformats.org/drawingml/2006/main" xmlns:r="http://schemas.openxmlformats.org/officeDocument/2006/relationships" xmlns:p="http://schemas.openxmlformats.org/presentationml/2006/main" type="vertTitleAndTx" preserve="1">
   <p:cSld name="Título vertical y texto">
     <p:spTree>
@@ -561,13 +3122,7 @@
       </p:grpSpPr>
       <p:sp>
         <p:nvSpPr>
-          <p:cNvPr id="2" name="Título vertical 1">
-            <a:extLst>
-              <a:ext uri="{FF2B5EF4-FFF2-40B4-BE49-F238E27FC236}">
-                <a16:creationId xmlns:a16="http://schemas.microsoft.com/office/drawing/2014/main" id="{975A0111-E4F2-ADA5-5BFB-51DBE9D221AD}"/>
-              </a:ext>
-            </a:extLst>
-          </p:cNvPr>
+          <p:cNvPr id="2" name="Vertical Title 1"/>
           <p:cNvSpPr>
             <a:spLocks noGrp="1"/>
           </p:cNvSpPr>
@@ -577,31 +3132,25 @@
         </p:nvSpPr>
         <p:spPr>
           <a:xfrm>
-            <a:off x="5234940" y="292100"/>
-            <a:ext cx="1577340" cy="4649470"/>
+            <a:off x="4982527" y="344171"/>
+            <a:ext cx="1051561" cy="4660900"/>
           </a:xfrm>
         </p:spPr>
         <p:txBody>
-          <a:bodyPr vert="eaVert"/>
+          <a:bodyPr vert="eaVert" anchor="b" anchorCtr="0"/>
           <a:lstStyle/>
           <a:p>
             <a:r>
               <a:rPr lang="es-ES"/>
               <a:t>Haga clic para modificar el estilo de título del patrón</a:t>
             </a:r>
-            <a:endParaRPr lang="es-GT"/>
-          </a:p>
-        </p:txBody>
-      </p:sp>
-      <p:sp>
-        <p:nvSpPr>
-          <p:cNvPr id="3" name="Marcador de texto vertical 2">
-            <a:extLst>
-              <a:ext uri="{FF2B5EF4-FFF2-40B4-BE49-F238E27FC236}">
-                <a16:creationId xmlns:a16="http://schemas.microsoft.com/office/drawing/2014/main" id="{E7D8FCCB-276A-0079-A891-5E51CE98843D}"/>
-              </a:ext>
-            </a:extLst>
-          </p:cNvPr>
+            <a:endParaRPr lang="en-US" dirty="0"/>
+          </a:p>
+        </p:txBody>
+      </p:sp>
+      <p:sp>
+        <p:nvSpPr>
+          <p:cNvPr id="3" name="Vertical Text Placeholder 2"/>
           <p:cNvSpPr>
             <a:spLocks noGrp="1"/>
           </p:cNvSpPr>
@@ -611,8 +3160,8 @@
         </p:nvSpPr>
         <p:spPr>
           <a:xfrm>
-            <a:off x="502920" y="292100"/>
-            <a:ext cx="4640580" cy="4649470"/>
+            <a:off x="391478" y="709931"/>
+            <a:ext cx="4453889" cy="4295139"/>
           </a:xfrm>
         </p:spPr>
         <p:txBody>
@@ -652,19 +3201,13 @@
               <a:rPr lang="es-ES"/>
               <a:t>Quinto nivel</a:t>
             </a:r>
-            <a:endParaRPr lang="es-GT"/>
-          </a:p>
-        </p:txBody>
-      </p:sp>
-      <p:sp>
-        <p:nvSpPr>
-          <p:cNvPr id="4" name="Marcador de fecha 3">
-            <a:extLst>
-              <a:ext uri="{FF2B5EF4-FFF2-40B4-BE49-F238E27FC236}">
-                <a16:creationId xmlns:a16="http://schemas.microsoft.com/office/drawing/2014/main" id="{BDBE71EC-D68B-2E90-8F67-04ADE2DB95DC}"/>
-              </a:ext>
-            </a:extLst>
-          </p:cNvPr>
+            <a:endParaRPr lang="en-US" dirty="0"/>
+          </a:p>
+        </p:txBody>
+      </p:sp>
+      <p:sp>
+        <p:nvSpPr>
+          <p:cNvPr id="4" name="Date Placeholder 3"/>
           <p:cNvSpPr>
             <a:spLocks noGrp="1"/>
           </p:cNvSpPr>
@@ -677,7 +3220,7 @@
           <a:bodyPr/>
           <a:lstStyle/>
           <a:p>
-            <a:fld id="{938F7005-820C-452D-BD0A-9792EB6D2BE3}" type="datetimeFigureOut">
+            <a:fld id="{E03C0CA2-AF3B-45DA-B95C-F3B757DF4AEA}" type="datetimeFigureOut">
               <a:rPr lang="es-GT" smtClean="0"/>
               <a:t>7/08/2026</a:t>
             </a:fld>
@@ -687,13 +3230,7 @@
       </p:sp>
       <p:sp>
         <p:nvSpPr>
-          <p:cNvPr id="5" name="Marcador de pie de página 4">
-            <a:extLst>
-              <a:ext uri="{FF2B5EF4-FFF2-40B4-BE49-F238E27FC236}">
-                <a16:creationId xmlns:a16="http://schemas.microsoft.com/office/drawing/2014/main" id="{6D84F156-AFCB-61B3-2B71-A829719FDC12}"/>
-              </a:ext>
-            </a:extLst>
-          </p:cNvPr>
+          <p:cNvPr id="5" name="Footer Placeholder 4"/>
           <p:cNvSpPr>
             <a:spLocks noGrp="1"/>
           </p:cNvSpPr>
@@ -712,13 +3249,7 @@
       </p:sp>
       <p:sp>
         <p:nvSpPr>
-          <p:cNvPr id="6" name="Marcador de número de diapositiva 5">
-            <a:extLst>
-              <a:ext uri="{FF2B5EF4-FFF2-40B4-BE49-F238E27FC236}">
-                <a16:creationId xmlns:a16="http://schemas.microsoft.com/office/drawing/2014/main" id="{DB8D4E4E-AA23-DB9C-007B-A7B9616823D2}"/>
-              </a:ext>
-            </a:extLst>
-          </p:cNvPr>
+          <p:cNvPr id="6" name="Slide Number Placeholder 5"/>
           <p:cNvSpPr>
             <a:spLocks noGrp="1"/>
           </p:cNvSpPr>
@@ -731,7 +3262,7 @@
           <a:bodyPr/>
           <a:lstStyle/>
           <a:p>
-            <a:fld id="{A2FD0973-D230-4D6C-8B64-DA38D2160AAC}" type="slidenum">
+            <a:fld id="{F5A1B9F3-D9AB-4E80-BD88-E1CDBD879FEC}" type="slidenum">
               <a:rPr lang="es-GT" smtClean="0"/>
               <a:t>‹Nº›</a:t>
             </a:fld>
@@ -742,7 +3273,7 @@
     </p:spTree>
     <p:extLst>
       <p:ext uri="{BB962C8B-B14F-4D97-AF65-F5344CB8AC3E}">
-        <p14:creationId xmlns:p14="http://schemas.microsoft.com/office/powerpoint/2010/main" val="1387397"/>
+        <p14:creationId xmlns:p14="http://schemas.microsoft.com/office/powerpoint/2010/main" val="3273009496"/>
       </p:ext>
     </p:extLst>
   </p:cSld>
@@ -771,13 +3302,7 @@
       </p:grpSpPr>
       <p:sp>
         <p:nvSpPr>
-          <p:cNvPr id="2" name="Título 1">
-            <a:extLst>
-              <a:ext uri="{FF2B5EF4-FFF2-40B4-BE49-F238E27FC236}">
-                <a16:creationId xmlns:a16="http://schemas.microsoft.com/office/drawing/2014/main" id="{A2750C56-FAD1-231F-9AD8-3CEFE68FC0EC}"/>
-              </a:ext>
-            </a:extLst>
-          </p:cNvPr>
+          <p:cNvPr id="2" name="Title 1"/>
           <p:cNvSpPr>
             <a:spLocks noGrp="1"/>
           </p:cNvSpPr>
@@ -794,19 +3319,13 @@
               <a:rPr lang="es-ES"/>
               <a:t>Haga clic para modificar el estilo de título del patrón</a:t>
             </a:r>
-            <a:endParaRPr lang="es-GT"/>
-          </a:p>
-        </p:txBody>
-      </p:sp>
-      <p:sp>
-        <p:nvSpPr>
-          <p:cNvPr id="3" name="Marcador de contenido 2">
-            <a:extLst>
-              <a:ext uri="{FF2B5EF4-FFF2-40B4-BE49-F238E27FC236}">
-                <a16:creationId xmlns:a16="http://schemas.microsoft.com/office/drawing/2014/main" id="{0D5FE329-A6A6-FBCB-2FAA-DC4C09312D7E}"/>
-              </a:ext>
-            </a:extLst>
-          </p:cNvPr>
+            <a:endParaRPr lang="en-US" dirty="0"/>
+          </a:p>
+        </p:txBody>
+      </p:sp>
+      <p:sp>
+        <p:nvSpPr>
+          <p:cNvPr id="3" name="Content Placeholder 2"/>
           <p:cNvSpPr>
             <a:spLocks noGrp="1"/>
           </p:cNvSpPr>
@@ -852,19 +3371,13 @@
               <a:rPr lang="es-ES"/>
               <a:t>Quinto nivel</a:t>
             </a:r>
-            <a:endParaRPr lang="es-GT"/>
-          </a:p>
-        </p:txBody>
-      </p:sp>
-      <p:sp>
-        <p:nvSpPr>
-          <p:cNvPr id="4" name="Marcador de fecha 3">
-            <a:extLst>
-              <a:ext uri="{FF2B5EF4-FFF2-40B4-BE49-F238E27FC236}">
-                <a16:creationId xmlns:a16="http://schemas.microsoft.com/office/drawing/2014/main" id="{761131F2-6790-FD37-31BC-E1D63A29E603}"/>
-              </a:ext>
-            </a:extLst>
-          </p:cNvPr>
+            <a:endParaRPr lang="en-US" dirty="0"/>
+          </a:p>
+        </p:txBody>
+      </p:sp>
+      <p:sp>
+        <p:nvSpPr>
+          <p:cNvPr id="7" name="Date Placeholder 3"/>
           <p:cNvSpPr>
             <a:spLocks noGrp="1"/>
           </p:cNvSpPr>
@@ -877,7 +3390,7 @@
           <a:bodyPr/>
           <a:lstStyle/>
           <a:p>
-            <a:fld id="{938F7005-820C-452D-BD0A-9792EB6D2BE3}" type="datetimeFigureOut">
+            <a:fld id="{E03C0CA2-AF3B-45DA-B95C-F3B757DF4AEA}" type="datetimeFigureOut">
               <a:rPr lang="es-GT" smtClean="0"/>
               <a:t>7/08/2026</a:t>
             </a:fld>
@@ -887,13 +3400,7 @@
       </p:sp>
       <p:sp>
         <p:nvSpPr>
-          <p:cNvPr id="5" name="Marcador de pie de página 4">
-            <a:extLst>
-              <a:ext uri="{FF2B5EF4-FFF2-40B4-BE49-F238E27FC236}">
-                <a16:creationId xmlns:a16="http://schemas.microsoft.com/office/drawing/2014/main" id="{D326BC82-4249-C35E-E22E-E1309741F305}"/>
-              </a:ext>
-            </a:extLst>
-          </p:cNvPr>
+          <p:cNvPr id="5" name="Footer Placeholder 4"/>
           <p:cNvSpPr>
             <a:spLocks noGrp="1"/>
           </p:cNvSpPr>
@@ -912,13 +3419,7 @@
       </p:sp>
       <p:sp>
         <p:nvSpPr>
-          <p:cNvPr id="6" name="Marcador de número de diapositiva 5">
-            <a:extLst>
-              <a:ext uri="{FF2B5EF4-FFF2-40B4-BE49-F238E27FC236}">
-                <a16:creationId xmlns:a16="http://schemas.microsoft.com/office/drawing/2014/main" id="{A5622B6D-CE23-43CC-8202-3A8633941EFB}"/>
-              </a:ext>
-            </a:extLst>
-          </p:cNvPr>
+          <p:cNvPr id="6" name="Slide Number Placeholder 5"/>
           <p:cNvSpPr>
             <a:spLocks noGrp="1"/>
           </p:cNvSpPr>
@@ -931,7 +3432,7 @@
           <a:bodyPr/>
           <a:lstStyle/>
           <a:p>
-            <a:fld id="{A2FD0973-D230-4D6C-8B64-DA38D2160AAC}" type="slidenum">
+            <a:fld id="{F5A1B9F3-D9AB-4E80-BD88-E1CDBD879FEC}" type="slidenum">
               <a:rPr lang="es-GT" smtClean="0"/>
               <a:t>‹Nº›</a:t>
             </a:fld>
@@ -942,7 +3443,7 @@
     </p:spTree>
     <p:extLst>
       <p:ext uri="{BB962C8B-B14F-4D97-AF65-F5344CB8AC3E}">
-        <p14:creationId xmlns:p14="http://schemas.microsoft.com/office/powerpoint/2010/main" val="91062838"/>
+        <p14:creationId xmlns:p14="http://schemas.microsoft.com/office/powerpoint/2010/main" val="622049111"/>
       </p:ext>
     </p:extLst>
   </p:cSld>
@@ -971,13 +3472,7 @@
       </p:grpSpPr>
       <p:sp>
         <p:nvSpPr>
-          <p:cNvPr id="2" name="Título 1">
-            <a:extLst>
-              <a:ext uri="{FF2B5EF4-FFF2-40B4-BE49-F238E27FC236}">
-                <a16:creationId xmlns:a16="http://schemas.microsoft.com/office/drawing/2014/main" id="{2A32C614-D7F3-67BD-FE6B-55BC01F24CCF}"/>
-              </a:ext>
-            </a:extLst>
-          </p:cNvPr>
+          <p:cNvPr id="2" name="Title 1"/>
           <p:cNvSpPr>
             <a:spLocks noGrp="1"/>
           </p:cNvSpPr>
@@ -987,15 +3482,15 @@
         </p:nvSpPr>
         <p:spPr>
           <a:xfrm>
-            <a:off x="499110" y="1367791"/>
-            <a:ext cx="6309360" cy="2282190"/>
+            <a:off x="692974" y="2289387"/>
+            <a:ext cx="5295394" cy="1532518"/>
           </a:xfrm>
         </p:spPr>
         <p:txBody>
           <a:bodyPr anchor="b"/>
           <a:lstStyle>
-            <a:lvl1pPr>
-              <a:defRPr sz="3600"/>
+            <a:lvl1pPr algn="l">
+              <a:defRPr sz="2400" b="0" cap="none"/>
             </a:lvl1pPr>
           </a:lstStyle>
           <a:p>
@@ -1003,19 +3498,13 @@
               <a:rPr lang="es-ES"/>
               <a:t>Haga clic para modificar el estilo de título del patrón</a:t>
             </a:r>
-            <a:endParaRPr lang="es-GT"/>
-          </a:p>
-        </p:txBody>
-      </p:sp>
-      <p:sp>
-        <p:nvSpPr>
-          <p:cNvPr id="3" name="Marcador de texto 2">
-            <a:extLst>
-              <a:ext uri="{FF2B5EF4-FFF2-40B4-BE49-F238E27FC236}">
-                <a16:creationId xmlns:a16="http://schemas.microsoft.com/office/drawing/2014/main" id="{7302D51B-22BF-4F59-D60B-67861768FC89}"/>
-              </a:ext>
-            </a:extLst>
-          </p:cNvPr>
+            <a:endParaRPr lang="en-US" dirty="0"/>
+          </a:p>
+        </p:txBody>
+      </p:sp>
+      <p:sp>
+        <p:nvSpPr>
+          <p:cNvPr id="3" name="Text Placeholder 2"/>
           <p:cNvSpPr>
             <a:spLocks noGrp="1"/>
           </p:cNvSpPr>
@@ -1025,99 +3514,100 @@
         </p:nvSpPr>
         <p:spPr>
           <a:xfrm>
-            <a:off x="499110" y="3671571"/>
-            <a:ext cx="6309360" cy="1200150"/>
+            <a:off x="692973" y="3821905"/>
+            <a:ext cx="5295395" cy="688320"/>
           </a:xfrm>
         </p:spPr>
         <p:txBody>
-          <a:bodyPr/>
+          <a:bodyPr anchor="t"/>
           <a:lstStyle>
-            <a:lvl1pPr marL="0" indent="0">
-              <a:buNone/>
-              <a:defRPr sz="1440">
+            <a:lvl1pPr marL="0" indent="0" algn="l">
+              <a:buNone/>
+              <a:defRPr sz="1200" cap="all">
                 <a:solidFill>
-                  <a:schemeClr val="tx1">
-                    <a:tint val="82000"/>
+                  <a:schemeClr val="bg2">
+                    <a:lumMod val="40000"/>
+                    <a:lumOff val="60000"/>
                   </a:schemeClr>
                 </a:solidFill>
               </a:defRPr>
             </a:lvl1pPr>
             <a:lvl2pPr marL="274320" indent="0">
               <a:buNone/>
-              <a:defRPr sz="1200">
+              <a:defRPr sz="1080">
                 <a:solidFill>
                   <a:schemeClr val="tx1">
-                    <a:tint val="82000"/>
+                    <a:tint val="75000"/>
                   </a:schemeClr>
                 </a:solidFill>
               </a:defRPr>
             </a:lvl2pPr>
             <a:lvl3pPr marL="548640" indent="0">
               <a:buNone/>
-              <a:defRPr sz="1080">
+              <a:defRPr sz="960">
                 <a:solidFill>
                   <a:schemeClr val="tx1">
-                    <a:tint val="82000"/>
+                    <a:tint val="75000"/>
                   </a:schemeClr>
                 </a:solidFill>
               </a:defRPr>
             </a:lvl3pPr>
             <a:lvl4pPr marL="822960" indent="0">
               <a:buNone/>
-              <a:defRPr sz="960">
+              <a:defRPr sz="840">
                 <a:solidFill>
                   <a:schemeClr val="tx1">
-                    <a:tint val="82000"/>
+                    <a:tint val="75000"/>
                   </a:schemeClr>
                 </a:solidFill>
               </a:defRPr>
             </a:lvl4pPr>
             <a:lvl5pPr marL="1097280" indent="0">
               <a:buNone/>
-              <a:defRPr sz="960">
+              <a:defRPr sz="840">
                 <a:solidFill>
                   <a:schemeClr val="tx1">
-                    <a:tint val="82000"/>
+                    <a:tint val="75000"/>
                   </a:schemeClr>
                 </a:solidFill>
               </a:defRPr>
             </a:lvl5pPr>
             <a:lvl6pPr marL="1371600" indent="0">
               <a:buNone/>
-              <a:defRPr sz="960">
+              <a:defRPr sz="840">
                 <a:solidFill>
                   <a:schemeClr val="tx1">
-                    <a:tint val="82000"/>
+                    <a:tint val="75000"/>
                   </a:schemeClr>
                 </a:solidFill>
               </a:defRPr>
             </a:lvl6pPr>
             <a:lvl7pPr marL="1645920" indent="0">
               <a:buNone/>
-              <a:defRPr sz="960">
+              <a:defRPr sz="840">
                 <a:solidFill>
                   <a:schemeClr val="tx1">
-                    <a:tint val="82000"/>
+                    <a:tint val="75000"/>
                   </a:schemeClr>
                 </a:solidFill>
               </a:defRPr>
             </a:lvl7pPr>
             <a:lvl8pPr marL="1920240" indent="0">
               <a:buNone/>
-              <a:defRPr sz="960">
+              <a:defRPr sz="840">
                 <a:solidFill>
                   <a:schemeClr val="tx1">
-                    <a:tint val="82000"/>
+                    <a:tint val="75000"/>
                   </a:schemeClr>
                 </a:solidFill>
               </a:defRPr>
             </a:lvl8pPr>
             <a:lvl9pPr marL="2194560" indent="0">
               <a:buNone/>
-              <a:defRPr sz="960">
+              <a:defRPr sz="840">
                 <a:solidFill>
                   <a:schemeClr val="tx1">
-                    <a:tint val="82000"/>
+                    <a:tint val="75000"/>
                   </a:schemeClr>
                 </a:solidFill>
               </a:defRPr>
@@ -1134,13 +3624,7 @@
       </p:sp>
       <p:sp>
         <p:nvSpPr>
-          <p:cNvPr id="4" name="Marcador de fecha 3">
-            <a:extLst>
-              <a:ext uri="{FF2B5EF4-FFF2-40B4-BE49-F238E27FC236}">
-                <a16:creationId xmlns:a16="http://schemas.microsoft.com/office/drawing/2014/main" id="{62FF4B01-B422-0151-CE2F-1621C09731ED}"/>
-              </a:ext>
-            </a:extLst>
-          </p:cNvPr>
+          <p:cNvPr id="4" name="Date Placeholder 3"/>
           <p:cNvSpPr>
             <a:spLocks noGrp="1"/>
           </p:cNvSpPr>
@@ -1153,7 +3637,7 @@
           <a:bodyPr/>
           <a:lstStyle/>
           <a:p>
-            <a:fld id="{938F7005-820C-452D-BD0A-9792EB6D2BE3}" type="datetimeFigureOut">
+            <a:fld id="{E03C0CA2-AF3B-45DA-B95C-F3B757DF4AEA}" type="datetimeFigureOut">
               <a:rPr lang="es-GT" smtClean="0"/>
               <a:t>7/08/2026</a:t>
             </a:fld>
@@ -1163,13 +3647,7 @@
       </p:sp>
       <p:sp>
         <p:nvSpPr>
-          <p:cNvPr id="5" name="Marcador de pie de página 4">
-            <a:extLst>
-              <a:ext uri="{FF2B5EF4-FFF2-40B4-BE49-F238E27FC236}">
-                <a16:creationId xmlns:a16="http://schemas.microsoft.com/office/drawing/2014/main" id="{E2D2B427-E626-C16D-4A9E-E798B204B63A}"/>
-              </a:ext>
-            </a:extLst>
-          </p:cNvPr>
+          <p:cNvPr id="5" name="Footer Placeholder 4"/>
           <p:cNvSpPr>
             <a:spLocks noGrp="1"/>
           </p:cNvSpPr>
@@ -1188,13 +3666,7 @@
       </p:sp>
       <p:sp>
         <p:nvSpPr>
-          <p:cNvPr id="6" name="Marcador de número de diapositiva 5">
-            <a:extLst>
-              <a:ext uri="{FF2B5EF4-FFF2-40B4-BE49-F238E27FC236}">
-                <a16:creationId xmlns:a16="http://schemas.microsoft.com/office/drawing/2014/main" id="{6A2FA1EF-32D9-D338-2B73-D82C36DFF48D}"/>
-              </a:ext>
-            </a:extLst>
-          </p:cNvPr>
+          <p:cNvPr id="6" name="Slide Number Placeholder 5"/>
           <p:cNvSpPr>
             <a:spLocks noGrp="1"/>
           </p:cNvSpPr>
@@ -1207,7 +3679,7 @@
           <a:bodyPr/>
           <a:lstStyle/>
           <a:p>
-            <a:fld id="{A2FD0973-D230-4D6C-8B64-DA38D2160AAC}" type="slidenum">
+            <a:fld id="{F5A1B9F3-D9AB-4E80-BD88-E1CDBD879FEC}" type="slidenum">
               <a:rPr lang="es-GT" smtClean="0"/>
               <a:t>‹Nº›</a:t>
             </a:fld>
@@ -1218,7 +3690,7 @@
     </p:spTree>
     <p:extLst>
       <p:ext uri="{BB962C8B-B14F-4D97-AF65-F5344CB8AC3E}">
-        <p14:creationId xmlns:p14="http://schemas.microsoft.com/office/powerpoint/2010/main" val="2196728533"/>
+        <p14:creationId xmlns:p14="http://schemas.microsoft.com/office/powerpoint/2010/main" val="4242699951"/>
       </p:ext>
     </p:extLst>
   </p:cSld>
@@ -1247,13 +3719,7 @@
       </p:grpSpPr>
       <p:sp>
         <p:nvSpPr>
-          <p:cNvPr id="2" name="Título 1">
-            <a:extLst>
-              <a:ext uri="{FF2B5EF4-FFF2-40B4-BE49-F238E27FC236}">
-                <a16:creationId xmlns:a16="http://schemas.microsoft.com/office/drawing/2014/main" id="{BE83E83A-8306-0AA6-42A5-4B60F76BC190}"/>
-              </a:ext>
-            </a:extLst>
-          </p:cNvPr>
+          <p:cNvPr id="2" name="Title 1"/>
           <p:cNvSpPr>
             <a:spLocks noGrp="1"/>
           </p:cNvSpPr>
@@ -1270,19 +3736,13 @@
               <a:rPr lang="es-ES"/>
               <a:t>Haga clic para modificar el estilo de título del patrón</a:t>
             </a:r>
-            <a:endParaRPr lang="es-GT"/>
-          </a:p>
-        </p:txBody>
-      </p:sp>
-      <p:sp>
-        <p:nvSpPr>
-          <p:cNvPr id="3" name="Marcador de contenido 2">
-            <a:extLst>
-              <a:ext uri="{FF2B5EF4-FFF2-40B4-BE49-F238E27FC236}">
-                <a16:creationId xmlns:a16="http://schemas.microsoft.com/office/drawing/2014/main" id="{F6A030DF-7885-59B3-B947-7532491727AB}"/>
-              </a:ext>
-            </a:extLst>
-          </p:cNvPr>
+            <a:endParaRPr lang="en-US" dirty="0"/>
+          </a:p>
+        </p:txBody>
+      </p:sp>
+      <p:sp>
+        <p:nvSpPr>
+          <p:cNvPr id="3" name="Content Placeholder 2"/>
           <p:cNvSpPr>
             <a:spLocks noGrp="1"/>
           </p:cNvSpPr>
@@ -1292,13 +3752,43 @@
         </p:nvSpPr>
         <p:spPr>
           <a:xfrm>
-            <a:off x="502920" y="1460500"/>
-            <a:ext cx="3108960" cy="3481070"/>
+            <a:off x="661988" y="1648461"/>
+            <a:ext cx="2637803" cy="3356610"/>
           </a:xfrm>
         </p:spPr>
         <p:txBody>
-          <a:bodyPr/>
-          <a:lstStyle/>
+          <a:bodyPr>
+            <a:normAutofit/>
+          </a:bodyPr>
+          <a:lstStyle>
+            <a:lvl1pPr>
+              <a:defRPr sz="1080"/>
+            </a:lvl1pPr>
+            <a:lvl2pPr>
+              <a:defRPr sz="960"/>
+            </a:lvl2pPr>
+            <a:lvl3pPr>
+              <a:defRPr sz="840"/>
+            </a:lvl3pPr>
+            <a:lvl4pPr>
+              <a:defRPr sz="720"/>
+            </a:lvl4pPr>
+            <a:lvl5pPr>
+              <a:defRPr sz="720"/>
+            </a:lvl5pPr>
+            <a:lvl6pPr>
+              <a:defRPr sz="720"/>
+            </a:lvl6pPr>
+            <a:lvl7pPr>
+              <a:defRPr sz="720"/>
+            </a:lvl7pPr>
+            <a:lvl8pPr>
+              <a:defRPr sz="720"/>
+            </a:lvl8pPr>
+            <a:lvl9pPr>
+              <a:defRPr sz="720"/>
+            </a:lvl9pPr>
+          </a:lstStyle>
           <a:p>
             <a:pPr lvl="0"/>
             <a:r>
@@ -1333,19 +3823,13 @@
               <a:rPr lang="es-ES"/>
               <a:t>Quinto nivel</a:t>
             </a:r>
-            <a:endParaRPr lang="es-GT"/>
-          </a:p>
-        </p:txBody>
-      </p:sp>
-      <p:sp>
-        <p:nvSpPr>
-          <p:cNvPr id="4" name="Marcador de contenido 3">
-            <a:extLst>
-              <a:ext uri="{FF2B5EF4-FFF2-40B4-BE49-F238E27FC236}">
-                <a16:creationId xmlns:a16="http://schemas.microsoft.com/office/drawing/2014/main" id="{28FC0266-46AE-7C36-A0D6-E1E7E419FFD2}"/>
-              </a:ext>
-            </a:extLst>
-          </p:cNvPr>
+            <a:endParaRPr lang="en-US" dirty="0"/>
+          </a:p>
+        </p:txBody>
+      </p:sp>
+      <p:sp>
+        <p:nvSpPr>
+          <p:cNvPr id="4" name="Content Placeholder 3"/>
           <p:cNvSpPr>
             <a:spLocks noGrp="1"/>
           </p:cNvSpPr>
@@ -1355,73 +3839,97 @@
         </p:nvSpPr>
         <p:spPr>
           <a:xfrm>
-            <a:off x="3703320" y="1460500"/>
-            <a:ext cx="3108960" cy="3481070"/>
+            <a:off x="3392696" y="1644874"/>
+            <a:ext cx="2637805" cy="3360196"/>
           </a:xfrm>
         </p:spPr>
         <p:txBody>
+          <a:bodyPr>
+            <a:normAutofit/>
+          </a:bodyPr>
+          <a:lstStyle>
+            <a:lvl1pPr>
+              <a:defRPr sz="1080"/>
+            </a:lvl1pPr>
+            <a:lvl2pPr>
+              <a:defRPr sz="960"/>
+            </a:lvl2pPr>
+            <a:lvl3pPr>
+              <a:defRPr sz="840"/>
+            </a:lvl3pPr>
+            <a:lvl4pPr>
+              <a:defRPr sz="720"/>
+            </a:lvl4pPr>
+            <a:lvl5pPr>
+              <a:defRPr sz="720"/>
+            </a:lvl5pPr>
+            <a:lvl6pPr>
+              <a:defRPr sz="720"/>
+            </a:lvl6pPr>
+            <a:lvl7pPr>
+              <a:defRPr sz="720"/>
+            </a:lvl7pPr>
+            <a:lvl8pPr>
+              <a:defRPr sz="720"/>
+            </a:lvl8pPr>
+            <a:lvl9pPr>
+              <a:defRPr sz="720"/>
+            </a:lvl9pPr>
+          </a:lstStyle>
+          <a:p>
+            <a:pPr lvl="0"/>
+            <a:r>
+              <a:rPr lang="es-ES"/>
+              <a:t>Haga clic para modificar los estilos de texto del patrón</a:t>
+            </a:r>
+          </a:p>
+          <a:p>
+            <a:pPr lvl="1"/>
+            <a:r>
+              <a:rPr lang="es-ES"/>
+              <a:t>Segundo nivel</a:t>
+            </a:r>
+          </a:p>
+          <a:p>
+            <a:pPr lvl="2"/>
+            <a:r>
+              <a:rPr lang="es-ES"/>
+              <a:t>Tercer nivel</a:t>
+            </a:r>
+          </a:p>
+          <a:p>
+            <a:pPr lvl="3"/>
+            <a:r>
+              <a:rPr lang="es-ES"/>
+              <a:t>Cuarto nivel</a:t>
+            </a:r>
+          </a:p>
+          <a:p>
+            <a:pPr lvl="4"/>
+            <a:r>
+              <a:rPr lang="es-ES"/>
+              <a:t>Quinto nivel</a:t>
+            </a:r>
+            <a:endParaRPr lang="en-US" dirty="0"/>
+          </a:p>
+        </p:txBody>
+      </p:sp>
+      <p:sp>
+        <p:nvSpPr>
+          <p:cNvPr id="5" name="Date Placeholder 4"/>
+          <p:cNvSpPr>
+            <a:spLocks noGrp="1"/>
+          </p:cNvSpPr>
+          <p:nvPr>
+            <p:ph type="dt" sz="half" idx="10"/>
+          </p:nvPr>
+        </p:nvSpPr>
+        <p:spPr/>
+        <p:txBody>
           <a:bodyPr/>
           <a:lstStyle/>
           <a:p>
-            <a:pPr lvl="0"/>
-            <a:r>
-              <a:rPr lang="es-ES"/>
-              <a:t>Haga clic para modificar los estilos de texto del patrón</a:t>
-            </a:r>
-          </a:p>
-          <a:p>
-            <a:pPr lvl="1"/>
-            <a:r>
-              <a:rPr lang="es-ES"/>
-              <a:t>Segundo nivel</a:t>
-            </a:r>
-          </a:p>
-          <a:p>
-            <a:pPr lvl="2"/>
-            <a:r>
-              <a:rPr lang="es-ES"/>
-              <a:t>Tercer nivel</a:t>
-            </a:r>
-          </a:p>
-          <a:p>
-            <a:pPr lvl="3"/>
-            <a:r>
-              <a:rPr lang="es-ES"/>
-              <a:t>Cuarto nivel</a:t>
-            </a:r>
-          </a:p>
-          <a:p>
-            <a:pPr lvl="4"/>
-            <a:r>
-              <a:rPr lang="es-ES"/>
-              <a:t>Quinto nivel</a:t>
-            </a:r>
-            <a:endParaRPr lang="es-GT"/>
-          </a:p>
-        </p:txBody>
-      </p:sp>
-      <p:sp>
-        <p:nvSpPr>
-          <p:cNvPr id="5" name="Marcador de fecha 4">
-            <a:extLst>
-              <a:ext uri="{FF2B5EF4-FFF2-40B4-BE49-F238E27FC236}">
-                <a16:creationId xmlns:a16="http://schemas.microsoft.com/office/drawing/2014/main" id="{3D34705D-D6E0-BCB0-7567-0740DE348670}"/>
-              </a:ext>
-            </a:extLst>
-          </p:cNvPr>
-          <p:cNvSpPr>
-            <a:spLocks noGrp="1"/>
-          </p:cNvSpPr>
-          <p:nvPr>
-            <p:ph type="dt" sz="half" idx="10"/>
-          </p:nvPr>
-        </p:nvSpPr>
-        <p:spPr/>
-        <p:txBody>
-          <a:bodyPr/>
-          <a:lstStyle/>
-          <a:p>
-            <a:fld id="{938F7005-820C-452D-BD0A-9792EB6D2BE3}" type="datetimeFigureOut">
+            <a:fld id="{E03C0CA2-AF3B-45DA-B95C-F3B757DF4AEA}" type="datetimeFigureOut">
               <a:rPr lang="es-GT" smtClean="0"/>
               <a:t>7/08/2026</a:t>
             </a:fld>
@@ -1431,13 +3939,7 @@
       </p:sp>
       <p:sp>
         <p:nvSpPr>
-          <p:cNvPr id="6" name="Marcador de pie de página 5">
-            <a:extLst>
-              <a:ext uri="{FF2B5EF4-FFF2-40B4-BE49-F238E27FC236}">
-                <a16:creationId xmlns:a16="http://schemas.microsoft.com/office/drawing/2014/main" id="{115D3AE2-3FFE-8399-8F2F-B8ABE2FB6BD0}"/>
-              </a:ext>
-            </a:extLst>
-          </p:cNvPr>
+          <p:cNvPr id="6" name="Footer Placeholder 5"/>
           <p:cNvSpPr>
             <a:spLocks noGrp="1"/>
           </p:cNvSpPr>
@@ -1456,13 +3958,7 @@
       </p:sp>
       <p:sp>
         <p:nvSpPr>
-          <p:cNvPr id="7" name="Marcador de número de diapositiva 6">
-            <a:extLst>
-              <a:ext uri="{FF2B5EF4-FFF2-40B4-BE49-F238E27FC236}">
-                <a16:creationId xmlns:a16="http://schemas.microsoft.com/office/drawing/2014/main" id="{A3DACA1E-92A8-CC3C-A9D8-9B76DBE9AD4C}"/>
-              </a:ext>
-            </a:extLst>
-          </p:cNvPr>
+          <p:cNvPr id="7" name="Slide Number Placeholder 6"/>
           <p:cNvSpPr>
             <a:spLocks noGrp="1"/>
           </p:cNvSpPr>
@@ -1475,7 +3971,7 @@
           <a:bodyPr/>
           <a:lstStyle/>
           <a:p>
-            <a:fld id="{A2FD0973-D230-4D6C-8B64-DA38D2160AAC}" type="slidenum">
+            <a:fld id="{F5A1B9F3-D9AB-4E80-BD88-E1CDBD879FEC}" type="slidenum">
               <a:rPr lang="es-GT" smtClean="0"/>
               <a:t>‹Nº›</a:t>
             </a:fld>
@@ -1486,7 +3982,7 @@
     </p:spTree>
     <p:extLst>
       <p:ext uri="{BB962C8B-B14F-4D97-AF65-F5344CB8AC3E}">
-        <p14:creationId xmlns:p14="http://schemas.microsoft.com/office/powerpoint/2010/main" val="10209970"/>
+        <p14:creationId xmlns:p14="http://schemas.microsoft.com/office/powerpoint/2010/main" val="4037344957"/>
       </p:ext>
     </p:extLst>
   </p:cSld>
@@ -1515,66 +4011,62 @@
       </p:grpSpPr>
       <p:sp>
         <p:nvSpPr>
-          <p:cNvPr id="2" name="Título 1">
-            <a:extLst>
-              <a:ext uri="{FF2B5EF4-FFF2-40B4-BE49-F238E27FC236}">
-                <a16:creationId xmlns:a16="http://schemas.microsoft.com/office/drawing/2014/main" id="{4539E6DB-1ACC-B6E4-C22C-39209652BE07}"/>
-              </a:ext>
-            </a:extLst>
-          </p:cNvPr>
+          <p:cNvPr id="2" name="Title 1"/>
           <p:cNvSpPr>
             <a:spLocks noGrp="1"/>
           </p:cNvSpPr>
           <p:nvPr>
             <p:ph type="title"/>
+          </p:nvPr>
+        </p:nvSpPr>
+        <p:spPr/>
+        <p:txBody>
+          <a:bodyPr/>
+          <a:lstStyle>
+            <a:lvl1pPr>
+              <a:defRPr/>
+            </a:lvl1pPr>
+          </a:lstStyle>
+          <a:p>
+            <a:r>
+              <a:rPr lang="es-ES"/>
+              <a:t>Haga clic para modificar el estilo de título del patrón</a:t>
+            </a:r>
+            <a:endParaRPr lang="en-US" dirty="0"/>
+          </a:p>
+        </p:txBody>
+      </p:sp>
+      <p:sp>
+        <p:nvSpPr>
+          <p:cNvPr id="3" name="Text Placeholder 2"/>
+          <p:cNvSpPr>
+            <a:spLocks noGrp="1"/>
+          </p:cNvSpPr>
+          <p:nvPr>
+            <p:ph type="body" idx="1"/>
           </p:nvPr>
         </p:nvSpPr>
         <p:spPr>
           <a:xfrm>
-            <a:off x="503873" y="292101"/>
-            <a:ext cx="6309360" cy="1060450"/>
+            <a:off x="661988" y="1524000"/>
+            <a:ext cx="2637803" cy="461010"/>
           </a:xfrm>
         </p:spPr>
         <p:txBody>
-          <a:bodyPr/>
-          <a:lstStyle/>
-          <a:p>
-            <a:r>
-              <a:rPr lang="es-ES"/>
-              <a:t>Haga clic para modificar el estilo de título del patrón</a:t>
-            </a:r>
-            <a:endParaRPr lang="es-GT"/>
-          </a:p>
-        </p:txBody>
-      </p:sp>
-      <p:sp>
-        <p:nvSpPr>
-          <p:cNvPr id="3" name="Marcador de texto 2">
-            <a:extLst>
-              <a:ext uri="{FF2B5EF4-FFF2-40B4-BE49-F238E27FC236}">
-                <a16:creationId xmlns:a16="http://schemas.microsoft.com/office/drawing/2014/main" id="{8094B364-35A4-5287-62EF-C5894BFB6E1F}"/>
-              </a:ext>
-            </a:extLst>
-          </p:cNvPr>
-          <p:cNvSpPr>
-            <a:spLocks noGrp="1"/>
-          </p:cNvSpPr>
-          <p:nvPr>
-            <p:ph type="body" idx="1"/>
-          </p:nvPr>
-        </p:nvSpPr>
-        <p:spPr>
-          <a:xfrm>
-            <a:off x="503873" y="1344930"/>
-            <a:ext cx="3094672" cy="659130"/>
-          </a:xfrm>
-        </p:spPr>
-        <p:txBody>
-          <a:bodyPr anchor="b"/>
+          <a:bodyPr anchor="b">
+            <a:noAutofit/>
+          </a:bodyPr>
           <a:lstStyle>
             <a:lvl1pPr marL="0" indent="0">
               <a:buNone/>
-              <a:defRPr sz="1440" b="1"/>
+              <a:defRPr sz="1440" b="0">
+                <a:solidFill>
+                  <a:schemeClr val="bg2">
+                    <a:lumMod val="40000"/>
+                    <a:lumOff val="60000"/>
+                  </a:schemeClr>
+                </a:solidFill>
+              </a:defRPr>
             </a:lvl1pPr>
             <a:lvl2pPr marL="274320" indent="0">
               <a:buNone/>
@@ -1620,13 +4112,7 @@
       </p:sp>
       <p:sp>
         <p:nvSpPr>
-          <p:cNvPr id="4" name="Marcador de contenido 3">
-            <a:extLst>
-              <a:ext uri="{FF2B5EF4-FFF2-40B4-BE49-F238E27FC236}">
-                <a16:creationId xmlns:a16="http://schemas.microsoft.com/office/drawing/2014/main" id="{39015F04-25A8-78A4-7486-942A6445A5C4}"/>
-              </a:ext>
-            </a:extLst>
-          </p:cNvPr>
+          <p:cNvPr id="4" name="Content Placeholder 3"/>
           <p:cNvSpPr>
             <a:spLocks noGrp="1"/>
           </p:cNvSpPr>
@@ -1636,13 +4122,43 @@
         </p:nvSpPr>
         <p:spPr>
           <a:xfrm>
-            <a:off x="503873" y="2004060"/>
-            <a:ext cx="3094672" cy="2947670"/>
+            <a:off x="661988" y="2011680"/>
+            <a:ext cx="2637803" cy="2993390"/>
           </a:xfrm>
         </p:spPr>
         <p:txBody>
-          <a:bodyPr/>
-          <a:lstStyle/>
+          <a:bodyPr>
+            <a:normAutofit/>
+          </a:bodyPr>
+          <a:lstStyle>
+            <a:lvl1pPr>
+              <a:defRPr sz="1080"/>
+            </a:lvl1pPr>
+            <a:lvl2pPr>
+              <a:defRPr sz="960"/>
+            </a:lvl2pPr>
+            <a:lvl3pPr>
+              <a:defRPr sz="840"/>
+            </a:lvl3pPr>
+            <a:lvl4pPr>
+              <a:defRPr sz="720"/>
+            </a:lvl4pPr>
+            <a:lvl5pPr>
+              <a:defRPr sz="720"/>
+            </a:lvl5pPr>
+            <a:lvl6pPr>
+              <a:defRPr sz="720"/>
+            </a:lvl6pPr>
+            <a:lvl7pPr>
+              <a:defRPr sz="720"/>
+            </a:lvl7pPr>
+            <a:lvl8pPr>
+              <a:defRPr sz="720"/>
+            </a:lvl8pPr>
+            <a:lvl9pPr>
+              <a:defRPr sz="720"/>
+            </a:lvl9pPr>
+          </a:lstStyle>
           <a:p>
             <a:pPr lvl="0"/>
             <a:r>
@@ -1677,19 +4193,13 @@
               <a:rPr lang="es-ES"/>
               <a:t>Quinto nivel</a:t>
             </a:r>
-            <a:endParaRPr lang="es-GT"/>
-          </a:p>
-        </p:txBody>
-      </p:sp>
-      <p:sp>
-        <p:nvSpPr>
-          <p:cNvPr id="5" name="Marcador de texto 4">
-            <a:extLst>
-              <a:ext uri="{FF2B5EF4-FFF2-40B4-BE49-F238E27FC236}">
-                <a16:creationId xmlns:a16="http://schemas.microsoft.com/office/drawing/2014/main" id="{07FBB756-59BF-B48D-2F62-AD16EF765386}"/>
-              </a:ext>
-            </a:extLst>
-          </p:cNvPr>
+            <a:endParaRPr lang="en-US" dirty="0"/>
+          </a:p>
+        </p:txBody>
+      </p:sp>
+      <p:sp>
+        <p:nvSpPr>
+          <p:cNvPr id="5" name="Text Placeholder 4"/>
           <p:cNvSpPr>
             <a:spLocks noGrp="1"/>
           </p:cNvSpPr>
@@ -1699,16 +4209,25 @@
         </p:nvSpPr>
         <p:spPr>
           <a:xfrm>
-            <a:off x="3703320" y="1344930"/>
-            <a:ext cx="3109913" cy="659130"/>
+            <a:off x="3392698" y="1524000"/>
+            <a:ext cx="2637803" cy="461010"/>
           </a:xfrm>
         </p:spPr>
         <p:txBody>
-          <a:bodyPr anchor="b"/>
+          <a:bodyPr anchor="b">
+            <a:noAutofit/>
+          </a:bodyPr>
           <a:lstStyle>
             <a:lvl1pPr marL="0" indent="0">
               <a:buNone/>
-              <a:defRPr sz="1440" b="1"/>
+              <a:defRPr sz="1440" b="0">
+                <a:solidFill>
+                  <a:schemeClr val="bg2">
+                    <a:lumMod val="40000"/>
+                    <a:lumOff val="60000"/>
+                  </a:schemeClr>
+                </a:solidFill>
+              </a:defRPr>
             </a:lvl1pPr>
             <a:lvl2pPr marL="274320" indent="0">
               <a:buNone/>
@@ -1754,13 +4273,7 @@
       </p:sp>
       <p:sp>
         <p:nvSpPr>
-          <p:cNvPr id="6" name="Marcador de contenido 5">
-            <a:extLst>
-              <a:ext uri="{FF2B5EF4-FFF2-40B4-BE49-F238E27FC236}">
-                <a16:creationId xmlns:a16="http://schemas.microsoft.com/office/drawing/2014/main" id="{F469EC23-6339-2B0E-3629-31A0F5E9B90D}"/>
-              </a:ext>
-            </a:extLst>
-          </p:cNvPr>
+          <p:cNvPr id="6" name="Content Placeholder 5"/>
           <p:cNvSpPr>
             <a:spLocks noGrp="1"/>
           </p:cNvSpPr>
@@ -1770,73 +4283,97 @@
         </p:nvSpPr>
         <p:spPr>
           <a:xfrm>
-            <a:off x="3703320" y="2004060"/>
-            <a:ext cx="3109913" cy="2947670"/>
+            <a:off x="3392698" y="2011680"/>
+            <a:ext cx="2637803" cy="2993390"/>
           </a:xfrm>
         </p:spPr>
         <p:txBody>
+          <a:bodyPr>
+            <a:normAutofit/>
+          </a:bodyPr>
+          <a:lstStyle>
+            <a:lvl1pPr>
+              <a:defRPr sz="1080"/>
+            </a:lvl1pPr>
+            <a:lvl2pPr>
+              <a:defRPr sz="960"/>
+            </a:lvl2pPr>
+            <a:lvl3pPr>
+              <a:defRPr sz="840"/>
+            </a:lvl3pPr>
+            <a:lvl4pPr>
+              <a:defRPr sz="720"/>
+            </a:lvl4pPr>
+            <a:lvl5pPr>
+              <a:defRPr sz="720"/>
+            </a:lvl5pPr>
+            <a:lvl6pPr>
+              <a:defRPr sz="720"/>
+            </a:lvl6pPr>
+            <a:lvl7pPr>
+              <a:defRPr sz="720"/>
+            </a:lvl7pPr>
+            <a:lvl8pPr>
+              <a:defRPr sz="720"/>
+            </a:lvl8pPr>
+            <a:lvl9pPr>
+              <a:defRPr sz="720"/>
+            </a:lvl9pPr>
+          </a:lstStyle>
+          <a:p>
+            <a:pPr lvl="0"/>
+            <a:r>
+              <a:rPr lang="es-ES"/>
+              <a:t>Haga clic para modificar los estilos de texto del patrón</a:t>
+            </a:r>
+          </a:p>
+          <a:p>
+            <a:pPr lvl="1"/>
+            <a:r>
+              <a:rPr lang="es-ES"/>
+              <a:t>Segundo nivel</a:t>
+            </a:r>
+          </a:p>
+          <a:p>
+            <a:pPr lvl="2"/>
+            <a:r>
+              <a:rPr lang="es-ES"/>
+              <a:t>Tercer nivel</a:t>
+            </a:r>
+          </a:p>
+          <a:p>
+            <a:pPr lvl="3"/>
+            <a:r>
+              <a:rPr lang="es-ES"/>
+              <a:t>Cuarto nivel</a:t>
+            </a:r>
+          </a:p>
+          <a:p>
+            <a:pPr lvl="4"/>
+            <a:r>
+              <a:rPr lang="es-ES"/>
+              <a:t>Quinto nivel</a:t>
+            </a:r>
+            <a:endParaRPr lang="en-US" dirty="0"/>
+          </a:p>
+        </p:txBody>
+      </p:sp>
+      <p:sp>
+        <p:nvSpPr>
+          <p:cNvPr id="7" name="Date Placeholder 6"/>
+          <p:cNvSpPr>
+            <a:spLocks noGrp="1"/>
+          </p:cNvSpPr>
+          <p:nvPr>
+            <p:ph type="dt" sz="half" idx="10"/>
+          </p:nvPr>
+        </p:nvSpPr>
+        <p:spPr/>
+        <p:txBody>
           <a:bodyPr/>
           <a:lstStyle/>
           <a:p>
-            <a:pPr lvl="0"/>
-            <a:r>
-              <a:rPr lang="es-ES"/>
-              <a:t>Haga clic para modificar los estilos de texto del patrón</a:t>
-            </a:r>
-          </a:p>
-          <a:p>
-            <a:pPr lvl="1"/>
-            <a:r>
-              <a:rPr lang="es-ES"/>
-              <a:t>Segundo nivel</a:t>
-            </a:r>
-          </a:p>
-          <a:p>
-            <a:pPr lvl="2"/>
-            <a:r>
-              <a:rPr lang="es-ES"/>
-              <a:t>Tercer nivel</a:t>
-            </a:r>
-          </a:p>
-          <a:p>
-            <a:pPr lvl="3"/>
-            <a:r>
-              <a:rPr lang="es-ES"/>
-              <a:t>Cuarto nivel</a:t>
-            </a:r>
-          </a:p>
-          <a:p>
-            <a:pPr lvl="4"/>
-            <a:r>
-              <a:rPr lang="es-ES"/>
-              <a:t>Quinto nivel</a:t>
-            </a:r>
-            <a:endParaRPr lang="es-GT"/>
-          </a:p>
-        </p:txBody>
-      </p:sp>
-      <p:sp>
-        <p:nvSpPr>
-          <p:cNvPr id="7" name="Marcador de fecha 6">
-            <a:extLst>
-              <a:ext uri="{FF2B5EF4-FFF2-40B4-BE49-F238E27FC236}">
-                <a16:creationId xmlns:a16="http://schemas.microsoft.com/office/drawing/2014/main" id="{D43F0B90-9012-B563-CA7F-5C63BDB5F4C7}"/>
-              </a:ext>
-            </a:extLst>
-          </p:cNvPr>
-          <p:cNvSpPr>
-            <a:spLocks noGrp="1"/>
-          </p:cNvSpPr>
-          <p:nvPr>
-            <p:ph type="dt" sz="half" idx="10"/>
-          </p:nvPr>
-        </p:nvSpPr>
-        <p:spPr/>
-        <p:txBody>
-          <a:bodyPr/>
-          <a:lstStyle/>
-          <a:p>
-            <a:fld id="{938F7005-820C-452D-BD0A-9792EB6D2BE3}" type="datetimeFigureOut">
+            <a:fld id="{E03C0CA2-AF3B-45DA-B95C-F3B757DF4AEA}" type="datetimeFigureOut">
               <a:rPr lang="es-GT" smtClean="0"/>
               <a:t>7/08/2026</a:t>
             </a:fld>
@@ -1846,13 +4383,7 @@
       </p:sp>
       <p:sp>
         <p:nvSpPr>
-          <p:cNvPr id="8" name="Marcador de pie de página 7">
-            <a:extLst>
-              <a:ext uri="{FF2B5EF4-FFF2-40B4-BE49-F238E27FC236}">
-                <a16:creationId xmlns:a16="http://schemas.microsoft.com/office/drawing/2014/main" id="{F67B115A-7EA3-B28F-BF88-3C8FD67021A5}"/>
-              </a:ext>
-            </a:extLst>
-          </p:cNvPr>
+          <p:cNvPr id="8" name="Footer Placeholder 7"/>
           <p:cNvSpPr>
             <a:spLocks noGrp="1"/>
           </p:cNvSpPr>
@@ -1871,13 +4402,7 @@
       </p:sp>
       <p:sp>
         <p:nvSpPr>
-          <p:cNvPr id="9" name="Marcador de número de diapositiva 8">
-            <a:extLst>
-              <a:ext uri="{FF2B5EF4-FFF2-40B4-BE49-F238E27FC236}">
-                <a16:creationId xmlns:a16="http://schemas.microsoft.com/office/drawing/2014/main" id="{B58C016D-2E8A-3765-B1EA-DCD8303C4FA0}"/>
-              </a:ext>
-            </a:extLst>
-          </p:cNvPr>
+          <p:cNvPr id="9" name="Slide Number Placeholder 8"/>
           <p:cNvSpPr>
             <a:spLocks noGrp="1"/>
           </p:cNvSpPr>
@@ -1890,7 +4415,7 @@
           <a:bodyPr/>
           <a:lstStyle/>
           <a:p>
-            <a:fld id="{A2FD0973-D230-4D6C-8B64-DA38D2160AAC}" type="slidenum">
+            <a:fld id="{F5A1B9F3-D9AB-4E80-BD88-E1CDBD879FEC}" type="slidenum">
               <a:rPr lang="es-GT" smtClean="0"/>
               <a:t>‹Nº›</a:t>
             </a:fld>
@@ -1901,7 +4426,7 @@
     </p:spTree>
     <p:extLst>
       <p:ext uri="{BB962C8B-B14F-4D97-AF65-F5344CB8AC3E}">
-        <p14:creationId xmlns:p14="http://schemas.microsoft.com/office/powerpoint/2010/main" val="3383031811"/>
+        <p14:creationId xmlns:p14="http://schemas.microsoft.com/office/powerpoint/2010/main" val="4020350469"/>
       </p:ext>
     </p:extLst>
   </p:cSld>
@@ -1930,13 +4455,7 @@
       </p:grpSpPr>
       <p:sp>
         <p:nvSpPr>
-          <p:cNvPr id="2" name="Título 1">
-            <a:extLst>
-              <a:ext uri="{FF2B5EF4-FFF2-40B4-BE49-F238E27FC236}">
-                <a16:creationId xmlns:a16="http://schemas.microsoft.com/office/drawing/2014/main" id="{EBEF33FF-2858-6EE1-3C4A-A5DC61917707}"/>
-              </a:ext>
-            </a:extLst>
-          </p:cNvPr>
+          <p:cNvPr id="2" name="Title 1"/>
           <p:cNvSpPr>
             <a:spLocks noGrp="1"/>
           </p:cNvSpPr>
@@ -1953,19 +4472,13 @@
               <a:rPr lang="es-ES"/>
               <a:t>Haga clic para modificar el estilo de título del patrón</a:t>
             </a:r>
-            <a:endParaRPr lang="es-GT"/>
-          </a:p>
-        </p:txBody>
-      </p:sp>
-      <p:sp>
-        <p:nvSpPr>
-          <p:cNvPr id="3" name="Marcador de fecha 2">
-            <a:extLst>
-              <a:ext uri="{FF2B5EF4-FFF2-40B4-BE49-F238E27FC236}">
-                <a16:creationId xmlns:a16="http://schemas.microsoft.com/office/drawing/2014/main" id="{3DB59E22-4BAE-EF96-A59F-C90B24793C78}"/>
-              </a:ext>
-            </a:extLst>
-          </p:cNvPr>
+            <a:endParaRPr lang="en-US" dirty="0"/>
+          </a:p>
+        </p:txBody>
+      </p:sp>
+      <p:sp>
+        <p:nvSpPr>
+          <p:cNvPr id="7" name="Date Placeholder 2"/>
           <p:cNvSpPr>
             <a:spLocks noGrp="1"/>
           </p:cNvSpPr>
@@ -1978,7 +4491,7 @@
           <a:bodyPr/>
           <a:lstStyle/>
           <a:p>
-            <a:fld id="{938F7005-820C-452D-BD0A-9792EB6D2BE3}" type="datetimeFigureOut">
+            <a:fld id="{E03C0CA2-AF3B-45DA-B95C-F3B757DF4AEA}" type="datetimeFigureOut">
               <a:rPr lang="es-GT" smtClean="0"/>
               <a:t>7/08/2026</a:t>
             </a:fld>
@@ -1988,13 +4501,7 @@
       </p:sp>
       <p:sp>
         <p:nvSpPr>
-          <p:cNvPr id="4" name="Marcador de pie de página 3">
-            <a:extLst>
-              <a:ext uri="{FF2B5EF4-FFF2-40B4-BE49-F238E27FC236}">
-                <a16:creationId xmlns:a16="http://schemas.microsoft.com/office/drawing/2014/main" id="{A12FF968-473E-AFA8-2BEA-D1FD90D4090B}"/>
-              </a:ext>
-            </a:extLst>
-          </p:cNvPr>
+          <p:cNvPr id="5" name="Footer Placeholder 3"/>
           <p:cNvSpPr>
             <a:spLocks noGrp="1"/>
           </p:cNvSpPr>
@@ -2013,13 +4520,7 @@
       </p:sp>
       <p:sp>
         <p:nvSpPr>
-          <p:cNvPr id="5" name="Marcador de número de diapositiva 4">
-            <a:extLst>
-              <a:ext uri="{FF2B5EF4-FFF2-40B4-BE49-F238E27FC236}">
-                <a16:creationId xmlns:a16="http://schemas.microsoft.com/office/drawing/2014/main" id="{478FA025-A6DE-CAA9-AE59-D44053197E08}"/>
-              </a:ext>
-            </a:extLst>
-          </p:cNvPr>
+          <p:cNvPr id="6" name="Slide Number Placeholder 4"/>
           <p:cNvSpPr>
             <a:spLocks noGrp="1"/>
           </p:cNvSpPr>
@@ -2032,7 +4533,7 @@
           <a:bodyPr/>
           <a:lstStyle/>
           <a:p>
-            <a:fld id="{A2FD0973-D230-4D6C-8B64-DA38D2160AAC}" type="slidenum">
+            <a:fld id="{F5A1B9F3-D9AB-4E80-BD88-E1CDBD879FEC}" type="slidenum">
               <a:rPr lang="es-GT" smtClean="0"/>
               <a:t>‹Nº›</a:t>
             </a:fld>
@@ -2043,7 +4544,7 @@
     </p:spTree>
     <p:extLst>
       <p:ext uri="{BB962C8B-B14F-4D97-AF65-F5344CB8AC3E}">
-        <p14:creationId xmlns:p14="http://schemas.microsoft.com/office/powerpoint/2010/main" val="3363207789"/>
+        <p14:creationId xmlns:p14="http://schemas.microsoft.com/office/powerpoint/2010/main" val="3795746111"/>
       </p:ext>
     </p:extLst>
   </p:cSld>
@@ -2072,13 +4573,7 @@
       </p:grpSpPr>
       <p:sp>
         <p:nvSpPr>
-          <p:cNvPr id="2" name="Marcador de fecha 1">
-            <a:extLst>
-              <a:ext uri="{FF2B5EF4-FFF2-40B4-BE49-F238E27FC236}">
-                <a16:creationId xmlns:a16="http://schemas.microsoft.com/office/drawing/2014/main" id="{3ACDED7D-E275-4083-A9FF-C34488FBDD6A}"/>
-              </a:ext>
-            </a:extLst>
-          </p:cNvPr>
+          <p:cNvPr id="7" name="Date Placeholder 1"/>
           <p:cNvSpPr>
             <a:spLocks noGrp="1"/>
           </p:cNvSpPr>
@@ -2091,7 +4586,7 @@
           <a:bodyPr/>
           <a:lstStyle/>
           <a:p>
-            <a:fld id="{938F7005-820C-452D-BD0A-9792EB6D2BE3}" type="datetimeFigureOut">
+            <a:fld id="{E03C0CA2-AF3B-45DA-B95C-F3B757DF4AEA}" type="datetimeFigureOut">
               <a:rPr lang="es-GT" smtClean="0"/>
               <a:t>7/08/2026</a:t>
             </a:fld>
@@ -2101,13 +4596,7 @@
       </p:sp>
       <p:sp>
         <p:nvSpPr>
-          <p:cNvPr id="3" name="Marcador de pie de página 2">
-            <a:extLst>
-              <a:ext uri="{FF2B5EF4-FFF2-40B4-BE49-F238E27FC236}">
-                <a16:creationId xmlns:a16="http://schemas.microsoft.com/office/drawing/2014/main" id="{09591CA8-9317-F49C-56E0-F9052C6AB39D}"/>
-              </a:ext>
-            </a:extLst>
-          </p:cNvPr>
+          <p:cNvPr id="5" name="Footer Placeholder 2"/>
           <p:cNvSpPr>
             <a:spLocks noGrp="1"/>
           </p:cNvSpPr>
@@ -2126,13 +4615,7 @@
       </p:sp>
       <p:sp>
         <p:nvSpPr>
-          <p:cNvPr id="4" name="Marcador de número de diapositiva 3">
-            <a:extLst>
-              <a:ext uri="{FF2B5EF4-FFF2-40B4-BE49-F238E27FC236}">
-                <a16:creationId xmlns:a16="http://schemas.microsoft.com/office/drawing/2014/main" id="{9292E99F-919F-F5D6-D639-9393E92B535C}"/>
-              </a:ext>
-            </a:extLst>
-          </p:cNvPr>
+          <p:cNvPr id="6" name="Slide Number Placeholder 3"/>
           <p:cNvSpPr>
             <a:spLocks noGrp="1"/>
           </p:cNvSpPr>
@@ -2145,7 +4628,7 @@
           <a:bodyPr/>
           <a:lstStyle/>
           <a:p>
-            <a:fld id="{A2FD0973-D230-4D6C-8B64-DA38D2160AAC}" type="slidenum">
+            <a:fld id="{F5A1B9F3-D9AB-4E80-BD88-E1CDBD879FEC}" type="slidenum">
               <a:rPr lang="es-GT" smtClean="0"/>
               <a:t>‹Nº›</a:t>
             </a:fld>
@@ -2156,7 +4639,7 @@
     </p:spTree>
     <p:extLst>
       <p:ext uri="{BB962C8B-B14F-4D97-AF65-F5344CB8AC3E}">
-        <p14:creationId xmlns:p14="http://schemas.microsoft.com/office/powerpoint/2010/main" val="2224620871"/>
+        <p14:creationId xmlns:p14="http://schemas.microsoft.com/office/powerpoint/2010/main" val="2654446467"/>
       </p:ext>
     </p:extLst>
   </p:cSld>
@@ -2185,13 +4668,7 @@
       </p:grpSpPr>
       <p:sp>
         <p:nvSpPr>
-          <p:cNvPr id="2" name="Título 1">
-            <a:extLst>
-              <a:ext uri="{FF2B5EF4-FFF2-40B4-BE49-F238E27FC236}">
-                <a16:creationId xmlns:a16="http://schemas.microsoft.com/office/drawing/2014/main" id="{09672A5A-3025-8F49-E7F9-400D1CD13BDD}"/>
-              </a:ext>
-            </a:extLst>
-          </p:cNvPr>
+          <p:cNvPr id="2" name="Title 1"/>
           <p:cNvSpPr>
             <a:spLocks noGrp="1"/>
           </p:cNvSpPr>
@@ -2201,15 +4678,15 @@
         </p:nvSpPr>
         <p:spPr>
           <a:xfrm>
-            <a:off x="503873" y="365760"/>
-            <a:ext cx="2359342" cy="1280160"/>
+            <a:off x="692972" y="1158240"/>
+            <a:ext cx="2040638" cy="1158240"/>
           </a:xfrm>
         </p:spPr>
         <p:txBody>
           <a:bodyPr anchor="b"/>
           <a:lstStyle>
-            <a:lvl1pPr>
-              <a:defRPr sz="1920"/>
+            <a:lvl1pPr algn="l">
+              <a:defRPr sz="1440" b="0"/>
             </a:lvl1pPr>
           </a:lstStyle>
           <a:p>
@@ -2217,19 +4694,13 @@
               <a:rPr lang="es-ES"/>
               <a:t>Haga clic para modificar el estilo de título del patrón</a:t>
             </a:r>
-            <a:endParaRPr lang="es-GT"/>
-          </a:p>
-        </p:txBody>
-      </p:sp>
-      <p:sp>
-        <p:nvSpPr>
-          <p:cNvPr id="3" name="Marcador de contenido 2">
-            <a:extLst>
-              <a:ext uri="{FF2B5EF4-FFF2-40B4-BE49-F238E27FC236}">
-                <a16:creationId xmlns:a16="http://schemas.microsoft.com/office/drawing/2014/main" id="{23D6CBEB-84F6-1565-14D3-4071E86C5879}"/>
-              </a:ext>
-            </a:extLst>
-          </p:cNvPr>
+            <a:endParaRPr lang="en-US" dirty="0"/>
+          </a:p>
+        </p:txBody>
+      </p:sp>
+      <p:sp>
+        <p:nvSpPr>
+          <p:cNvPr id="3" name="Content Placeholder 2"/>
           <p:cNvSpPr>
             <a:spLocks noGrp="1"/>
           </p:cNvSpPr>
@@ -2239,39 +4710,41 @@
         </p:nvSpPr>
         <p:spPr>
           <a:xfrm>
-            <a:off x="3109913" y="789940"/>
-            <a:ext cx="3703320" cy="3898900"/>
+            <a:off x="2870770" y="1158240"/>
+            <a:ext cx="3117598" cy="3657600"/>
           </a:xfrm>
         </p:spPr>
         <p:txBody>
-          <a:bodyPr/>
+          <a:bodyPr anchor="ctr">
+            <a:normAutofit/>
+          </a:bodyPr>
           <a:lstStyle>
             <a:lvl1pPr>
-              <a:defRPr sz="1920"/>
+              <a:defRPr sz="1200"/>
             </a:lvl1pPr>
             <a:lvl2pPr>
-              <a:defRPr sz="1680"/>
+              <a:defRPr sz="1080"/>
             </a:lvl2pPr>
             <a:lvl3pPr>
-              <a:defRPr sz="1440"/>
+              <a:defRPr sz="960"/>
             </a:lvl3pPr>
             <a:lvl4pPr>
-              <a:defRPr sz="1200"/>
+              <a:defRPr sz="840"/>
             </a:lvl4pPr>
             <a:lvl5pPr>
-              <a:defRPr sz="1200"/>
+              <a:defRPr sz="840"/>
             </a:lvl5pPr>
             <a:lvl6pPr>
-              <a:defRPr sz="1200"/>
+              <a:defRPr sz="840"/>
             </a:lvl6pPr>
             <a:lvl7pPr>
-              <a:defRPr sz="1200"/>
+              <a:defRPr sz="840"/>
             </a:lvl7pPr>
             <a:lvl8pPr>
-              <a:defRPr sz="1200"/>
+              <a:defRPr sz="840"/>
             </a:lvl8pPr>
             <a:lvl9pPr>
-              <a:defRPr sz="1200"/>
+              <a:defRPr sz="840"/>
             </a:lvl9pPr>
           </a:lstStyle>
           <a:p>
@@ -2308,19 +4781,13 @@
               <a:rPr lang="es-ES"/>
               <a:t>Quinto nivel</a:t>
             </a:r>
-            <a:endParaRPr lang="es-GT"/>
-          </a:p>
-        </p:txBody>
-      </p:sp>
-      <p:sp>
-        <p:nvSpPr>
-          <p:cNvPr id="4" name="Marcador de texto 3">
-            <a:extLst>
-              <a:ext uri="{FF2B5EF4-FFF2-40B4-BE49-F238E27FC236}">
-                <a16:creationId xmlns:a16="http://schemas.microsoft.com/office/drawing/2014/main" id="{6A08993A-CC66-2174-DF4A-C445A8126E74}"/>
-              </a:ext>
-            </a:extLst>
-          </p:cNvPr>
+            <a:endParaRPr lang="en-US" dirty="0"/>
+          </a:p>
+        </p:txBody>
+      </p:sp>
+      <p:sp>
+        <p:nvSpPr>
+          <p:cNvPr id="4" name="Text Placeholder 3"/>
           <p:cNvSpPr>
             <a:spLocks noGrp="1"/>
           </p:cNvSpPr>
@@ -2330,8 +4797,8 @@
         </p:nvSpPr>
         <p:spPr>
           <a:xfrm>
-            <a:off x="503873" y="1645920"/>
-            <a:ext cx="2359342" cy="3049270"/>
+            <a:off x="692972" y="2503425"/>
+            <a:ext cx="2040638" cy="2316479"/>
           </a:xfrm>
         </p:spPr>
         <p:txBody>
@@ -2339,39 +4806,39 @@
           <a:lstStyle>
             <a:lvl1pPr marL="0" indent="0">
               <a:buNone/>
-              <a:defRPr sz="960"/>
+              <a:defRPr sz="840"/>
             </a:lvl1pPr>
             <a:lvl2pPr marL="274320" indent="0">
               <a:buNone/>
-              <a:defRPr sz="840"/>
+              <a:defRPr sz="720"/>
             </a:lvl2pPr>
             <a:lvl3pPr marL="548640" indent="0">
               <a:buNone/>
-              <a:defRPr sz="720"/>
+              <a:defRPr sz="600"/>
             </a:lvl3pPr>
             <a:lvl4pPr marL="822960" indent="0">
               <a:buNone/>
-              <a:defRPr sz="600"/>
+              <a:defRPr sz="540"/>
             </a:lvl4pPr>
             <a:lvl5pPr marL="1097280" indent="0">
               <a:buNone/>
-              <a:defRPr sz="600"/>
+              <a:defRPr sz="540"/>
             </a:lvl5pPr>
             <a:lvl6pPr marL="1371600" indent="0">
               <a:buNone/>
-              <a:defRPr sz="600"/>
+              <a:defRPr sz="540"/>
             </a:lvl6pPr>
             <a:lvl7pPr marL="1645920" indent="0">
               <a:buNone/>
-              <a:defRPr sz="600"/>
+              <a:defRPr sz="540"/>
             </a:lvl7pPr>
             <a:lvl8pPr marL="1920240" indent="0">
               <a:buNone/>
-              <a:defRPr sz="600"/>
+              <a:defRPr sz="540"/>
             </a:lvl8pPr>
             <a:lvl9pPr marL="2194560" indent="0">
               <a:buNone/>
-              <a:defRPr sz="600"/>
+              <a:defRPr sz="540"/>
             </a:lvl9pPr>
           </a:lstStyle>
           <a:p>
@@ -2385,13 +4852,7 @@
       </p:sp>
       <p:sp>
         <p:nvSpPr>
-          <p:cNvPr id="5" name="Marcador de fecha 4">
-            <a:extLst>
-              <a:ext uri="{FF2B5EF4-FFF2-40B4-BE49-F238E27FC236}">
-                <a16:creationId xmlns:a16="http://schemas.microsoft.com/office/drawing/2014/main" id="{EAF18DF1-3548-D3F7-0FC5-BF961FF4C988}"/>
-              </a:ext>
-            </a:extLst>
-          </p:cNvPr>
+          <p:cNvPr id="7" name="Date Placeholder 4"/>
           <p:cNvSpPr>
             <a:spLocks noGrp="1"/>
           </p:cNvSpPr>
@@ -2404,7 +4865,7 @@
           <a:bodyPr/>
           <a:lstStyle/>
           <a:p>
-            <a:fld id="{938F7005-820C-452D-BD0A-9792EB6D2BE3}" type="datetimeFigureOut">
+            <a:fld id="{E03C0CA2-AF3B-45DA-B95C-F3B757DF4AEA}" type="datetimeFigureOut">
               <a:rPr lang="es-GT" smtClean="0"/>
               <a:t>7/08/2026</a:t>
             </a:fld>
@@ -2414,13 +4875,7 @@
       </p:sp>
       <p:sp>
         <p:nvSpPr>
-          <p:cNvPr id="6" name="Marcador de pie de página 5">
-            <a:extLst>
-              <a:ext uri="{FF2B5EF4-FFF2-40B4-BE49-F238E27FC236}">
-                <a16:creationId xmlns:a16="http://schemas.microsoft.com/office/drawing/2014/main" id="{2AF538E7-F8E9-CF45-510F-28FB4667A9AF}"/>
-              </a:ext>
-            </a:extLst>
-          </p:cNvPr>
+          <p:cNvPr id="5" name="Footer Placeholder 5"/>
           <p:cNvSpPr>
             <a:spLocks noGrp="1"/>
           </p:cNvSpPr>
@@ -2439,13 +4894,7 @@
       </p:sp>
       <p:sp>
         <p:nvSpPr>
-          <p:cNvPr id="7" name="Marcador de número de diapositiva 6">
-            <a:extLst>
-              <a:ext uri="{FF2B5EF4-FFF2-40B4-BE49-F238E27FC236}">
-                <a16:creationId xmlns:a16="http://schemas.microsoft.com/office/drawing/2014/main" id="{C05D599E-0031-2EAB-BEE3-B51FD90400E5}"/>
-              </a:ext>
-            </a:extLst>
-          </p:cNvPr>
+          <p:cNvPr id="6" name="Slide Number Placeholder 6"/>
           <p:cNvSpPr>
             <a:spLocks noGrp="1"/>
           </p:cNvSpPr>
@@ -2458,7 +4907,7 @@
           <a:bodyPr/>
           <a:lstStyle/>
           <a:p>
-            <a:fld id="{A2FD0973-D230-4D6C-8B64-DA38D2160AAC}" type="slidenum">
+            <a:fld id="{F5A1B9F3-D9AB-4E80-BD88-E1CDBD879FEC}" type="slidenum">
               <a:rPr lang="es-GT" smtClean="0"/>
               <a:t>‹Nº›</a:t>
             </a:fld>
@@ -2469,7 +4918,7 @@
     </p:spTree>
     <p:extLst>
       <p:ext uri="{BB962C8B-B14F-4D97-AF65-F5344CB8AC3E}">
-        <p14:creationId xmlns:p14="http://schemas.microsoft.com/office/powerpoint/2010/main" val="3927791953"/>
+        <p14:creationId xmlns:p14="http://schemas.microsoft.com/office/powerpoint/2010/main" val="550984203"/>
       </p:ext>
     </p:extLst>
   </p:cSld>
@@ -2498,13 +4947,7 @@
       </p:grpSpPr>
       <p:sp>
         <p:nvSpPr>
-          <p:cNvPr id="2" name="Título 1">
-            <a:extLst>
-              <a:ext uri="{FF2B5EF4-FFF2-40B4-BE49-F238E27FC236}">
-                <a16:creationId xmlns:a16="http://schemas.microsoft.com/office/drawing/2014/main" id="{9DFC7D98-D37B-9D16-CA91-C0BF7DF04303}"/>
-              </a:ext>
-            </a:extLst>
-          </p:cNvPr>
+          <p:cNvPr id="2" name="Title 1"/>
           <p:cNvSpPr>
             <a:spLocks noGrp="1"/>
           </p:cNvSpPr>
@@ -2514,15 +4957,17 @@
         </p:nvSpPr>
         <p:spPr>
           <a:xfrm>
-            <a:off x="503873" y="365760"/>
-            <a:ext cx="2359342" cy="1280160"/>
+            <a:off x="692344" y="1483354"/>
+            <a:ext cx="3055744" cy="1259846"/>
           </a:xfrm>
         </p:spPr>
         <p:txBody>
-          <a:bodyPr anchor="b"/>
+          <a:bodyPr anchor="b">
+            <a:normAutofit/>
+          </a:bodyPr>
           <a:lstStyle>
-            <a:lvl1pPr>
-              <a:defRPr sz="1920"/>
+            <a:lvl1pPr algn="l">
+              <a:defRPr sz="2160" b="0"/>
             </a:lvl1pPr>
           </a:lstStyle>
           <a:p>
@@ -2530,21 +4975,15 @@
               <a:rPr lang="es-ES"/>
               <a:t>Haga clic para modificar el estilo de título del patrón</a:t>
             </a:r>
-            <a:endParaRPr lang="es-GT"/>
-          </a:p>
-        </p:txBody>
-      </p:sp>
-      <p:sp>
-        <p:nvSpPr>
-          <p:cNvPr id="3" name="Marcador de posición de imagen 2">
-            <a:extLst>
-              <a:ext uri="{FF2B5EF4-FFF2-40B4-BE49-F238E27FC236}">
-                <a16:creationId xmlns:a16="http://schemas.microsoft.com/office/drawing/2014/main" id="{5A437220-DC80-E5D4-A86F-91D719D9C4F3}"/>
-              </a:ext>
-            </a:extLst>
-          </p:cNvPr>
-          <p:cNvSpPr>
-            <a:spLocks noGrp="1"/>
+            <a:endParaRPr lang="en-US" dirty="0"/>
+          </a:p>
+        </p:txBody>
+      </p:sp>
+      <p:sp>
+        <p:nvSpPr>
+          <p:cNvPr id="3" name="Picture Placeholder 2"/>
+          <p:cNvSpPr>
+            <a:spLocks noGrp="1" noChangeAspect="1"/>
           </p:cNvSpPr>
           <p:nvPr>
             <p:ph type="pic" idx="1"/>
@@ -2552,118 +4991,132 @@
         </p:nvSpPr>
         <p:spPr>
           <a:xfrm>
-            <a:off x="3109913" y="789940"/>
-            <a:ext cx="3703320" cy="3898900"/>
+            <a:off x="4169728" y="914400"/>
+            <a:ext cx="1920240" cy="3657600"/>
           </a:xfrm>
+          <a:prstGeom prst="roundRect">
+            <a:avLst>
+              <a:gd name="adj" fmla="val 1858"/>
+            </a:avLst>
+          </a:prstGeom>
+          <a:effectLst>
+            <a:outerShdw blurRad="50800" dist="50800" dir="5400000" algn="tl" rotWithShape="0">
+              <a:srgbClr val="000000">
+                <a:alpha val="43000"/>
+              </a:srgbClr>
+            </a:outerShdw>
+          </a:effectLst>
         </p:spPr>
         <p:txBody>
-          <a:bodyPr/>
+          <a:bodyPr anchor="t">
+            <a:normAutofit/>
+          </a:bodyPr>
           <a:lstStyle>
-            <a:lvl1pPr marL="0" indent="0">
-              <a:buNone/>
-              <a:defRPr sz="1920"/>
-            </a:lvl1pPr>
-            <a:lvl2pPr marL="274320" indent="0">
-              <a:buNone/>
-              <a:defRPr sz="1680"/>
-            </a:lvl2pPr>
-            <a:lvl3pPr marL="548640" indent="0">
-              <a:buNone/>
-              <a:defRPr sz="1440"/>
-            </a:lvl3pPr>
-            <a:lvl4pPr marL="822960" indent="0">
-              <a:buNone/>
-              <a:defRPr sz="1200"/>
-            </a:lvl4pPr>
-            <a:lvl5pPr marL="1097280" indent="0">
-              <a:buNone/>
-              <a:defRPr sz="1200"/>
-            </a:lvl5pPr>
-            <a:lvl6pPr marL="1371600" indent="0">
-              <a:buNone/>
-              <a:defRPr sz="1200"/>
-            </a:lvl6pPr>
-            <a:lvl7pPr marL="1645920" indent="0">
-              <a:buNone/>
-              <a:defRPr sz="1200"/>
-            </a:lvl7pPr>
-            <a:lvl8pPr marL="1920240" indent="0">
-              <a:buNone/>
-              <a:defRPr sz="1200"/>
-            </a:lvl8pPr>
-            <a:lvl9pPr marL="2194560" indent="0">
-              <a:buNone/>
-              <a:defRPr sz="1200"/>
-            </a:lvl9pPr>
-          </a:lstStyle>
-          <a:p>
-            <a:endParaRPr lang="es-GT"/>
-          </a:p>
-        </p:txBody>
-      </p:sp>
-      <p:sp>
-        <p:nvSpPr>
-          <p:cNvPr id="4" name="Marcador de texto 3">
-            <a:extLst>
-              <a:ext uri="{FF2B5EF4-FFF2-40B4-BE49-F238E27FC236}">
-                <a16:creationId xmlns:a16="http://schemas.microsoft.com/office/drawing/2014/main" id="{F55918ED-A288-B68A-DEF3-9FB12EA12D8F}"/>
-              </a:ext>
-            </a:extLst>
-          </p:cNvPr>
-          <p:cNvSpPr>
-            <a:spLocks noGrp="1"/>
-          </p:cNvSpPr>
-          <p:nvPr>
-            <p:ph type="body" sz="half" idx="2"/>
-          </p:nvPr>
-        </p:nvSpPr>
-        <p:spPr>
-          <a:xfrm>
-            <a:off x="503873" y="1645920"/>
-            <a:ext cx="2359342" cy="3049270"/>
-          </a:xfrm>
-        </p:spPr>
-        <p:txBody>
-          <a:bodyPr/>
-          <a:lstStyle>
-            <a:lvl1pPr marL="0" indent="0">
+            <a:lvl1pPr marL="0" indent="0" algn="ctr">
               <a:buNone/>
               <a:defRPr sz="960"/>
             </a:lvl1pPr>
             <a:lvl2pPr marL="274320" indent="0">
               <a:buNone/>
-              <a:defRPr sz="840"/>
+              <a:defRPr sz="960"/>
             </a:lvl2pPr>
             <a:lvl3pPr marL="548640" indent="0">
               <a:buNone/>
-              <a:defRPr sz="720"/>
+              <a:defRPr sz="960"/>
             </a:lvl3pPr>
             <a:lvl4pPr marL="822960" indent="0">
               <a:buNone/>
-              <a:defRPr sz="600"/>
+              <a:defRPr sz="960"/>
             </a:lvl4pPr>
             <a:lvl5pPr marL="1097280" indent="0">
               <a:buNone/>
-              <a:defRPr sz="600"/>
+              <a:defRPr sz="960"/>
             </a:lvl5pPr>
             <a:lvl6pPr marL="1371600" indent="0">
               <a:buNone/>
-              <a:defRPr sz="600"/>
+              <a:defRPr sz="960"/>
             </a:lvl6pPr>
             <a:lvl7pPr marL="1645920" indent="0">
               <a:buNone/>
-              <a:defRPr sz="600"/>
+              <a:defRPr sz="960"/>
             </a:lvl7pPr>
             <a:lvl8pPr marL="1920240" indent="0">
               <a:buNone/>
-              <a:defRPr sz="600"/>
+              <a:defRPr sz="960"/>
             </a:lvl8pPr>
             <a:lvl9pPr marL="2194560" indent="0">
               <a:buNone/>
-              <a:defRPr sz="600"/>
+              <a:defRPr sz="960"/>
             </a:lvl9pPr>
           </a:lstStyle>
           <a:p>
+            <a:r>
+              <a:rPr lang="es-ES"/>
+              <a:t>Haga clic en el icono para agregar una imagen</a:t>
+            </a:r>
+            <a:endParaRPr lang="en-US" dirty="0"/>
+          </a:p>
+        </p:txBody>
+      </p:sp>
+      <p:sp>
+        <p:nvSpPr>
+          <p:cNvPr id="4" name="Text Placeholder 3"/>
+          <p:cNvSpPr>
+            <a:spLocks noGrp="1"/>
+          </p:cNvSpPr>
+          <p:nvPr>
+            <p:ph type="body" sz="half" idx="2"/>
+          </p:nvPr>
+        </p:nvSpPr>
+        <p:spPr>
+          <a:xfrm>
+            <a:off x="692973" y="2926080"/>
+            <a:ext cx="3050987" cy="1097280"/>
+          </a:xfrm>
+        </p:spPr>
+        <p:txBody>
+          <a:bodyPr>
+            <a:normAutofit/>
+          </a:bodyPr>
+          <a:lstStyle>
+            <a:lvl1pPr marL="0" indent="0">
+              <a:buNone/>
+              <a:defRPr sz="840"/>
+            </a:lvl1pPr>
+            <a:lvl2pPr marL="274320" indent="0">
+              <a:buNone/>
+              <a:defRPr sz="720"/>
+            </a:lvl2pPr>
+            <a:lvl3pPr marL="548640" indent="0">
+              <a:buNone/>
+              <a:defRPr sz="600"/>
+            </a:lvl3pPr>
+            <a:lvl4pPr marL="822960" indent="0">
+              <a:buNone/>
+              <a:defRPr sz="540"/>
+            </a:lvl4pPr>
+            <a:lvl5pPr marL="1097280" indent="0">
+              <a:buNone/>
+              <a:defRPr sz="540"/>
+            </a:lvl5pPr>
+            <a:lvl6pPr marL="1371600" indent="0">
+              <a:buNone/>
+              <a:defRPr sz="540"/>
+            </a:lvl6pPr>
+            <a:lvl7pPr marL="1645920" indent="0">
+              <a:buNone/>
+              <a:defRPr sz="540"/>
+            </a:lvl7pPr>
+            <a:lvl8pPr marL="1920240" indent="0">
+              <a:buNone/>
+              <a:defRPr sz="540"/>
+            </a:lvl8pPr>
+            <a:lvl9pPr marL="2194560" indent="0">
+              <a:buNone/>
+              <a:defRPr sz="540"/>
+            </a:lvl9pPr>
+          </a:lstStyle>
+          <a:p>
             <a:pPr lvl="0"/>
             <a:r>
               <a:rPr lang="es-ES"/>
@@ -2674,13 +5127,7 @@
       </p:sp>
       <p:sp>
         <p:nvSpPr>
-          <p:cNvPr id="5" name="Marcador de fecha 4">
-            <a:extLst>
-              <a:ext uri="{FF2B5EF4-FFF2-40B4-BE49-F238E27FC236}">
-                <a16:creationId xmlns:a16="http://schemas.microsoft.com/office/drawing/2014/main" id="{D94CF6E1-2909-2BA0-8FFB-228B0A1669F4}"/>
-              </a:ext>
-            </a:extLst>
-          </p:cNvPr>
+          <p:cNvPr id="5" name="Date Placeholder 4"/>
           <p:cNvSpPr>
             <a:spLocks noGrp="1"/>
           </p:cNvSpPr>
@@ -2693,7 +5140,7 @@
           <a:bodyPr/>
           <a:lstStyle/>
           <a:p>
-            <a:fld id="{938F7005-820C-452D-BD0A-9792EB6D2BE3}" type="datetimeFigureOut">
+            <a:fld id="{E03C0CA2-AF3B-45DA-B95C-F3B757DF4AEA}" type="datetimeFigureOut">
               <a:rPr lang="es-GT" smtClean="0"/>
               <a:t>7/08/2026</a:t>
             </a:fld>
@@ -2703,13 +5150,7 @@
       </p:sp>
       <p:sp>
         <p:nvSpPr>
-          <p:cNvPr id="6" name="Marcador de pie de página 5">
-            <a:extLst>
-              <a:ext uri="{FF2B5EF4-FFF2-40B4-BE49-F238E27FC236}">
-                <a16:creationId xmlns:a16="http://schemas.microsoft.com/office/drawing/2014/main" id="{99D3CF73-808B-2034-7580-9591C5B125C1}"/>
-              </a:ext>
-            </a:extLst>
-          </p:cNvPr>
+          <p:cNvPr id="6" name="Footer Placeholder 5"/>
           <p:cNvSpPr>
             <a:spLocks noGrp="1"/>
           </p:cNvSpPr>
@@ -2728,13 +5169,7 @@
       </p:sp>
       <p:sp>
         <p:nvSpPr>
-          <p:cNvPr id="7" name="Marcador de número de diapositiva 6">
-            <a:extLst>
-              <a:ext uri="{FF2B5EF4-FFF2-40B4-BE49-F238E27FC236}">
-                <a16:creationId xmlns:a16="http://schemas.microsoft.com/office/drawing/2014/main" id="{62F7A15B-9898-7703-755B-3D51BB0770FF}"/>
-              </a:ext>
-            </a:extLst>
-          </p:cNvPr>
+          <p:cNvPr id="7" name="Slide Number Placeholder 6"/>
           <p:cNvSpPr>
             <a:spLocks noGrp="1"/>
           </p:cNvSpPr>
@@ -2747,7 +5182,7 @@
           <a:bodyPr/>
           <a:lstStyle/>
           <a:p>
-            <a:fld id="{A2FD0973-D230-4D6C-8B64-DA38D2160AAC}" type="slidenum">
+            <a:fld id="{F5A1B9F3-D9AB-4E80-BD88-E1CDBD879FEC}" type="slidenum">
               <a:rPr lang="es-GT" smtClean="0"/>
               <a:t>‹Nº›</a:t>
             </a:fld>
@@ -2758,7 +5193,7 @@
     </p:spTree>
     <p:extLst>
       <p:ext uri="{BB962C8B-B14F-4D97-AF65-F5344CB8AC3E}">
-        <p14:creationId xmlns:p14="http://schemas.microsoft.com/office/powerpoint/2010/main" val="471626983"/>
+        <p14:creationId xmlns:p14="http://schemas.microsoft.com/office/powerpoint/2010/main" val="3423293441"/>
       </p:ext>
     </p:extLst>
   </p:cSld>
@@ -2772,8 +5207,8 @@
 <p:sldMaster xmlns:a="http://schemas.openxmlformats.org/drawingml/2006/main" xmlns:r="http://schemas.openxmlformats.org/officeDocument/2006/relationships" xmlns:p="http://schemas.openxmlformats.org/presentationml/2006/main">
   <p:cSld>
     <p:bg>
-      <p:bgRef idx="1001">
-        <a:schemeClr val="bg1"/>
+      <p:bgRef idx="1003">
+        <a:schemeClr val="bg2"/>
       </p:bgRef>
     </p:bg>
     <p:spTree>
@@ -2790,153 +5225,351 @@
           <a:chExt cx="0" cy="0"/>
         </a:xfrm>
       </p:grpSpPr>
-      <p:sp>
-        <p:nvSpPr>
-          <p:cNvPr id="2" name="Marcador de título 1">
+      <p:pic>
+        <p:nvPicPr>
+          <p:cNvPr id="8" name="Picture 7"/>
+          <p:cNvPicPr>
+            <a:picLocks noChangeAspect="1"/>
+          </p:cNvPicPr>
+          <p:nvPr/>
+        </p:nvPicPr>
+        <p:blipFill rotWithShape="1">
+          <a:blip r:embed="rId19">
             <a:extLst>
-              <a:ext uri="{FF2B5EF4-FFF2-40B4-BE49-F238E27FC236}">
-                <a16:creationId xmlns:a16="http://schemas.microsoft.com/office/drawing/2014/main" id="{D4CF3A83-3ED1-0C06-538C-2AEC7E0FEB19}"/>
+              <a:ext uri="{28A0092B-C50C-407E-A947-70E740481C1C}">
+                <a14:useLocalDpi xmlns:a14="http://schemas.microsoft.com/office/drawing/2010/main" val="0"/>
               </a:ext>
             </a:extLst>
-          </p:cNvPr>
-          <p:cNvSpPr>
-            <a:spLocks noGrp="1"/>
-          </p:cNvSpPr>
-          <p:nvPr>
-            <p:ph type="title"/>
-          </p:nvPr>
-        </p:nvSpPr>
+          </a:blip>
+          <a:srcRect l="3613"/>
+          <a:stretch/>
+        </p:blipFill>
         <p:spPr>
           <a:xfrm>
-            <a:off x="502920" y="292101"/>
-            <a:ext cx="6309360" cy="1060450"/>
+            <a:off x="0" y="2135748"/>
+            <a:ext cx="2422207" cy="3350652"/>
           </a:xfrm>
           <a:prstGeom prst="rect">
             <a:avLst/>
           </a:prstGeom>
         </p:spPr>
-        <p:txBody>
-          <a:bodyPr vert="horz" lIns="91440" tIns="45720" rIns="91440" bIns="45720" rtlCol="0" anchor="ctr">
-            <a:normAutofit/>
-          </a:bodyPr>
-          <a:lstStyle/>
-          <a:p>
-            <a:r>
-              <a:rPr lang="es-ES"/>
-              <a:t>Haga clic para modificar el estilo de título del patrón</a:t>
-            </a:r>
-            <a:endParaRPr lang="es-GT"/>
-          </a:p>
-        </p:txBody>
-      </p:sp>
-      <p:sp>
-        <p:nvSpPr>
-          <p:cNvPr id="3" name="Marcador de texto 2">
+      </p:pic>
+      <p:pic>
+        <p:nvPicPr>
+          <p:cNvPr id="7" name="Picture 6"/>
+          <p:cNvPicPr>
+            <a:picLocks noChangeAspect="1"/>
+          </p:cNvPicPr>
+          <p:nvPr/>
+        </p:nvPicPr>
+        <p:blipFill rotWithShape="1">
+          <a:blip r:embed="rId20">
             <a:extLst>
-              <a:ext uri="{FF2B5EF4-FFF2-40B4-BE49-F238E27FC236}">
-                <a16:creationId xmlns:a16="http://schemas.microsoft.com/office/drawing/2014/main" id="{BA38489C-1422-FCBA-8EBF-DAF94D4D798C}"/>
+              <a:ext uri="{28A0092B-C50C-407E-A947-70E740481C1C}">
+                <a14:useLocalDpi xmlns:a14="http://schemas.microsoft.com/office/drawing/2010/main" val="0"/>
               </a:ext>
             </a:extLst>
-          </p:cNvPr>
-          <p:cNvSpPr>
-            <a:spLocks noGrp="1"/>
-          </p:cNvSpPr>
-          <p:nvPr>
-            <p:ph type="body" idx="1"/>
-          </p:nvPr>
-        </p:nvSpPr>
+          </a:blip>
+          <a:srcRect l="35640"/>
+          <a:stretch/>
+        </p:blipFill>
         <p:spPr>
           <a:xfrm>
-            <a:off x="502920" y="1460500"/>
-            <a:ext cx="6309360" cy="3481070"/>
+            <a:off x="0" y="2313878"/>
+            <a:ext cx="913447" cy="1892362"/>
           </a:xfrm>
           <a:prstGeom prst="rect">
             <a:avLst/>
           </a:prstGeom>
         </p:spPr>
-        <p:txBody>
-          <a:bodyPr vert="horz" lIns="91440" tIns="45720" rIns="91440" bIns="45720" rtlCol="0">
-            <a:normAutofit/>
-          </a:bodyPr>
-          <a:lstStyle/>
-          <a:p>
-            <a:pPr lvl="0"/>
-            <a:r>
-              <a:rPr lang="es-ES"/>
-              <a:t>Haga clic para modificar los estilos de texto del patrón</a:t>
-            </a:r>
-          </a:p>
-          <a:p>
-            <a:pPr lvl="1"/>
-            <a:r>
-              <a:rPr lang="es-ES"/>
-              <a:t>Segundo nivel</a:t>
-            </a:r>
-          </a:p>
-          <a:p>
-            <a:pPr lvl="2"/>
-            <a:r>
-              <a:rPr lang="es-ES"/>
-              <a:t>Tercer nivel</a:t>
-            </a:r>
-          </a:p>
-          <a:p>
-            <a:pPr lvl="3"/>
-            <a:r>
-              <a:rPr lang="es-ES"/>
-              <a:t>Cuarto nivel</a:t>
-            </a:r>
-          </a:p>
-          <a:p>
-            <a:pPr lvl="4"/>
-            <a:r>
-              <a:rPr lang="es-ES"/>
-              <a:t>Quinto nivel</a:t>
-            </a:r>
-            <a:endParaRPr lang="es-GT"/>
-          </a:p>
-        </p:txBody>
-      </p:sp>
-      <p:sp>
-        <p:nvSpPr>
-          <p:cNvPr id="4" name="Marcador de fecha 3">
+      </p:pic>
+      <p:sp>
+        <p:nvSpPr>
+          <p:cNvPr id="16" name="Oval 15"/>
+          <p:cNvSpPr/>
+          <p:nvPr/>
+        </p:nvSpPr>
+        <p:spPr>
+          <a:xfrm>
+            <a:off x="5165407" y="1341120"/>
+            <a:ext cx="1691640" cy="2255520"/>
+          </a:xfrm>
+          <a:prstGeom prst="ellipse">
+            <a:avLst/>
+          </a:prstGeom>
+          <a:gradFill flip="none" rotWithShape="1">
+            <a:gsLst>
+              <a:gs pos="0">
+                <a:schemeClr val="bg2">
+                  <a:lumMod val="60000"/>
+                  <a:lumOff val="40000"/>
+                  <a:alpha val="7000"/>
+                </a:schemeClr>
+              </a:gs>
+              <a:gs pos="69000">
+                <a:schemeClr val="bg2">
+                  <a:lumMod val="60000"/>
+                  <a:lumOff val="40000"/>
+                  <a:alpha val="0"/>
+                </a:schemeClr>
+              </a:gs>
+              <a:gs pos="36000">
+                <a:schemeClr val="bg2">
+                  <a:lumMod val="60000"/>
+                  <a:lumOff val="40000"/>
+                  <a:alpha val="6000"/>
+                </a:schemeClr>
+              </a:gs>
+            </a:gsLst>
+            <a:path path="circle">
+              <a:fillToRect l="50000" t="50000" r="50000" b="50000"/>
+            </a:path>
+            <a:tileRect/>
+          </a:gradFill>
+          <a:ln>
+            <a:noFill/>
+          </a:ln>
+          <a:effectLst/>
+        </p:spPr>
+        <p:style>
+          <a:lnRef idx="1">
+            <a:schemeClr val="accent1"/>
+          </a:lnRef>
+          <a:fillRef idx="3">
+            <a:schemeClr val="accent1"/>
+          </a:fillRef>
+          <a:effectRef idx="2">
+            <a:schemeClr val="accent1"/>
+          </a:effectRef>
+          <a:fontRef idx="minor">
+            <a:schemeClr val="lt1"/>
+          </a:fontRef>
+        </p:style>
+      </p:sp>
+      <p:pic>
+        <p:nvPicPr>
+          <p:cNvPr id="9" name="Picture 8"/>
+          <p:cNvPicPr>
+            <a:picLocks noChangeAspect="1"/>
+          </p:cNvPicPr>
+          <p:nvPr/>
+        </p:nvPicPr>
+        <p:blipFill rotWithShape="1">
+          <a:blip r:embed="rId21">
             <a:extLst>
-              <a:ext uri="{FF2B5EF4-FFF2-40B4-BE49-F238E27FC236}">
-                <a16:creationId xmlns:a16="http://schemas.microsoft.com/office/drawing/2014/main" id="{F1CAFA25-7336-E33A-A307-8C4985B3E57C}"/>
+              <a:ext uri="{28A0092B-C50C-407E-A947-70E740481C1C}">
+                <a14:useLocalDpi xmlns:a14="http://schemas.microsoft.com/office/drawing/2010/main" val="0"/>
               </a:ext>
             </a:extLst>
-          </p:cNvPr>
-          <p:cNvSpPr>
-            <a:spLocks noGrp="1"/>
-          </p:cNvSpPr>
-          <p:nvPr>
-            <p:ph type="dt" sz="half" idx="2"/>
-          </p:nvPr>
-        </p:nvSpPr>
+          </a:blip>
+          <a:srcRect t="28813"/>
+          <a:stretch/>
+        </p:blipFill>
         <p:spPr>
           <a:xfrm>
-            <a:off x="502920" y="5085080"/>
-            <a:ext cx="1645920" cy="292100"/>
+            <a:off x="4799648" y="0"/>
+            <a:ext cx="962032" cy="913126"/>
           </a:xfrm>
           <a:prstGeom prst="rect">
             <a:avLst/>
           </a:prstGeom>
         </p:spPr>
-        <p:txBody>
-          <a:bodyPr vert="horz" lIns="91440" tIns="45720" rIns="91440" bIns="45720" rtlCol="0" anchor="ctr"/>
+      </p:pic>
+      <p:pic>
+        <p:nvPicPr>
+          <p:cNvPr id="10" name="Picture 9"/>
+          <p:cNvPicPr>
+            <a:picLocks noChangeAspect="1"/>
+          </p:cNvPicPr>
+          <p:nvPr/>
+        </p:nvPicPr>
+        <p:blipFill rotWithShape="1">
+          <a:blip r:embed="rId22">
+            <a:extLst>
+              <a:ext uri="{28A0092B-C50C-407E-A947-70E740481C1C}">
+                <a14:useLocalDpi xmlns:a14="http://schemas.microsoft.com/office/drawing/2010/main" val="0"/>
+              </a:ext>
+            </a:extLst>
+          </a:blip>
+          <a:srcRect b="23320"/>
+          <a:stretch/>
+        </p:blipFill>
+        <p:spPr>
+          <a:xfrm>
+            <a:off x="5163527" y="4876800"/>
+            <a:ext cx="596240" cy="609600"/>
+          </a:xfrm>
+          <a:prstGeom prst="rect">
+            <a:avLst/>
+          </a:prstGeom>
+        </p:spPr>
+      </p:pic>
+      <p:sp>
+        <p:nvSpPr>
+          <p:cNvPr id="14" name="Rectangle 13"/>
+          <p:cNvSpPr/>
+          <p:nvPr/>
+        </p:nvSpPr>
+        <p:spPr>
+          <a:xfrm>
+            <a:off x="6262687" y="0"/>
+            <a:ext cx="411480" cy="914400"/>
+          </a:xfrm>
+          <a:prstGeom prst="rect">
+            <a:avLst/>
+          </a:prstGeom>
+          <a:solidFill>
+            <a:schemeClr val="accent1"/>
+          </a:solidFill>
+          <a:ln>
+            <a:noFill/>
+          </a:ln>
+        </p:spPr>
+        <p:style>
+          <a:lnRef idx="1">
+            <a:schemeClr val="accent1"/>
+          </a:lnRef>
+          <a:fillRef idx="3">
+            <a:schemeClr val="accent1"/>
+          </a:fillRef>
+          <a:effectRef idx="2">
+            <a:schemeClr val="accent1"/>
+          </a:effectRef>
+          <a:fontRef idx="minor">
+            <a:schemeClr val="lt1"/>
+          </a:fontRef>
+        </p:style>
+      </p:sp>
+      <p:sp>
+        <p:nvSpPr>
+          <p:cNvPr id="2" name="Title Placeholder 1"/>
+          <p:cNvSpPr>
+            <a:spLocks noGrp="1"/>
+          </p:cNvSpPr>
+          <p:nvPr>
+            <p:ph type="title"/>
+          </p:nvPr>
+        </p:nvSpPr>
+        <p:spPr>
+          <a:xfrm>
+            <a:off x="387667" y="362174"/>
+            <a:ext cx="5642834" cy="1120424"/>
+          </a:xfrm>
+          <a:prstGeom prst="rect">
+            <a:avLst/>
+          </a:prstGeom>
+        </p:spPr>
+        <p:txBody>
+          <a:bodyPr vert="horz" lIns="91440" tIns="45720" rIns="91440" bIns="45720" rtlCol="0" anchor="t">
+            <a:noAutofit/>
+          </a:bodyPr>
+          <a:lstStyle/>
+          <a:p>
+            <a:r>
+              <a:rPr lang="es-ES"/>
+              <a:t>Haga clic para modificar el estilo de título del patrón</a:t>
+            </a:r>
+            <a:endParaRPr lang="en-US" dirty="0"/>
+          </a:p>
+        </p:txBody>
+      </p:sp>
+      <p:sp>
+        <p:nvSpPr>
+          <p:cNvPr id="3" name="Text Placeholder 2"/>
+          <p:cNvSpPr>
+            <a:spLocks noGrp="1"/>
+          </p:cNvSpPr>
+          <p:nvPr>
+            <p:ph type="body" idx="1"/>
+          </p:nvPr>
+        </p:nvSpPr>
+        <p:spPr>
+          <a:xfrm>
+            <a:off x="661987" y="1642335"/>
+            <a:ext cx="5367925" cy="3356385"/>
+          </a:xfrm>
+          <a:prstGeom prst="rect">
+            <a:avLst/>
+          </a:prstGeom>
+        </p:spPr>
+        <p:txBody>
+          <a:bodyPr vert="horz" lIns="91440" tIns="45720" rIns="91440" bIns="45720" rtlCol="0">
+            <a:normAutofit/>
+          </a:bodyPr>
+          <a:lstStyle/>
+          <a:p>
+            <a:pPr lvl="0"/>
+            <a:r>
+              <a:rPr lang="es-ES"/>
+              <a:t>Haga clic para modificar los estilos de texto del patrón</a:t>
+            </a:r>
+          </a:p>
+          <a:p>
+            <a:pPr lvl="1"/>
+            <a:r>
+              <a:rPr lang="es-ES"/>
+              <a:t>Segundo nivel</a:t>
+            </a:r>
+          </a:p>
+          <a:p>
+            <a:pPr lvl="2"/>
+            <a:r>
+              <a:rPr lang="es-ES"/>
+              <a:t>Tercer nivel</a:t>
+            </a:r>
+          </a:p>
+          <a:p>
+            <a:pPr lvl="3"/>
+            <a:r>
+              <a:rPr lang="es-ES"/>
+              <a:t>Cuarto nivel</a:t>
+            </a:r>
+          </a:p>
+          <a:p>
+            <a:pPr lvl="4"/>
+            <a:r>
+              <a:rPr lang="es-ES"/>
+              <a:t>Quinto nivel</a:t>
+            </a:r>
+            <a:endParaRPr lang="en-US" dirty="0"/>
+          </a:p>
+        </p:txBody>
+      </p:sp>
+      <p:sp>
+        <p:nvSpPr>
+          <p:cNvPr id="4" name="Date Placeholder 3"/>
+          <p:cNvSpPr>
+            <a:spLocks noGrp="1"/>
+          </p:cNvSpPr>
+          <p:nvPr>
+            <p:ph type="dt" sz="half" idx="2"/>
+          </p:nvPr>
+        </p:nvSpPr>
+        <p:spPr>
+          <a:xfrm rot="5400000">
+            <a:off x="5994324" y="1463041"/>
+            <a:ext cx="792479" cy="182879"/>
+          </a:xfrm>
+          <a:prstGeom prst="rect">
+            <a:avLst/>
+          </a:prstGeom>
+        </p:spPr>
+        <p:txBody>
+          <a:bodyPr vert="horz" lIns="91440" tIns="45720" rIns="91440" bIns="45720" rtlCol="0" anchor="t"/>
           <a:lstStyle>
             <a:lvl1pPr algn="l">
-              <a:defRPr sz="720">
+              <a:defRPr sz="660" b="0" i="0">
                 <a:solidFill>
                   <a:schemeClr val="tx1">
-                    <a:tint val="82000"/>
+                    <a:tint val="75000"/>
+                    <a:alpha val="60000"/>
                   </a:schemeClr>
                 </a:solidFill>
               </a:defRPr>
             </a:lvl1pPr>
           </a:lstStyle>
           <a:p>
-            <a:fld id="{938F7005-820C-452D-BD0A-9792EB6D2BE3}" type="datetimeFigureOut">
+            <a:fld id="{E03C0CA2-AF3B-45DA-B95C-F3B757DF4AEA}" type="datetimeFigureOut">
               <a:rPr lang="es-GT" smtClean="0"/>
               <a:t>7/08/2026</a:t>
             </a:fld>
@@ -2946,13 +5579,7 @@
       </p:sp>
       <p:sp>
         <p:nvSpPr>
-          <p:cNvPr id="5" name="Marcador de pie de página 4">
-            <a:extLst>
-              <a:ext uri="{FF2B5EF4-FFF2-40B4-BE49-F238E27FC236}">
-                <a16:creationId xmlns:a16="http://schemas.microsoft.com/office/drawing/2014/main" id="{D979084B-15CB-DE4B-69D6-C4C4BAD332E0}"/>
-              </a:ext>
-            </a:extLst>
-          </p:cNvPr>
+          <p:cNvPr id="5" name="Footer Placeholder 4"/>
           <p:cNvSpPr>
             <a:spLocks noGrp="1"/>
           </p:cNvSpPr>
@@ -2961,22 +5588,23 @@
           </p:nvPr>
         </p:nvSpPr>
         <p:spPr>
-          <a:xfrm>
-            <a:off x="2423160" y="5085080"/>
-            <a:ext cx="2468880" cy="292100"/>
+          <a:xfrm rot="5400000">
+            <a:off x="4984965" y="2610718"/>
+            <a:ext cx="3087836" cy="182881"/>
           </a:xfrm>
           <a:prstGeom prst="rect">
             <a:avLst/>
           </a:prstGeom>
         </p:spPr>
         <p:txBody>
-          <a:bodyPr vert="horz" lIns="91440" tIns="45720" rIns="91440" bIns="45720" rtlCol="0" anchor="ctr"/>
+          <a:bodyPr vert="horz" lIns="91440" tIns="45720" rIns="91440" bIns="45720" rtlCol="0" anchor="b"/>
           <a:lstStyle>
-            <a:lvl1pPr algn="ctr">
-              <a:defRPr sz="720">
+            <a:lvl1pPr algn="l">
+              <a:defRPr sz="660" b="0" i="0">
                 <a:solidFill>
                   <a:schemeClr val="tx1">
-                    <a:tint val="82000"/>
+                    <a:tint val="75000"/>
+                    <a:alpha val="60000"/>
                   </a:schemeClr>
                 </a:solidFill>
               </a:defRPr>
@@ -2989,13 +5617,7 @@
       </p:sp>
       <p:sp>
         <p:nvSpPr>
-          <p:cNvPr id="6" name="Marcador de número de diapositiva 5">
-            <a:extLst>
-              <a:ext uri="{FF2B5EF4-FFF2-40B4-BE49-F238E27FC236}">
-                <a16:creationId xmlns:a16="http://schemas.microsoft.com/office/drawing/2014/main" id="{A129E95B-63BE-EF40-7778-92666BAA2FAC}"/>
-              </a:ext>
-            </a:extLst>
-          </p:cNvPr>
+          <p:cNvPr id="6" name="Slide Number Placeholder 5"/>
           <p:cNvSpPr>
             <a:spLocks noGrp="1"/>
           </p:cNvSpPr>
@@ -3003,30 +5625,30 @@
             <p:ph type="sldNum" sz="quarter" idx="4"/>
           </p:nvPr>
         </p:nvSpPr>
-        <p:spPr>
+        <p:spPr bwMode="gray">
           <a:xfrm>
-            <a:off x="5166360" y="5085080"/>
-            <a:ext cx="1645920" cy="292100"/>
+            <a:off x="6211525" y="236583"/>
+            <a:ext cx="502919" cy="614150"/>
           </a:xfrm>
           <a:prstGeom prst="rect">
             <a:avLst/>
           </a:prstGeom>
         </p:spPr>
         <p:txBody>
-          <a:bodyPr vert="horz" lIns="91440" tIns="45720" rIns="91440" bIns="45720" rtlCol="0" anchor="ctr"/>
+          <a:bodyPr vert="horz" lIns="91440" tIns="45720" rIns="91440" bIns="45720" rtlCol="0" anchor="b"/>
           <a:lstStyle>
-            <a:lvl1pPr algn="r">
-              <a:defRPr sz="720">
+            <a:lvl1pPr algn="ctr">
+              <a:defRPr sz="1680" b="0" i="0">
                 <a:solidFill>
                   <a:schemeClr val="tx1">
-                    <a:tint val="82000"/>
+                    <a:tint val="75000"/>
                   </a:schemeClr>
                 </a:solidFill>
               </a:defRPr>
             </a:lvl1pPr>
           </a:lstStyle>
           <a:p>
-            <a:fld id="{A2FD0973-D230-4D6C-8B64-DA38D2160AAC}" type="slidenum">
+            <a:fld id="{F5A1B9F3-D9AB-4E80-BD88-E1CDBD879FEC}" type="slidenum">
               <a:rPr lang="es-GT" smtClean="0"/>
               <a:t>‹Nº›</a:t>
             </a:fld>
@@ -3037,35 +5659,121 @@
     </p:spTree>
     <p:extLst>
       <p:ext uri="{BB962C8B-B14F-4D97-AF65-F5344CB8AC3E}">
-        <p14:creationId xmlns:p14="http://schemas.microsoft.com/office/powerpoint/2010/main" val="3463287465"/>
+        <p14:creationId xmlns:p14="http://schemas.microsoft.com/office/powerpoint/2010/main" val="1337123864"/>
       </p:ext>
     </p:extLst>
   </p:cSld>
-  <p:clrMap bg1="lt1" tx1="dk1" bg2="lt2" tx2="dk2" accent1="accent1" accent2="accent2" accent3="accent3" accent4="accent4" accent5="accent5" accent6="accent6" hlink="hlink" folHlink="folHlink"/>
+  <p:clrMap bg1="dk1" tx1="lt1" bg2="dk2" tx2="lt2" accent1="accent1" accent2="accent2" accent3="accent3" accent4="accent4" accent5="accent5" accent6="accent6" hlink="hlink" folHlink="folHlink"/>
   <p:sldLayoutIdLst>
-    <p:sldLayoutId id="2147483649" r:id="rId1"/>
-    <p:sldLayoutId id="2147483650" r:id="rId2"/>
-    <p:sldLayoutId id="2147483651" r:id="rId3"/>
-    <p:sldLayoutId id="2147483652" r:id="rId4"/>
-    <p:sldLayoutId id="2147483653" r:id="rId5"/>
-    <p:sldLayoutId id="2147483654" r:id="rId6"/>
-    <p:sldLayoutId id="2147483655" r:id="rId7"/>
-    <p:sldLayoutId id="2147483656" r:id="rId8"/>
-    <p:sldLayoutId id="2147483657" r:id="rId9"/>
-    <p:sldLayoutId id="2147483658" r:id="rId10"/>
-    <p:sldLayoutId id="2147483659" r:id="rId11"/>
+    <p:sldLayoutId id="2147483661" r:id="rId1"/>
+    <p:sldLayoutId id="2147483662" r:id="rId2"/>
+    <p:sldLayoutId id="2147483663" r:id="rId3"/>
+    <p:sldLayoutId id="2147483664" r:id="rId4"/>
+    <p:sldLayoutId id="2147483665" r:id="rId5"/>
+    <p:sldLayoutId id="2147483666" r:id="rId6"/>
+    <p:sldLayoutId id="2147483667" r:id="rId7"/>
+    <p:sldLayoutId id="2147483668" r:id="rId8"/>
+    <p:sldLayoutId id="2147483669" r:id="rId9"/>
+    <p:sldLayoutId id="2147483670" r:id="rId10"/>
+    <p:sldLayoutId id="2147483671" r:id="rId11"/>
+    <p:sldLayoutId id="2147483672" r:id="rId12"/>
+    <p:sldLayoutId id="2147483673" r:id="rId13"/>
+    <p:sldLayoutId id="2147483674" r:id="rId14"/>
+    <p:sldLayoutId id="2147483675" r:id="rId15"/>
+    <p:sldLayoutId id="2147483676" r:id="rId16"/>
+    <p:sldLayoutId id="2147483677" r:id="rId17"/>
   </p:sldLayoutIdLst>
   <p:txStyles>
     <p:titleStyle>
-      <a:lvl1pPr algn="l" defTabSz="548640" rtl="0" eaLnBrk="1" latinLnBrk="0" hangingPunct="1">
-        <a:lnSpc>
-          <a:spcPct val="90000"/>
-        </a:lnSpc>
+      <a:lvl1pPr algn="l" defTabSz="274320" rtl="0" eaLnBrk="1" latinLnBrk="0" hangingPunct="1">
         <a:spcBef>
           <a:spcPct val="0"/>
         </a:spcBef>
         <a:buNone/>
-        <a:defRPr sz="2640" kern="1200">
+        <a:defRPr sz="2520" b="0" i="0" kern="1200">
+          <a:solidFill>
+            <a:schemeClr val="tx2"/>
+          </a:solidFill>
+          <a:latin typeface="+mj-lt"/>
+          <a:ea typeface="+mj-ea"/>
+          <a:cs typeface="+mj-cs"/>
+        </a:defRPr>
+      </a:lvl1pPr>
+      <a:lvl2pPr eaLnBrk="1" hangingPunct="1">
+        <a:defRPr>
+          <a:solidFill>
+            <a:schemeClr val="tx2"/>
+          </a:solidFill>
+        </a:defRPr>
+      </a:lvl2pPr>
+      <a:lvl3pPr eaLnBrk="1" hangingPunct="1">
+        <a:defRPr>
+          <a:solidFill>
+            <a:schemeClr val="tx2"/>
+          </a:solidFill>
+        </a:defRPr>
+      </a:lvl3pPr>
+      <a:lvl4pPr eaLnBrk="1" hangingPunct="1">
+        <a:defRPr>
+          <a:solidFill>
+            <a:schemeClr val="tx2"/>
+          </a:solidFill>
+        </a:defRPr>
+      </a:lvl4pPr>
+      <a:lvl5pPr eaLnBrk="1" hangingPunct="1">
+        <a:defRPr>
+          <a:solidFill>
+            <a:schemeClr val="tx2"/>
+          </a:solidFill>
+        </a:defRPr>
+      </a:lvl5pPr>
+      <a:lvl6pPr eaLnBrk="1" hangingPunct="1">
+        <a:defRPr>
+          <a:solidFill>
+            <a:schemeClr val="tx2"/>
+          </a:solidFill>
+        </a:defRPr>
+      </a:lvl6pPr>
+      <a:lvl7pPr eaLnBrk="1" hangingPunct="1">
+        <a:defRPr>
+          <a:solidFill>
+            <a:schemeClr val="tx2"/>
+          </a:solidFill>
+        </a:defRPr>
+      </a:lvl7pPr>
+      <a:lvl8pPr eaLnBrk="1" hangingPunct="1">
+        <a:defRPr>
+          <a:solidFill>
+            <a:schemeClr val="tx2"/>
+          </a:solidFill>
+        </a:defRPr>
+      </a:lvl8pPr>
+      <a:lvl9pPr eaLnBrk="1" hangingPunct="1">
+        <a:defRPr>
+          <a:solidFill>
+            <a:schemeClr val="tx2"/>
+          </a:solidFill>
+        </a:defRPr>
+      </a:lvl9pPr>
+    </p:titleStyle>
+    <p:bodyStyle>
+      <a:lvl1pPr marL="205740" indent="-205740" algn="l" defTabSz="274320" rtl="0" eaLnBrk="1" latinLnBrk="0" hangingPunct="1">
+        <a:spcBef>
+          <a:spcPts val="600"/>
+        </a:spcBef>
+        <a:spcAft>
+          <a:spcPts val="0"/>
+        </a:spcAft>
+        <a:buClr>
+          <a:schemeClr val="bg2">
+            <a:lumMod val="40000"/>
+            <a:lumOff val="60000"/>
+          </a:schemeClr>
+        </a:buClr>
+        <a:buSzPct val="80000"/>
+        <a:buFont typeface="Wingdings 3" charset="2"/>
+        <a:buChar char=""/>
+        <a:defRPr sz="1200" b="0" i="0" kern="1200">
           <a:solidFill>
             <a:schemeClr val="tx1"/>
           </a:solidFill>
@@ -3074,18 +5782,213 @@
           <a:cs typeface="+mj-cs"/>
         </a:defRPr>
       </a:lvl1pPr>
-    </p:titleStyle>
-    <p:bodyStyle>
-      <a:lvl1pPr marL="137160" indent="-137160" algn="l" defTabSz="548640" rtl="0" eaLnBrk="1" latinLnBrk="0" hangingPunct="1">
-        <a:lnSpc>
-          <a:spcPct val="90000"/>
-        </a:lnSpc>
+      <a:lvl2pPr marL="445770" indent="-171450" algn="l" defTabSz="274320" rtl="0" eaLnBrk="1" latinLnBrk="0" hangingPunct="1">
         <a:spcBef>
           <a:spcPts val="600"/>
         </a:spcBef>
-        <a:buFont typeface="Arial" panose="020B0604020202020204" pitchFamily="34" charset="0"/>
-        <a:buChar char="•"/>
-        <a:defRPr sz="1680" kern="1200">
+        <a:spcAft>
+          <a:spcPts val="0"/>
+        </a:spcAft>
+        <a:buClr>
+          <a:schemeClr val="bg2">
+            <a:lumMod val="40000"/>
+            <a:lumOff val="60000"/>
+          </a:schemeClr>
+        </a:buClr>
+        <a:buSzPct val="80000"/>
+        <a:buFont typeface="Wingdings 3" charset="2"/>
+        <a:buChar char=""/>
+        <a:defRPr sz="1080" b="0" i="0" kern="1200">
+          <a:solidFill>
+            <a:schemeClr val="tx1"/>
+          </a:solidFill>
+          <a:latin typeface="+mj-lt"/>
+          <a:ea typeface="+mj-ea"/>
+          <a:cs typeface="+mj-cs"/>
+        </a:defRPr>
+      </a:lvl2pPr>
+      <a:lvl3pPr marL="685800" indent="-137160" algn="l" defTabSz="274320" rtl="0" eaLnBrk="1" latinLnBrk="0" hangingPunct="1">
+        <a:spcBef>
+          <a:spcPts val="600"/>
+        </a:spcBef>
+        <a:spcAft>
+          <a:spcPts val="0"/>
+        </a:spcAft>
+        <a:buClr>
+          <a:schemeClr val="bg2">
+            <a:lumMod val="40000"/>
+            <a:lumOff val="60000"/>
+          </a:schemeClr>
+        </a:buClr>
+        <a:buSzPct val="80000"/>
+        <a:buFont typeface="Wingdings 3" charset="2"/>
+        <a:buChar char=""/>
+        <a:defRPr sz="960" b="0" i="0" kern="1200">
+          <a:solidFill>
+            <a:schemeClr val="tx1"/>
+          </a:solidFill>
+          <a:latin typeface="+mj-lt"/>
+          <a:ea typeface="+mj-ea"/>
+          <a:cs typeface="+mj-cs"/>
+        </a:defRPr>
+      </a:lvl3pPr>
+      <a:lvl4pPr marL="960120" indent="-137160" algn="l" defTabSz="274320" rtl="0" eaLnBrk="1" latinLnBrk="0" hangingPunct="1">
+        <a:spcBef>
+          <a:spcPts val="600"/>
+        </a:spcBef>
+        <a:spcAft>
+          <a:spcPts val="0"/>
+        </a:spcAft>
+        <a:buClr>
+          <a:schemeClr val="bg2">
+            <a:lumMod val="40000"/>
+            <a:lumOff val="60000"/>
+          </a:schemeClr>
+        </a:buClr>
+        <a:buSzPct val="80000"/>
+        <a:buFont typeface="Wingdings 3" charset="2"/>
+        <a:buChar char=""/>
+        <a:defRPr sz="840" b="0" i="0" kern="1200">
+          <a:solidFill>
+            <a:schemeClr val="tx1"/>
+          </a:solidFill>
+          <a:latin typeface="+mj-lt"/>
+          <a:ea typeface="+mj-ea"/>
+          <a:cs typeface="+mj-cs"/>
+        </a:defRPr>
+      </a:lvl4pPr>
+      <a:lvl5pPr marL="1234440" indent="-137160" algn="l" defTabSz="274320" rtl="0" eaLnBrk="1" latinLnBrk="0" hangingPunct="1">
+        <a:spcBef>
+          <a:spcPts val="600"/>
+        </a:spcBef>
+        <a:spcAft>
+          <a:spcPts val="0"/>
+        </a:spcAft>
+        <a:buClr>
+          <a:schemeClr val="bg2">
+            <a:lumMod val="40000"/>
+            <a:lumOff val="60000"/>
+          </a:schemeClr>
+        </a:buClr>
+        <a:buSzPct val="80000"/>
+        <a:buFont typeface="Wingdings 3" charset="2"/>
+        <a:buChar char=""/>
+        <a:defRPr sz="840" b="0" i="0" kern="1200">
+          <a:solidFill>
+            <a:schemeClr val="tx1"/>
+          </a:solidFill>
+          <a:latin typeface="+mj-lt"/>
+          <a:ea typeface="+mj-ea"/>
+          <a:cs typeface="+mj-cs"/>
+        </a:defRPr>
+      </a:lvl5pPr>
+      <a:lvl6pPr marL="1503600" indent="-137160" algn="l" defTabSz="274320" rtl="0" eaLnBrk="1" latinLnBrk="0" hangingPunct="1">
+        <a:spcBef>
+          <a:spcPts val="600"/>
+        </a:spcBef>
+        <a:spcAft>
+          <a:spcPts val="0"/>
+        </a:spcAft>
+        <a:buClr>
+          <a:schemeClr val="bg2">
+            <a:lumMod val="40000"/>
+            <a:lumOff val="60000"/>
+          </a:schemeClr>
+        </a:buClr>
+        <a:buSzPct val="80000"/>
+        <a:buFont typeface="Wingdings 3" charset="2"/>
+        <a:buChar char=""/>
+        <a:defRPr sz="840" b="0" i="0" kern="1200">
+          <a:solidFill>
+            <a:schemeClr val="tx1"/>
+          </a:solidFill>
+          <a:latin typeface="+mj-lt"/>
+          <a:ea typeface="+mj-ea"/>
+          <a:cs typeface="+mj-cs"/>
+        </a:defRPr>
+      </a:lvl6pPr>
+      <a:lvl7pPr marL="1783080" indent="-137160" algn="l" defTabSz="274320" rtl="0" eaLnBrk="1" latinLnBrk="0" hangingPunct="1">
+        <a:spcBef>
+          <a:spcPts val="600"/>
+        </a:spcBef>
+        <a:spcAft>
+          <a:spcPts val="0"/>
+        </a:spcAft>
+        <a:buClr>
+          <a:schemeClr val="bg2">
+            <a:lumMod val="40000"/>
+            <a:lumOff val="60000"/>
+          </a:schemeClr>
+        </a:buClr>
+        <a:buSzPct val="80000"/>
+        <a:buFont typeface="Wingdings 3" charset="2"/>
+        <a:buChar char=""/>
+        <a:defRPr sz="840" b="0" i="0" kern="1200">
+          <a:solidFill>
+            <a:schemeClr val="tx1"/>
+          </a:solidFill>
+          <a:latin typeface="+mj-lt"/>
+          <a:ea typeface="+mj-ea"/>
+          <a:cs typeface="+mj-cs"/>
+        </a:defRPr>
+      </a:lvl7pPr>
+      <a:lvl8pPr marL="2057400" indent="-137160" algn="l" defTabSz="274320" rtl="0" eaLnBrk="1" latinLnBrk="0" hangingPunct="1">
+        <a:spcBef>
+          <a:spcPts val="600"/>
+        </a:spcBef>
+        <a:spcAft>
+          <a:spcPts val="0"/>
+        </a:spcAft>
+        <a:buClr>
+          <a:schemeClr val="bg2">
+            <a:lumMod val="40000"/>
+            <a:lumOff val="60000"/>
+          </a:schemeClr>
+        </a:buClr>
+        <a:buSzPct val="80000"/>
+        <a:buFont typeface="Wingdings 3" charset="2"/>
+        <a:buChar char=""/>
+        <a:defRPr sz="840" b="0" i="0" kern="1200">
+          <a:solidFill>
+            <a:schemeClr val="tx1"/>
+          </a:solidFill>
+          <a:latin typeface="+mj-lt"/>
+          <a:ea typeface="+mj-ea"/>
+          <a:cs typeface="+mj-cs"/>
+        </a:defRPr>
+      </a:lvl8pPr>
+      <a:lvl9pPr marL="2331720" indent="-137160" algn="l" defTabSz="274320" rtl="0" eaLnBrk="1" latinLnBrk="0" hangingPunct="1">
+        <a:spcBef>
+          <a:spcPts val="600"/>
+        </a:spcBef>
+        <a:spcAft>
+          <a:spcPts val="0"/>
+        </a:spcAft>
+        <a:buClr>
+          <a:schemeClr val="bg2">
+            <a:lumMod val="40000"/>
+            <a:lumOff val="60000"/>
+          </a:schemeClr>
+        </a:buClr>
+        <a:buSzPct val="80000"/>
+        <a:buFont typeface="Wingdings 3" charset="2"/>
+        <a:buChar char=""/>
+        <a:defRPr sz="840" b="0" i="0" kern="1200">
+          <a:solidFill>
+            <a:schemeClr val="tx1"/>
+          </a:solidFill>
+          <a:latin typeface="+mj-lt"/>
+          <a:ea typeface="+mj-ea"/>
+          <a:cs typeface="+mj-cs"/>
+        </a:defRPr>
+      </a:lvl9pPr>
+    </p:bodyStyle>
+    <p:otherStyle>
+      <a:defPPr>
+        <a:defRPr lang="en-US"/>
+      </a:defPPr>
+      <a:lvl1pPr marL="0" algn="l" defTabSz="274320" rtl="0" eaLnBrk="1" latinLnBrk="0" hangingPunct="1">
+        <a:defRPr sz="1080" kern="1200">
           <a:solidFill>
             <a:schemeClr val="tx1"/>
           </a:solidFill>
@@ -3094,16 +5997,8 @@
           <a:cs typeface="+mn-cs"/>
         </a:defRPr>
       </a:lvl1pPr>
-      <a:lvl2pPr marL="411480" indent="-137160" algn="l" defTabSz="548640" rtl="0" eaLnBrk="1" latinLnBrk="0" hangingPunct="1">
-        <a:lnSpc>
-          <a:spcPct val="90000"/>
-        </a:lnSpc>
-        <a:spcBef>
-          <a:spcPts val="300"/>
-        </a:spcBef>
-        <a:buFont typeface="Arial" panose="020B0604020202020204" pitchFamily="34" charset="0"/>
-        <a:buChar char="•"/>
-        <a:defRPr sz="1440" kern="1200">
+      <a:lvl2pPr marL="274320" algn="l" defTabSz="274320" rtl="0" eaLnBrk="1" latinLnBrk="0" hangingPunct="1">
+        <a:defRPr sz="1080" kern="1200">
           <a:solidFill>
             <a:schemeClr val="tx1"/>
           </a:solidFill>
@@ -3112,16 +6007,8 @@
           <a:cs typeface="+mn-cs"/>
         </a:defRPr>
       </a:lvl2pPr>
-      <a:lvl3pPr marL="685800" indent="-137160" algn="l" defTabSz="548640" rtl="0" eaLnBrk="1" latinLnBrk="0" hangingPunct="1">
-        <a:lnSpc>
-          <a:spcPct val="90000"/>
-        </a:lnSpc>
-        <a:spcBef>
-          <a:spcPts val="300"/>
-        </a:spcBef>
-        <a:buFont typeface="Arial" panose="020B0604020202020204" pitchFamily="34" charset="0"/>
-        <a:buChar char="•"/>
-        <a:defRPr sz="1200" kern="1200">
+      <a:lvl3pPr marL="548640" algn="l" defTabSz="274320" rtl="0" eaLnBrk="1" latinLnBrk="0" hangingPunct="1">
+        <a:defRPr sz="1080" kern="1200">
           <a:solidFill>
             <a:schemeClr val="tx1"/>
           </a:solidFill>
@@ -3130,15 +6017,7 @@
           <a:cs typeface="+mn-cs"/>
         </a:defRPr>
       </a:lvl3pPr>
-      <a:lvl4pPr marL="960120" indent="-137160" algn="l" defTabSz="548640" rtl="0" eaLnBrk="1" latinLnBrk="0" hangingPunct="1">
-        <a:lnSpc>
-          <a:spcPct val="90000"/>
-        </a:lnSpc>
-        <a:spcBef>
-          <a:spcPts val="300"/>
-        </a:spcBef>
-        <a:buFont typeface="Arial" panose="020B0604020202020204" pitchFamily="34" charset="0"/>
-        <a:buChar char="•"/>
+      <a:lvl4pPr marL="822960" algn="l" defTabSz="274320" rtl="0" eaLnBrk="1" latinLnBrk="0" hangingPunct="1">
         <a:defRPr sz="1080" kern="1200">
           <a:solidFill>
             <a:schemeClr val="tx1"/>
@@ -3148,15 +6027,7 @@
           <a:cs typeface="+mn-cs"/>
         </a:defRPr>
       </a:lvl4pPr>
-      <a:lvl5pPr marL="1234440" indent="-137160" algn="l" defTabSz="548640" rtl="0" eaLnBrk="1" latinLnBrk="0" hangingPunct="1">
-        <a:lnSpc>
-          <a:spcPct val="90000"/>
-        </a:lnSpc>
-        <a:spcBef>
-          <a:spcPts val="300"/>
-        </a:spcBef>
-        <a:buFont typeface="Arial" panose="020B0604020202020204" pitchFamily="34" charset="0"/>
-        <a:buChar char="•"/>
+      <a:lvl5pPr marL="1097280" algn="l" defTabSz="274320" rtl="0" eaLnBrk="1" latinLnBrk="0" hangingPunct="1">
         <a:defRPr sz="1080" kern="1200">
           <a:solidFill>
             <a:schemeClr val="tx1"/>
@@ -3166,15 +6037,7 @@
           <a:cs typeface="+mn-cs"/>
         </a:defRPr>
       </a:lvl5pPr>
-      <a:lvl6pPr marL="1508760" indent="-137160" algn="l" defTabSz="548640" rtl="0" eaLnBrk="1" latinLnBrk="0" hangingPunct="1">
-        <a:lnSpc>
-          <a:spcPct val="90000"/>
-        </a:lnSpc>
-        <a:spcBef>
-          <a:spcPts val="300"/>
-        </a:spcBef>
-        <a:buFont typeface="Arial" panose="020B0604020202020204" pitchFamily="34" charset="0"/>
-        <a:buChar char="•"/>
+      <a:lvl6pPr marL="1371600" algn="l" defTabSz="274320" rtl="0" eaLnBrk="1" latinLnBrk="0" hangingPunct="1">
         <a:defRPr sz="1080" kern="1200">
           <a:solidFill>
             <a:schemeClr val="tx1"/>
@@ -3184,15 +6047,7 @@
           <a:cs typeface="+mn-cs"/>
         </a:defRPr>
       </a:lvl6pPr>
-      <a:lvl7pPr marL="1783080" indent="-137160" algn="l" defTabSz="548640" rtl="0" eaLnBrk="1" latinLnBrk="0" hangingPunct="1">
-        <a:lnSpc>
-          <a:spcPct val="90000"/>
-        </a:lnSpc>
-        <a:spcBef>
-          <a:spcPts val="300"/>
-        </a:spcBef>
-        <a:buFont typeface="Arial" panose="020B0604020202020204" pitchFamily="34" charset="0"/>
-        <a:buChar char="•"/>
+      <a:lvl7pPr marL="1645920" algn="l" defTabSz="274320" rtl="0" eaLnBrk="1" latinLnBrk="0" hangingPunct="1">
         <a:defRPr sz="1080" kern="1200">
           <a:solidFill>
             <a:schemeClr val="tx1"/>
@@ -3202,15 +6057,7 @@
           <a:cs typeface="+mn-cs"/>
         </a:defRPr>
       </a:lvl7pPr>
-      <a:lvl8pPr marL="2057400" indent="-137160" algn="l" defTabSz="548640" rtl="0" eaLnBrk="1" latinLnBrk="0" hangingPunct="1">
-        <a:lnSpc>
-          <a:spcPct val="90000"/>
-        </a:lnSpc>
-        <a:spcBef>
-          <a:spcPts val="300"/>
-        </a:spcBef>
-        <a:buFont typeface="Arial" panose="020B0604020202020204" pitchFamily="34" charset="0"/>
-        <a:buChar char="•"/>
+      <a:lvl8pPr marL="1920240" algn="l" defTabSz="274320" rtl="0" eaLnBrk="1" latinLnBrk="0" hangingPunct="1">
         <a:defRPr sz="1080" kern="1200">
           <a:solidFill>
             <a:schemeClr val="tx1"/>
@@ -3220,110 +6067,7 @@
           <a:cs typeface="+mn-cs"/>
         </a:defRPr>
       </a:lvl8pPr>
-      <a:lvl9pPr marL="2331720" indent="-137160" algn="l" defTabSz="548640" rtl="0" eaLnBrk="1" latinLnBrk="0" hangingPunct="1">
-        <a:lnSpc>
-          <a:spcPct val="90000"/>
-        </a:lnSpc>
-        <a:spcBef>
-          <a:spcPts val="300"/>
-        </a:spcBef>
-        <a:buFont typeface="Arial" panose="020B0604020202020204" pitchFamily="34" charset="0"/>
-        <a:buChar char="•"/>
-        <a:defRPr sz="1080" kern="1200">
-          <a:solidFill>
-            <a:schemeClr val="tx1"/>
-          </a:solidFill>
-          <a:latin typeface="+mn-lt"/>
-          <a:ea typeface="+mn-ea"/>
-          <a:cs typeface="+mn-cs"/>
-        </a:defRPr>
-      </a:lvl9pPr>
-    </p:bodyStyle>
-    <p:otherStyle>
-      <a:defPPr>
-        <a:defRPr lang="es-GT"/>
-      </a:defPPr>
-      <a:lvl1pPr marL="0" algn="l" defTabSz="548640" rtl="0" eaLnBrk="1" latinLnBrk="0" hangingPunct="1">
-        <a:defRPr sz="1080" kern="1200">
-          <a:solidFill>
-            <a:schemeClr val="tx1"/>
-          </a:solidFill>
-          <a:latin typeface="+mn-lt"/>
-          <a:ea typeface="+mn-ea"/>
-          <a:cs typeface="+mn-cs"/>
-        </a:defRPr>
-      </a:lvl1pPr>
-      <a:lvl2pPr marL="274320" algn="l" defTabSz="548640" rtl="0" eaLnBrk="1" latinLnBrk="0" hangingPunct="1">
-        <a:defRPr sz="1080" kern="1200">
-          <a:solidFill>
-            <a:schemeClr val="tx1"/>
-          </a:solidFill>
-          <a:latin typeface="+mn-lt"/>
-          <a:ea typeface="+mn-ea"/>
-          <a:cs typeface="+mn-cs"/>
-        </a:defRPr>
-      </a:lvl2pPr>
-      <a:lvl3pPr marL="548640" algn="l" defTabSz="548640" rtl="0" eaLnBrk="1" latinLnBrk="0" hangingPunct="1">
-        <a:defRPr sz="1080" kern="1200">
-          <a:solidFill>
-            <a:schemeClr val="tx1"/>
-          </a:solidFill>
-          <a:latin typeface="+mn-lt"/>
-          <a:ea typeface="+mn-ea"/>
-          <a:cs typeface="+mn-cs"/>
-        </a:defRPr>
-      </a:lvl3pPr>
-      <a:lvl4pPr marL="822960" algn="l" defTabSz="548640" rtl="0" eaLnBrk="1" latinLnBrk="0" hangingPunct="1">
-        <a:defRPr sz="1080" kern="1200">
-          <a:solidFill>
-            <a:schemeClr val="tx1"/>
-          </a:solidFill>
-          <a:latin typeface="+mn-lt"/>
-          <a:ea typeface="+mn-ea"/>
-          <a:cs typeface="+mn-cs"/>
-        </a:defRPr>
-      </a:lvl4pPr>
-      <a:lvl5pPr marL="1097280" algn="l" defTabSz="548640" rtl="0" eaLnBrk="1" latinLnBrk="0" hangingPunct="1">
-        <a:defRPr sz="1080" kern="1200">
-          <a:solidFill>
-            <a:schemeClr val="tx1"/>
-          </a:solidFill>
-          <a:latin typeface="+mn-lt"/>
-          <a:ea typeface="+mn-ea"/>
-          <a:cs typeface="+mn-cs"/>
-        </a:defRPr>
-      </a:lvl5pPr>
-      <a:lvl6pPr marL="1371600" algn="l" defTabSz="548640" rtl="0" eaLnBrk="1" latinLnBrk="0" hangingPunct="1">
-        <a:defRPr sz="1080" kern="1200">
-          <a:solidFill>
-            <a:schemeClr val="tx1"/>
-          </a:solidFill>
-          <a:latin typeface="+mn-lt"/>
-          <a:ea typeface="+mn-ea"/>
-          <a:cs typeface="+mn-cs"/>
-        </a:defRPr>
-      </a:lvl6pPr>
-      <a:lvl7pPr marL="1645920" algn="l" defTabSz="548640" rtl="0" eaLnBrk="1" latinLnBrk="0" hangingPunct="1">
-        <a:defRPr sz="1080" kern="1200">
-          <a:solidFill>
-            <a:schemeClr val="tx1"/>
-          </a:solidFill>
-          <a:latin typeface="+mn-lt"/>
-          <a:ea typeface="+mn-ea"/>
-          <a:cs typeface="+mn-cs"/>
-        </a:defRPr>
-      </a:lvl7pPr>
-      <a:lvl8pPr marL="1920240" algn="l" defTabSz="548640" rtl="0" eaLnBrk="1" latinLnBrk="0" hangingPunct="1">
-        <a:defRPr sz="1080" kern="1200">
-          <a:solidFill>
-            <a:schemeClr val="tx1"/>
-          </a:solidFill>
-          <a:latin typeface="+mn-lt"/>
-          <a:ea typeface="+mn-ea"/>
-          <a:cs typeface="+mn-cs"/>
-        </a:defRPr>
-      </a:lvl8pPr>
-      <a:lvl9pPr marL="2194560" algn="l" defTabSz="548640" rtl="0" eaLnBrk="1" latinLnBrk="0" hangingPunct="1">
+      <a:lvl9pPr marL="2194560" algn="l" defTabSz="274320" rtl="0" eaLnBrk="1" latinLnBrk="0" hangingPunct="1">
         <a:defRPr sz="1080" kern="1200">
           <a:solidFill>
             <a:schemeClr val="tx1"/>
@@ -3360,7 +6104,7 @@
           <p:cNvPr id="2" name="Título 1">
             <a:extLst>
               <a:ext uri="{FF2B5EF4-FFF2-40B4-BE49-F238E27FC236}">
-                <a16:creationId xmlns:a16="http://schemas.microsoft.com/office/drawing/2014/main" id="{0A8BEC6D-3352-CE46-9C7C-273A818C7EFB}"/>
+                <a16:creationId xmlns:a16="http://schemas.microsoft.com/office/drawing/2014/main" id="{B6926140-CB0E-C157-5FDA-E03D9B6242A9}"/>
               </a:ext>
             </a:extLst>
           </p:cNvPr>
@@ -3371,47 +6115,15 @@
             <p:ph type="ctrTitle"/>
           </p:nvPr>
         </p:nvSpPr>
-        <p:spPr>
-          <a:xfrm>
-            <a:off x="762000" y="1524000"/>
-            <a:ext cx="7620000" cy="1910080"/>
-          </a:xfrm>
-        </p:spPr>
-        <p:txBody>
-          <a:bodyPr>
-            <a:normAutofit/>
-          </a:bodyPr>
+        <p:spPr/>
+        <p:txBody>
+          <a:bodyPr/>
           <a:lstStyle/>
           <a:p>
             <a:r>
               <a:rPr lang="es-GT" sz="4000"/>
               <a:t>Formulario Contenedor (Menú MDI)</a:t>
             </a:r>
-          </a:p>
-        </p:txBody>
-      </p:sp>
-      <p:sp>
-        <p:nvSpPr>
-          <p:cNvPr id="3" name="Subtítulo 2">
-            <a:extLst>
-              <a:ext uri="{FF2B5EF4-FFF2-40B4-BE49-F238E27FC236}">
-                <a16:creationId xmlns:a16="http://schemas.microsoft.com/office/drawing/2014/main" id="{BFBABA2B-2628-7900-31C7-70CE23530180}"/>
-              </a:ext>
-            </a:extLst>
-          </p:cNvPr>
-          <p:cNvSpPr>
-            <a:spLocks noGrp="1"/>
-          </p:cNvSpPr>
-          <p:nvPr>
-            <p:ph type="subTitle" idx="1"/>
-          </p:nvPr>
-        </p:nvSpPr>
-        <p:spPr/>
-        <p:txBody>
-          <a:bodyPr/>
-          <a:lstStyle/>
-          <a:p>
-            <a:endParaRPr lang="es-GT"/>
           </a:p>
         </p:txBody>
       </p:sp>
@@ -3420,7 +6132,7 @@
           <p:cNvPr id="4" name="CuadroTexto 3">
             <a:extLst>
               <a:ext uri="{FF2B5EF4-FFF2-40B4-BE49-F238E27FC236}">
-                <a16:creationId xmlns:a16="http://schemas.microsoft.com/office/drawing/2014/main" id="{79665EB3-E359-63EF-21A1-BEB008D69105}"/>
+                <a16:creationId xmlns:a16="http://schemas.microsoft.com/office/drawing/2014/main" id="{228D089B-133C-AA8E-C377-E8631A2207B3}"/>
               </a:ext>
             </a:extLst>
           </p:cNvPr>
@@ -3429,8 +6141,8 @@
         </p:nvSpPr>
         <p:spPr>
           <a:xfrm>
-            <a:off x="762000" y="2540000"/>
-            <a:ext cx="7620000" cy="338554"/>
+            <a:off x="1016000" y="2032000"/>
+            <a:ext cx="8890000" cy="2554545"/>
           </a:xfrm>
           <a:prstGeom prst="rect">
             <a:avLst/>
@@ -3444,148 +6156,12 @@
           <a:lstStyle/>
           <a:p>
             <a:r>
-              <a:rPr lang="es-GT" sz="1600"/>
-              <a:t>Investigación aplicada al Sistema de Ventas en Java Swing</a:t>
-            </a:r>
-          </a:p>
-        </p:txBody>
-      </p:sp>
-      <p:sp>
-        <p:nvSpPr>
-          <p:cNvPr id="5" name="CuadroTexto 4">
-            <a:extLst>
-              <a:ext uri="{FF2B5EF4-FFF2-40B4-BE49-F238E27FC236}">
-                <a16:creationId xmlns:a16="http://schemas.microsoft.com/office/drawing/2014/main" id="{D6ED0BAC-C8A4-730A-6D6F-2D6B19D46A51}"/>
-              </a:ext>
-            </a:extLst>
-          </p:cNvPr>
-          <p:cNvSpPr txBox="1"/>
-          <p:nvPr/>
-        </p:nvSpPr>
-        <p:spPr>
-          <a:xfrm>
-            <a:off x="762000" y="3810000"/>
-            <a:ext cx="7620000" cy="338554"/>
-          </a:xfrm>
-          <a:prstGeom prst="rect">
-            <a:avLst/>
-          </a:prstGeom>
-          <a:noFill/>
-        </p:spPr>
-        <p:txBody>
-          <a:bodyPr vert="horz" wrap="square" rtlCol="0">
-            <a:spAutoFit/>
-          </a:bodyPr>
-          <a:lstStyle/>
-          <a:p>
-            <a:r>
-              <a:rPr lang="es-GT" sz="1600"/>
-              <a:t>Josue Zetino</a:t>
-            </a:r>
-          </a:p>
-        </p:txBody>
-      </p:sp>
-      <p:sp>
-        <p:nvSpPr>
-          <p:cNvPr id="6" name="CuadroTexto 5">
-            <a:extLst>
-              <a:ext uri="{FF2B5EF4-FFF2-40B4-BE49-F238E27FC236}">
-                <a16:creationId xmlns:a16="http://schemas.microsoft.com/office/drawing/2014/main" id="{32FD593F-29DB-96A3-5512-0031BD5FCB57}"/>
-              </a:ext>
-            </a:extLst>
-          </p:cNvPr>
-          <p:cNvSpPr txBox="1"/>
-          <p:nvPr/>
-        </p:nvSpPr>
-        <p:spPr>
-          <a:xfrm>
-            <a:off x="762000" y="4572000"/>
-            <a:ext cx="7620000" cy="338554"/>
-          </a:xfrm>
-          <a:prstGeom prst="rect">
-            <a:avLst/>
-          </a:prstGeom>
-          <a:noFill/>
-        </p:spPr>
-        <p:txBody>
-          <a:bodyPr vert="horz" wrap="square" rtlCol="0">
-            <a:spAutoFit/>
-          </a:bodyPr>
-          <a:lstStyle/>
-          <a:p>
-            <a:r>
-              <a:rPr lang="es-GT" sz="1600"/>
-              <a:t>Materia: _______________________________</a:t>
-            </a:r>
-          </a:p>
-        </p:txBody>
-      </p:sp>
-      <p:sp>
-        <p:nvSpPr>
-          <p:cNvPr id="7" name="CuadroTexto 6">
-            <a:extLst>
-              <a:ext uri="{FF2B5EF4-FFF2-40B4-BE49-F238E27FC236}">
-                <a16:creationId xmlns:a16="http://schemas.microsoft.com/office/drawing/2014/main" id="{5AA3E6F2-71E8-333C-1FA8-7AC3E8E8562B}"/>
-              </a:ext>
-            </a:extLst>
-          </p:cNvPr>
-          <p:cNvSpPr txBox="1"/>
-          <p:nvPr/>
-        </p:nvSpPr>
-        <p:spPr>
-          <a:xfrm>
-            <a:off x="762000" y="5080000"/>
-            <a:ext cx="7620000" cy="338554"/>
-          </a:xfrm>
-          <a:prstGeom prst="rect">
-            <a:avLst/>
-          </a:prstGeom>
-          <a:noFill/>
-        </p:spPr>
-        <p:txBody>
-          <a:bodyPr vert="horz" wrap="square" rtlCol="0">
-            <a:spAutoFit/>
-          </a:bodyPr>
-          <a:lstStyle/>
-          <a:p>
-            <a:r>
-              <a:rPr lang="es-GT" sz="1600"/>
-              <a:t>Fecha: _______________________________</a:t>
-            </a:r>
-          </a:p>
-        </p:txBody>
-      </p:sp>
-      <p:sp>
-        <p:nvSpPr>
-          <p:cNvPr id="8" name="CuadroTexto 7">
-            <a:extLst>
-              <a:ext uri="{FF2B5EF4-FFF2-40B4-BE49-F238E27FC236}">
-                <a16:creationId xmlns:a16="http://schemas.microsoft.com/office/drawing/2014/main" id="{434B3287-DB53-EEFB-EC04-57677AC511F1}"/>
-              </a:ext>
-            </a:extLst>
-          </p:cNvPr>
-          <p:cNvSpPr txBox="1"/>
-          <p:nvPr/>
-        </p:nvSpPr>
-        <p:spPr>
-          <a:xfrm>
-            <a:off x="762000" y="5842000"/>
-            <a:ext cx="7620000" cy="338554"/>
-          </a:xfrm>
-          <a:prstGeom prst="rect">
-            <a:avLst/>
-          </a:prstGeom>
-          <a:noFill/>
-        </p:spPr>
-        <p:txBody>
-          <a:bodyPr vert="horz" wrap="square" rtlCol="0">
-            <a:spAutoFit/>
-          </a:bodyPr>
-          <a:lstStyle/>
-          <a:p>
-            <a:r>
-              <a:rPr lang="es-GT" sz="1600"/>
-              <a:t>Repositorio: https://github.com/jzetinob/sistema-ventas</a:t>
+              <a:rPr lang="es-GT" sz="2000"/>
+              <a:t>Investigación aplicada al Sistema de Ventas en Java Swing
+Josue Zetino
+Materia: ____________________
+Fecha: ____________________
+Repositorio: https://github.com/jzetinob/sistema-ventas</a:t>
             </a:r>
           </a:p>
         </p:txBody>
@@ -3593,7 +6169,7 @@
     </p:spTree>
     <p:extLst>
       <p:ext uri="{BB962C8B-B14F-4D97-AF65-F5344CB8AC3E}">
-        <p14:creationId xmlns:p14="http://schemas.microsoft.com/office/powerpoint/2010/main" val="4227747603"/>
+        <p14:creationId xmlns:p14="http://schemas.microsoft.com/office/powerpoint/2010/main" val="2783992226"/>
       </p:ext>
     </p:extLst>
   </p:cSld>
@@ -3625,7 +6201,7 @@
           <p:cNvPr id="2" name="Título 1">
             <a:extLst>
               <a:ext uri="{FF2B5EF4-FFF2-40B4-BE49-F238E27FC236}">
-                <a16:creationId xmlns:a16="http://schemas.microsoft.com/office/drawing/2014/main" id="{95ECEA4E-E7D2-5057-8230-0BBBC21950DD}"/>
+                <a16:creationId xmlns:a16="http://schemas.microsoft.com/office/drawing/2014/main" id="{84958248-4EC4-7A82-D84B-D42FDD075D96}"/>
               </a:ext>
             </a:extLst>
           </p:cNvPr>
@@ -3636,47 +6212,15 @@
             <p:ph type="ctrTitle"/>
           </p:nvPr>
         </p:nvSpPr>
-        <p:spPr>
-          <a:xfrm>
-            <a:off x="508000" y="897890"/>
-            <a:ext cx="8128000" cy="1910080"/>
-          </a:xfrm>
-        </p:spPr>
-        <p:txBody>
-          <a:bodyPr>
-            <a:normAutofit/>
-          </a:bodyPr>
-          <a:lstStyle/>
-          <a:p>
-            <a:r>
-              <a:rPr lang="es-GT" sz="3200"/>
+        <p:spPr/>
+        <p:txBody>
+          <a:bodyPr/>
+          <a:lstStyle/>
+          <a:p>
+            <a:r>
+              <a:rPr lang="es-GT"/>
               <a:t>Ventana Maximizada</a:t>
             </a:r>
-          </a:p>
-        </p:txBody>
-      </p:sp>
-      <p:sp>
-        <p:nvSpPr>
-          <p:cNvPr id="3" name="Subtítulo 2">
-            <a:extLst>
-              <a:ext uri="{FF2B5EF4-FFF2-40B4-BE49-F238E27FC236}">
-                <a16:creationId xmlns:a16="http://schemas.microsoft.com/office/drawing/2014/main" id="{1CF84F93-C953-8395-9F8E-07AC32EB75DA}"/>
-              </a:ext>
-            </a:extLst>
-          </p:cNvPr>
-          <p:cNvSpPr>
-            <a:spLocks noGrp="1"/>
-          </p:cNvSpPr>
-          <p:nvPr>
-            <p:ph type="subTitle" idx="1"/>
-          </p:nvPr>
-        </p:nvSpPr>
-        <p:spPr/>
-        <p:txBody>
-          <a:bodyPr/>
-          <a:lstStyle/>
-          <a:p>
-            <a:endParaRPr lang="es-GT"/>
           </a:p>
         </p:txBody>
       </p:sp>
@@ -3685,7 +6229,7 @@
           <p:cNvPr id="5" name="Imagen 4">
             <a:extLst>
               <a:ext uri="{FF2B5EF4-FFF2-40B4-BE49-F238E27FC236}">
-                <a16:creationId xmlns:a16="http://schemas.microsoft.com/office/drawing/2014/main" id="{1E5DC811-BD8E-5F60-BAF0-FF47186A14A0}"/>
+                <a16:creationId xmlns:a16="http://schemas.microsoft.com/office/drawing/2014/main" id="{F5C5B971-548B-1C60-CAA8-FA31B06FD354}"/>
               </a:ext>
             </a:extLst>
           </p:cNvPr>
@@ -3708,8 +6252,8 @@
         </p:blipFill>
         <p:spPr>
           <a:xfrm>
-            <a:off x="508000" y="1270000"/>
-            <a:ext cx="7305160" cy="3835400"/>
+            <a:off x="1219200" y="1270000"/>
+            <a:ext cx="7315200" cy="3840671"/>
           </a:xfrm>
           <a:prstGeom prst="rect">
             <a:avLst/>
@@ -3719,7 +6263,7 @@
     </p:spTree>
     <p:extLst>
       <p:ext uri="{BB962C8B-B14F-4D97-AF65-F5344CB8AC3E}">
-        <p14:creationId xmlns:p14="http://schemas.microsoft.com/office/powerpoint/2010/main" val="2399119213"/>
+        <p14:creationId xmlns:p14="http://schemas.microsoft.com/office/powerpoint/2010/main" val="4027430036"/>
       </p:ext>
     </p:extLst>
   </p:cSld>
@@ -3751,7 +6295,7 @@
           <p:cNvPr id="2" name="Título 1">
             <a:extLst>
               <a:ext uri="{FF2B5EF4-FFF2-40B4-BE49-F238E27FC236}">
-                <a16:creationId xmlns:a16="http://schemas.microsoft.com/office/drawing/2014/main" id="{64B896BF-49BA-BE58-C8DC-7ED8317BDA88}"/>
+                <a16:creationId xmlns:a16="http://schemas.microsoft.com/office/drawing/2014/main" id="{8D69536A-6A95-9912-5219-02B511378B4A}"/>
               </a:ext>
             </a:extLst>
           </p:cNvPr>
@@ -3762,47 +6306,15 @@
             <p:ph type="ctrTitle"/>
           </p:nvPr>
         </p:nvSpPr>
-        <p:spPr>
-          <a:xfrm>
-            <a:off x="508000" y="897890"/>
-            <a:ext cx="8128000" cy="1910080"/>
-          </a:xfrm>
-        </p:spPr>
-        <p:txBody>
-          <a:bodyPr>
-            <a:normAutofit/>
-          </a:bodyPr>
-          <a:lstStyle/>
-          <a:p>
-            <a:r>
-              <a:rPr lang="es-GT" sz="3200"/>
+        <p:spPr/>
+        <p:txBody>
+          <a:bodyPr/>
+          <a:lstStyle/>
+          <a:p>
+            <a:r>
+              <a:rPr lang="es-GT"/>
               <a:t>Multiples Ventanas</a:t>
             </a:r>
-          </a:p>
-        </p:txBody>
-      </p:sp>
-      <p:sp>
-        <p:nvSpPr>
-          <p:cNvPr id="3" name="Subtítulo 2">
-            <a:extLst>
-              <a:ext uri="{FF2B5EF4-FFF2-40B4-BE49-F238E27FC236}">
-                <a16:creationId xmlns:a16="http://schemas.microsoft.com/office/drawing/2014/main" id="{455247BB-A2C5-4181-F1FD-85CCC2C435F0}"/>
-              </a:ext>
-            </a:extLst>
-          </p:cNvPr>
-          <p:cNvSpPr>
-            <a:spLocks noGrp="1"/>
-          </p:cNvSpPr>
-          <p:nvPr>
-            <p:ph type="subTitle" idx="1"/>
-          </p:nvPr>
-        </p:nvSpPr>
-        <p:spPr/>
-        <p:txBody>
-          <a:bodyPr/>
-          <a:lstStyle/>
-          <a:p>
-            <a:endParaRPr lang="es-GT"/>
           </a:p>
         </p:txBody>
       </p:sp>
@@ -3811,7 +6323,7 @@
           <p:cNvPr id="5" name="Imagen 4">
             <a:extLst>
               <a:ext uri="{FF2B5EF4-FFF2-40B4-BE49-F238E27FC236}">
-                <a16:creationId xmlns:a16="http://schemas.microsoft.com/office/drawing/2014/main" id="{5D7D75F1-044A-EFC9-C50E-4324454E3F28}"/>
+                <a16:creationId xmlns:a16="http://schemas.microsoft.com/office/drawing/2014/main" id="{AAD91CBD-CB30-9910-968B-06E7684E8B89}"/>
               </a:ext>
             </a:extLst>
           </p:cNvPr>
@@ -3834,8 +6346,8 @@
         </p:blipFill>
         <p:spPr>
           <a:xfrm>
-            <a:off x="508000" y="1270000"/>
-            <a:ext cx="7305184" cy="3873500"/>
+            <a:off x="1219200" y="1270000"/>
+            <a:ext cx="7315200" cy="3878811"/>
           </a:xfrm>
           <a:prstGeom prst="rect">
             <a:avLst/>
@@ -3845,7 +6357,7 @@
     </p:spTree>
     <p:extLst>
       <p:ext uri="{BB962C8B-B14F-4D97-AF65-F5344CB8AC3E}">
-        <p14:creationId xmlns:p14="http://schemas.microsoft.com/office/powerpoint/2010/main" val="3455458941"/>
+        <p14:creationId xmlns:p14="http://schemas.microsoft.com/office/powerpoint/2010/main" val="1725631217"/>
       </p:ext>
     </p:extLst>
   </p:cSld>
@@ -3877,7 +6389,7 @@
           <p:cNvPr id="2" name="Título 1">
             <a:extLst>
               <a:ext uri="{FF2B5EF4-FFF2-40B4-BE49-F238E27FC236}">
-                <a16:creationId xmlns:a16="http://schemas.microsoft.com/office/drawing/2014/main" id="{B51758B9-123C-8CEB-A19C-B357C79F1788}"/>
+                <a16:creationId xmlns:a16="http://schemas.microsoft.com/office/drawing/2014/main" id="{7F4ABEDF-D085-C562-DE79-A63F089C7FB8}"/>
               </a:ext>
             </a:extLst>
           </p:cNvPr>
@@ -3890,13 +6402,11 @@
         </p:nvSpPr>
         <p:spPr/>
         <p:txBody>
-          <a:bodyPr>
-            <a:normAutofit/>
-          </a:bodyPr>
-          <a:lstStyle/>
-          <a:p>
-            <a:r>
-              <a:rPr lang="es-GT" sz="3200"/>
+          <a:bodyPr/>
+          <a:lstStyle/>
+          <a:p>
+            <a:r>
+              <a:rPr lang="es-GT"/>
               <a:t>Ventajas de la arquitectura MDI</a:t>
             </a:r>
           </a:p>
@@ -3907,7 +6417,7 @@
           <p:cNvPr id="3" name="Subtítulo 2">
             <a:extLst>
               <a:ext uri="{FF2B5EF4-FFF2-40B4-BE49-F238E27FC236}">
-                <a16:creationId xmlns:a16="http://schemas.microsoft.com/office/drawing/2014/main" id="{77AF0656-8A5D-6EE6-7065-648979A32315}"/>
+                <a16:creationId xmlns:a16="http://schemas.microsoft.com/office/drawing/2014/main" id="{02A4AC69-8028-EB76-3480-8E01E9EDFD5A}"/>
               </a:ext>
             </a:extLst>
           </p:cNvPr>
@@ -3920,46 +6430,16 @@
         </p:nvSpPr>
         <p:spPr/>
         <p:txBody>
-          <a:bodyPr/>
-          <a:lstStyle/>
-          <a:p>
-            <a:endParaRPr lang="es-GT"/>
-          </a:p>
-        </p:txBody>
-      </p:sp>
-      <p:sp>
-        <p:nvSpPr>
-          <p:cNvPr id="4" name="CuadroTexto 3">
-            <a:extLst>
-              <a:ext uri="{FF2B5EF4-FFF2-40B4-BE49-F238E27FC236}">
-                <a16:creationId xmlns:a16="http://schemas.microsoft.com/office/drawing/2014/main" id="{C061197D-CF0E-DC0F-0CC2-98D7108F3672}"/>
-              </a:ext>
-            </a:extLst>
-          </p:cNvPr>
-          <p:cNvSpPr txBox="1"/>
-          <p:nvPr/>
-        </p:nvSpPr>
-        <p:spPr>
-          <a:xfrm>
-            <a:off x="508000" y="1143000"/>
-            <a:ext cx="8128000" cy="1569660"/>
-          </a:xfrm>
-          <a:prstGeom prst="rect">
-            <a:avLst/>
-          </a:prstGeom>
-          <a:noFill/>
-        </p:spPr>
-        <p:txBody>
-          <a:bodyPr vert="horz" wrap="square" rtlCol="0">
-            <a:spAutoFit/>
+          <a:bodyPr>
+            <a:noAutofit/>
           </a:bodyPr>
           <a:lstStyle/>
           <a:p>
             <a:r>
-              <a:rPr lang="es-GT" sz="1600"/>
+              <a:rPr lang="es-GT" sz="1800"/>
               <a:t>- Un solo menú central que aplica a todas las ventanas hijas.
 - Orden visual: todo el trabajo ocurre dentro de una sola ventana.
-- Gestión integrada: cascada, mosaico, minimizar/restaurar todo.
+- Gestión integrada de ventanas: cascada, mosaico, minimizar/restaurar todo.
 - Ventanas ligeras: los JInternalFrame no crean ventanas nativas del SO.
 - Estado compartido entre formularios (ej. el escritorio común).
 - Concentración en la tarea sin cambiar de ventana del sistema.</a:t>
@@ -3970,7 +6450,7 @@
     </p:spTree>
     <p:extLst>
       <p:ext uri="{BB962C8B-B14F-4D97-AF65-F5344CB8AC3E}">
-        <p14:creationId xmlns:p14="http://schemas.microsoft.com/office/powerpoint/2010/main" val="86895905"/>
+        <p14:creationId xmlns:p14="http://schemas.microsoft.com/office/powerpoint/2010/main" val="2749823560"/>
       </p:ext>
     </p:extLst>
   </p:cSld>
@@ -4002,7 +6482,7 @@
           <p:cNvPr id="2" name="Título 1">
             <a:extLst>
               <a:ext uri="{FF2B5EF4-FFF2-40B4-BE49-F238E27FC236}">
-                <a16:creationId xmlns:a16="http://schemas.microsoft.com/office/drawing/2014/main" id="{AD50DA31-DFE4-E6D0-CC5E-5EFCF69567CF}"/>
+                <a16:creationId xmlns:a16="http://schemas.microsoft.com/office/drawing/2014/main" id="{E3AF4932-3E35-0E10-5660-26669E5EB14E}"/>
               </a:ext>
             </a:extLst>
           </p:cNvPr>
@@ -4015,13 +6495,11 @@
         </p:nvSpPr>
         <p:spPr/>
         <p:txBody>
-          <a:bodyPr>
-            <a:normAutofit/>
-          </a:bodyPr>
-          <a:lstStyle/>
-          <a:p>
-            <a:r>
-              <a:rPr lang="es-GT" sz="3200"/>
+          <a:bodyPr/>
+          <a:lstStyle/>
+          <a:p>
+            <a:r>
+              <a:rPr lang="es-GT"/>
               <a:t>Dificultades encontradas</a:t>
             </a:r>
           </a:p>
@@ -4032,7 +6510,7 @@
           <p:cNvPr id="3" name="Subtítulo 2">
             <a:extLst>
               <a:ext uri="{FF2B5EF4-FFF2-40B4-BE49-F238E27FC236}">
-                <a16:creationId xmlns:a16="http://schemas.microsoft.com/office/drawing/2014/main" id="{604FB2EC-D238-E05C-7013-0782EC52E63F}"/>
+                <a16:creationId xmlns:a16="http://schemas.microsoft.com/office/drawing/2014/main" id="{FFC8864A-EEF2-3D8F-5603-1C1132440070}"/>
               </a:ext>
             </a:extLst>
           </p:cNvPr>
@@ -4045,43 +6523,13 @@
         </p:nvSpPr>
         <p:spPr/>
         <p:txBody>
-          <a:bodyPr/>
-          <a:lstStyle/>
-          <a:p>
-            <a:endParaRPr lang="es-GT"/>
-          </a:p>
-        </p:txBody>
-      </p:sp>
-      <p:sp>
-        <p:nvSpPr>
-          <p:cNvPr id="4" name="CuadroTexto 3">
-            <a:extLst>
-              <a:ext uri="{FF2B5EF4-FFF2-40B4-BE49-F238E27FC236}">
-                <a16:creationId xmlns:a16="http://schemas.microsoft.com/office/drawing/2014/main" id="{0133BB49-21B7-FB08-865C-796BC825C743}"/>
-              </a:ext>
-            </a:extLst>
-          </p:cNvPr>
-          <p:cNvSpPr txBox="1"/>
-          <p:nvPr/>
-        </p:nvSpPr>
-        <p:spPr>
-          <a:xfrm>
-            <a:off x="508000" y="1143000"/>
-            <a:ext cx="8128000" cy="2062103"/>
-          </a:xfrm>
-          <a:prstGeom prst="rect">
-            <a:avLst/>
-          </a:prstGeom>
-          <a:noFill/>
-        </p:spPr>
-        <p:txBody>
-          <a:bodyPr vert="horz" wrap="square" rtlCol="0">
-            <a:spAutoFit/>
+          <a:bodyPr>
+            <a:noAutofit/>
           </a:bodyPr>
           <a:lstStyle/>
           <a:p>
             <a:r>
-              <a:rPr lang="es-GT" sz="1600"/>
+              <a:rPr lang="es-GT" sz="1800"/>
               <a:t>- Los JInternalFrame no tienen setLocationRelativeTo(null): el centrado se hace manualmente contra el JDesktopPane.
 - Los formularios hijos dejaron de poder abrirse solos (sin escritorio), por lo que se eliminaron sus main().
 - El diálogo de vista previa de impresión recibía un JFrame como padre; se cambió para aceptar cualquier componente y resolver la ventana contenedora (getWindowAncestor).
@@ -4093,7 +6541,7 @@
     </p:spTree>
     <p:extLst>
       <p:ext uri="{BB962C8B-B14F-4D97-AF65-F5344CB8AC3E}">
-        <p14:creationId xmlns:p14="http://schemas.microsoft.com/office/powerpoint/2010/main" val="2398086166"/>
+        <p14:creationId xmlns:p14="http://schemas.microsoft.com/office/powerpoint/2010/main" val="146220243"/>
       </p:ext>
     </p:extLst>
   </p:cSld>
@@ -4125,7 +6573,7 @@
           <p:cNvPr id="2" name="Título 1">
             <a:extLst>
               <a:ext uri="{FF2B5EF4-FFF2-40B4-BE49-F238E27FC236}">
-                <a16:creationId xmlns:a16="http://schemas.microsoft.com/office/drawing/2014/main" id="{E8DE5C78-DE9A-98F4-5395-B7F19DACD502}"/>
+                <a16:creationId xmlns:a16="http://schemas.microsoft.com/office/drawing/2014/main" id="{B47F21F9-D815-65F2-E676-B1F86D6E7E82}"/>
               </a:ext>
             </a:extLst>
           </p:cNvPr>
@@ -4138,13 +6586,11 @@
         </p:nvSpPr>
         <p:spPr/>
         <p:txBody>
-          <a:bodyPr>
-            <a:normAutofit/>
-          </a:bodyPr>
-          <a:lstStyle/>
-          <a:p>
-            <a:r>
-              <a:rPr lang="es-GT" sz="3200"/>
+          <a:bodyPr/>
+          <a:lstStyle/>
+          <a:p>
+            <a:r>
+              <a:rPr lang="es-GT"/>
               <a:t>Bibliografía</a:t>
             </a:r>
           </a:p>
@@ -4155,7 +6601,7 @@
           <p:cNvPr id="3" name="Subtítulo 2">
             <a:extLst>
               <a:ext uri="{FF2B5EF4-FFF2-40B4-BE49-F238E27FC236}">
-                <a16:creationId xmlns:a16="http://schemas.microsoft.com/office/drawing/2014/main" id="{094E3632-3C73-9D72-B61F-D1839F05FC3A}"/>
+                <a16:creationId xmlns:a16="http://schemas.microsoft.com/office/drawing/2014/main" id="{34D2AE6A-8043-59E2-4D1F-533009A60584}"/>
               </a:ext>
             </a:extLst>
           </p:cNvPr>
@@ -4168,43 +6614,13 @@
         </p:nvSpPr>
         <p:spPr/>
         <p:txBody>
-          <a:bodyPr/>
-          <a:lstStyle/>
-          <a:p>
-            <a:endParaRPr lang="es-GT"/>
-          </a:p>
-        </p:txBody>
-      </p:sp>
-      <p:sp>
-        <p:nvSpPr>
-          <p:cNvPr id="4" name="CuadroTexto 3">
-            <a:extLst>
-              <a:ext uri="{FF2B5EF4-FFF2-40B4-BE49-F238E27FC236}">
-                <a16:creationId xmlns:a16="http://schemas.microsoft.com/office/drawing/2014/main" id="{ADB986C6-BFB9-C79C-42CA-C7A3E4CAD3D3}"/>
-              </a:ext>
-            </a:extLst>
-          </p:cNvPr>
-          <p:cNvSpPr txBox="1"/>
-          <p:nvPr/>
-        </p:nvSpPr>
-        <p:spPr>
-          <a:xfrm>
-            <a:off x="508000" y="1143000"/>
-            <a:ext cx="8128000" cy="2062103"/>
-          </a:xfrm>
-          <a:prstGeom prst="rect">
-            <a:avLst/>
-          </a:prstGeom>
-          <a:noFill/>
-        </p:spPr>
-        <p:txBody>
-          <a:bodyPr vert="horz" wrap="square" rtlCol="0">
-            <a:spAutoFit/>
+          <a:bodyPr>
+            <a:noAutofit/>
           </a:bodyPr>
           <a:lstStyle/>
           <a:p>
             <a:r>
-              <a:rPr lang="es-GT" sz="1600"/>
+              <a:rPr lang="es-GT" sz="1800"/>
               <a:t>- Oracle. How to Use Internal Frames (Java Swing Tutorial)
   https://docs.oracle.com/javase/tutorial/uiswing/components/internalframe.html
 - Oracle. How to Use Desktop Panes
@@ -4220,7 +6636,7 @@
     </p:spTree>
     <p:extLst>
       <p:ext uri="{BB962C8B-B14F-4D97-AF65-F5344CB8AC3E}">
-        <p14:creationId xmlns:p14="http://schemas.microsoft.com/office/powerpoint/2010/main" val="696411955"/>
+        <p14:creationId xmlns:p14="http://schemas.microsoft.com/office/powerpoint/2010/main" val="4105112837"/>
       </p:ext>
     </p:extLst>
   </p:cSld>
@@ -4252,7 +6668,7 @@
           <p:cNvPr id="2" name="Título 1">
             <a:extLst>
               <a:ext uri="{FF2B5EF4-FFF2-40B4-BE49-F238E27FC236}">
-                <a16:creationId xmlns:a16="http://schemas.microsoft.com/office/drawing/2014/main" id="{AB53AF41-C4AE-C18D-71E5-A2BA2FE992CA}"/>
+                <a16:creationId xmlns:a16="http://schemas.microsoft.com/office/drawing/2014/main" id="{3E0B3DF5-47A4-A9AB-A40C-E1602D425EF4}"/>
               </a:ext>
             </a:extLst>
           </p:cNvPr>
@@ -4265,13 +6681,11 @@
         </p:nvSpPr>
         <p:spPr/>
         <p:txBody>
-          <a:bodyPr>
-            <a:normAutofit/>
-          </a:bodyPr>
-          <a:lstStyle/>
-          <a:p>
-            <a:r>
-              <a:rPr lang="es-GT" sz="3200"/>
+          <a:bodyPr/>
+          <a:lstStyle/>
+          <a:p>
+            <a:r>
+              <a:rPr lang="es-GT"/>
               <a:t>¿Qué es un formulario contenedor (MDI)?</a:t>
             </a:r>
           </a:p>
@@ -4282,7 +6696,7 @@
           <p:cNvPr id="3" name="Subtítulo 2">
             <a:extLst>
               <a:ext uri="{FF2B5EF4-FFF2-40B4-BE49-F238E27FC236}">
-                <a16:creationId xmlns:a16="http://schemas.microsoft.com/office/drawing/2014/main" id="{D0961980-CCAC-DDBC-FF6E-25CF964EFC76}"/>
+                <a16:creationId xmlns:a16="http://schemas.microsoft.com/office/drawing/2014/main" id="{CAA5C7F1-9074-0B63-40E2-468135020B8F}"/>
               </a:ext>
             </a:extLst>
           </p:cNvPr>
@@ -4295,50 +6709,20 @@
         </p:nvSpPr>
         <p:spPr/>
         <p:txBody>
-          <a:bodyPr/>
-          <a:lstStyle/>
-          <a:p>
-            <a:endParaRPr lang="es-GT"/>
-          </a:p>
-        </p:txBody>
-      </p:sp>
-      <p:sp>
-        <p:nvSpPr>
-          <p:cNvPr id="4" name="CuadroTexto 3">
-            <a:extLst>
-              <a:ext uri="{FF2B5EF4-FFF2-40B4-BE49-F238E27FC236}">
-                <a16:creationId xmlns:a16="http://schemas.microsoft.com/office/drawing/2014/main" id="{16291823-E384-7BE0-5ECE-4BA9C8086401}"/>
-              </a:ext>
-            </a:extLst>
-          </p:cNvPr>
-          <p:cNvSpPr txBox="1"/>
-          <p:nvPr/>
-        </p:nvSpPr>
-        <p:spPr>
-          <a:xfrm>
-            <a:off x="508000" y="1143000"/>
-            <a:ext cx="8128000" cy="3293209"/>
-          </a:xfrm>
-          <a:prstGeom prst="rect">
-            <a:avLst/>
-          </a:prstGeom>
-          <a:noFill/>
-        </p:spPr>
-        <p:txBody>
-          <a:bodyPr vert="horz" wrap="square" rtlCol="0">
-            <a:spAutoFit/>
+          <a:bodyPr>
+            <a:noAutofit/>
           </a:bodyPr>
           <a:lstStyle/>
           <a:p>
             <a:r>
-              <a:rPr lang="es-GT" sz="1600"/>
+              <a:rPr lang="es-GT" sz="1800"/>
               <a:t>MDI (Multiple Document Interface) es una arquitectura donde una ventana principal (contenedor) aloja dentro de sí varias ventanas hijas, en lugar de abrirlas como ventanas independientes del sistema operativo.
-- Las hijas se mueven, minimizan, maximizan y cierran dentro del contenedor, sin salir de él.
+- Las ventanas hijas se mueven, minimizan, maximizan y cierran dentro del contenedor, sin salir de él.
 - Una sola barra de menú controla todas las ventanas abiertas.
 - Modelo clásico: Excel, NetBeans, Eclipse, Office antiguo.
 En Java Swing se arma con 3 piezas:
 - JFrame (padre) con su JMenuBar
-- JDesktopPane (el escritorio)
+- JDesktopPane (el escritorio donde viven las hijas)
 - JInternalFrame (cada ventana hija)</a:t>
             </a:r>
           </a:p>
@@ -4347,7 +6731,7 @@
     </p:spTree>
     <p:extLst>
       <p:ext uri="{BB962C8B-B14F-4D97-AF65-F5344CB8AC3E}">
-        <p14:creationId xmlns:p14="http://schemas.microsoft.com/office/powerpoint/2010/main" val="1647542465"/>
+        <p14:creationId xmlns:p14="http://schemas.microsoft.com/office/powerpoint/2010/main" val="175112438"/>
       </p:ext>
     </p:extLst>
   </p:cSld>
@@ -4379,7 +6763,7 @@
           <p:cNvPr id="2" name="Título 1">
             <a:extLst>
               <a:ext uri="{FF2B5EF4-FFF2-40B4-BE49-F238E27FC236}">
-                <a16:creationId xmlns:a16="http://schemas.microsoft.com/office/drawing/2014/main" id="{2ECA7815-F449-B2AB-58BA-2CEB8E561D55}"/>
+                <a16:creationId xmlns:a16="http://schemas.microsoft.com/office/drawing/2014/main" id="{7963E467-796F-F53F-EE02-BDDE8BAD11B4}"/>
               </a:ext>
             </a:extLst>
           </p:cNvPr>
@@ -4392,13 +6776,11 @@
         </p:nvSpPr>
         <p:spPr/>
         <p:txBody>
-          <a:bodyPr>
-            <a:normAutofit/>
-          </a:bodyPr>
-          <a:lstStyle/>
-          <a:p>
-            <a:r>
-              <a:rPr lang="es-GT" sz="3200"/>
+          <a:bodyPr/>
+          <a:lstStyle/>
+          <a:p>
+            <a:r>
+              <a:rPr lang="es-GT"/>
               <a:t>¿Qué es un JDesktopPane?</a:t>
             </a:r>
           </a:p>
@@ -4409,7 +6791,7 @@
           <p:cNvPr id="3" name="Subtítulo 2">
             <a:extLst>
               <a:ext uri="{FF2B5EF4-FFF2-40B4-BE49-F238E27FC236}">
-                <a16:creationId xmlns:a16="http://schemas.microsoft.com/office/drawing/2014/main" id="{BBEDEC41-4303-4F16-AB14-A2D79FB50EEB}"/>
+                <a16:creationId xmlns:a16="http://schemas.microsoft.com/office/drawing/2014/main" id="{853DBFF6-E899-1012-5783-4F8E3A3E6AD5}"/>
               </a:ext>
             </a:extLst>
           </p:cNvPr>
@@ -4422,49 +6804,19 @@
         </p:nvSpPr>
         <p:spPr/>
         <p:txBody>
-          <a:bodyPr/>
-          <a:lstStyle/>
-          <a:p>
-            <a:endParaRPr lang="es-GT"/>
-          </a:p>
-        </p:txBody>
-      </p:sp>
-      <p:sp>
-        <p:nvSpPr>
-          <p:cNvPr id="4" name="CuadroTexto 3">
-            <a:extLst>
-              <a:ext uri="{FF2B5EF4-FFF2-40B4-BE49-F238E27FC236}">
-                <a16:creationId xmlns:a16="http://schemas.microsoft.com/office/drawing/2014/main" id="{ACBD4D05-8DED-82C4-5180-E14FFFE21E5D}"/>
-              </a:ext>
-            </a:extLst>
-          </p:cNvPr>
-          <p:cNvSpPr txBox="1"/>
-          <p:nvPr/>
-        </p:nvSpPr>
-        <p:spPr>
-          <a:xfrm>
-            <a:off x="508000" y="1143000"/>
-            <a:ext cx="8128000" cy="2800767"/>
-          </a:xfrm>
-          <a:prstGeom prst="rect">
-            <a:avLst/>
-          </a:prstGeom>
-          <a:noFill/>
-        </p:spPr>
-        <p:txBody>
-          <a:bodyPr vert="horz" wrap="square" rtlCol="0">
-            <a:spAutoFit/>
+          <a:bodyPr>
+            <a:noAutofit/>
           </a:bodyPr>
           <a:lstStyle/>
           <a:p>
             <a:r>
-              <a:rPr lang="es-GT" sz="1600"/>
+              <a:rPr lang="es-GT" sz="1800"/>
               <a:t>Contenedor especializado que funciona como el "escritorio" donde viven las ventanas internas. Gestiona capas y delega el maximizar/minimizar al DesktopManager.
 En el proyecto (FrmPrincipal.java), el desktop es el contenido de la ventana principal:
-jDesktopPane = new javax.swing.JDesktopPane();
-jDesktopPane.setBackground(new java.awt.Color(204, 204, 204));
-...
-layout.addComponent(jDesktopPane, DEFAULT_SIZE, 900, Short.MAX_VALUE);
+    jDesktopPane = new javax.swing.JDesktopPane();
+    jDesktopPane.setBackground(new java.awt.Color(204, 204, 204));
+    ...
+    layout.addComponent(jDesktopPane, DEFAULT_SIZE, 900, Short.MAX_VALUE);
 Las ventanas abiertas se consultan con jDesktopPane.getAllFrames().</a:t>
             </a:r>
           </a:p>
@@ -4473,7 +6825,7 @@
     </p:spTree>
     <p:extLst>
       <p:ext uri="{BB962C8B-B14F-4D97-AF65-F5344CB8AC3E}">
-        <p14:creationId xmlns:p14="http://schemas.microsoft.com/office/powerpoint/2010/main" val="1471379051"/>
+        <p14:creationId xmlns:p14="http://schemas.microsoft.com/office/powerpoint/2010/main" val="2018036072"/>
       </p:ext>
     </p:extLst>
   </p:cSld>
@@ -4505,7 +6857,7 @@
           <p:cNvPr id="2" name="Título 1">
             <a:extLst>
               <a:ext uri="{FF2B5EF4-FFF2-40B4-BE49-F238E27FC236}">
-                <a16:creationId xmlns:a16="http://schemas.microsoft.com/office/drawing/2014/main" id="{C91B4350-B80B-56CA-02F8-577A02300CEF}"/>
+                <a16:creationId xmlns:a16="http://schemas.microsoft.com/office/drawing/2014/main" id="{7E8E47E0-FD45-01E4-BD98-CF946E5A94EC}"/>
               </a:ext>
             </a:extLst>
           </p:cNvPr>
@@ -4518,13 +6870,11 @@
         </p:nvSpPr>
         <p:spPr/>
         <p:txBody>
-          <a:bodyPr>
-            <a:normAutofit/>
-          </a:bodyPr>
-          <a:lstStyle/>
-          <a:p>
-            <a:r>
-              <a:rPr lang="es-GT" sz="3200"/>
+          <a:bodyPr/>
+          <a:lstStyle/>
+          <a:p>
+            <a:r>
+              <a:rPr lang="es-GT"/>
               <a:t>¿Qué es un JInternalFrame?</a:t>
             </a:r>
           </a:p>
@@ -4535,7 +6885,7 @@
           <p:cNvPr id="3" name="Subtítulo 2">
             <a:extLst>
               <a:ext uri="{FF2B5EF4-FFF2-40B4-BE49-F238E27FC236}">
-                <a16:creationId xmlns:a16="http://schemas.microsoft.com/office/drawing/2014/main" id="{BF255635-3730-1A83-C8E7-1A23C489FCA4}"/>
+                <a16:creationId xmlns:a16="http://schemas.microsoft.com/office/drawing/2014/main" id="{FDAD4664-693D-26DF-B1F5-B79B9108C3CE}"/>
               </a:ext>
             </a:extLst>
           </p:cNvPr>
@@ -4548,49 +6898,19 @@
         </p:nvSpPr>
         <p:spPr/>
         <p:txBody>
-          <a:bodyPr/>
-          <a:lstStyle/>
-          <a:p>
-            <a:endParaRPr lang="es-GT"/>
-          </a:p>
-        </p:txBody>
-      </p:sp>
-      <p:sp>
-        <p:nvSpPr>
-          <p:cNvPr id="4" name="CuadroTexto 3">
-            <a:extLst>
-              <a:ext uri="{FF2B5EF4-FFF2-40B4-BE49-F238E27FC236}">
-                <a16:creationId xmlns:a16="http://schemas.microsoft.com/office/drawing/2014/main" id="{9B0A5CBF-F57B-E187-0CB1-C34D81026852}"/>
-              </a:ext>
-            </a:extLst>
-          </p:cNvPr>
-          <p:cNvSpPr txBox="1"/>
-          <p:nvPr/>
-        </p:nvSpPr>
-        <p:spPr>
-          <a:xfrm>
-            <a:off x="508000" y="1143000"/>
-            <a:ext cx="8128000" cy="3046988"/>
-          </a:xfrm>
-          <a:prstGeom prst="rect">
-            <a:avLst/>
-          </a:prstGeom>
-          <a:noFill/>
-        </p:spPr>
-        <p:txBody>
-          <a:bodyPr vert="horz" wrap="square" rtlCol="0">
-            <a:spAutoFit/>
+          <a:bodyPr>
+            <a:noAutofit/>
           </a:bodyPr>
           <a:lstStyle/>
           <a:p>
             <a:r>
-              <a:rPr lang="es-GT" sz="1600"/>
+              <a:rPr lang="es-GT" sz="1800"/>
               <a:t>Equivalente interno de un JFrame: tiene barra de título y botones, pero NO es una ventana del sistema operativo; solo existe dentro del JDesktopPane.
 Propiedades típicas:
-- setClosable(true)  -&gt; se puede cerrar
-- setIconifiable(true) -&gt; se puede minimizar (queda como icono)
-- setMaximizable(true) -&gt; se puede maximizar
-- setResizable(true)  -&gt; se puede redimensionar
+- setClosable(true)      -&gt; se puede cerrar
+- setIconifiable(true)    -&gt; se puede minimizar (queda como icono)
+- setMaximizable(true)    -&gt; se puede maximizar
+- setResizable(true)      -&gt; se puede redimensionar
 En el proyecto, todos los formularios pasaron de JFrame a JInternalFrame (FrmFactura, FrmProductos, FrmClientes, FrmListaFacturas, FrmDetalleFactura). No pueden mostrarse solos, por eso se quitaron sus main().</a:t>
             </a:r>
           </a:p>
@@ -4599,7 +6919,7 @@
     </p:spTree>
     <p:extLst>
       <p:ext uri="{BB962C8B-B14F-4D97-AF65-F5344CB8AC3E}">
-        <p14:creationId xmlns:p14="http://schemas.microsoft.com/office/powerpoint/2010/main" val="4026537963"/>
+        <p14:creationId xmlns:p14="http://schemas.microsoft.com/office/powerpoint/2010/main" val="1358696000"/>
       </p:ext>
     </p:extLst>
   </p:cSld>
@@ -4631,7 +6951,7 @@
           <p:cNvPr id="2" name="Título 1">
             <a:extLst>
               <a:ext uri="{FF2B5EF4-FFF2-40B4-BE49-F238E27FC236}">
-                <a16:creationId xmlns:a16="http://schemas.microsoft.com/office/drawing/2014/main" id="{08705E8E-58C4-4008-EC88-1DE1E65991F4}"/>
+                <a16:creationId xmlns:a16="http://schemas.microsoft.com/office/drawing/2014/main" id="{52F613E2-364E-9A11-FC83-E37DC76B0F9B}"/>
               </a:ext>
             </a:extLst>
           </p:cNvPr>
@@ -4644,13 +6964,11 @@
         </p:nvSpPr>
         <p:spPr/>
         <p:txBody>
-          <a:bodyPr>
-            <a:normAutofit/>
-          </a:bodyPr>
-          <a:lstStyle/>
-          <a:p>
-            <a:r>
-              <a:rPr lang="es-GT" sz="3200"/>
+          <a:bodyPr/>
+          <a:lstStyle/>
+          <a:p>
+            <a:r>
+              <a:rPr lang="es-GT"/>
               <a:t>¿Cómo funciona un JMenuBar?</a:t>
             </a:r>
           </a:p>
@@ -4661,7 +6979,7 @@
           <p:cNvPr id="3" name="Subtítulo 2">
             <a:extLst>
               <a:ext uri="{FF2B5EF4-FFF2-40B4-BE49-F238E27FC236}">
-                <a16:creationId xmlns:a16="http://schemas.microsoft.com/office/drawing/2014/main" id="{5B9131A1-ECDB-E3FE-6238-FAA4F76348CA}"/>
+                <a16:creationId xmlns:a16="http://schemas.microsoft.com/office/drawing/2014/main" id="{0952B93C-8A73-FC2A-75E7-2CDA557C9AB6}"/>
               </a:ext>
             </a:extLst>
           </p:cNvPr>
@@ -4674,50 +6992,20 @@
         </p:nvSpPr>
         <p:spPr/>
         <p:txBody>
-          <a:bodyPr/>
-          <a:lstStyle/>
-          <a:p>
-            <a:endParaRPr lang="es-GT"/>
-          </a:p>
-        </p:txBody>
-      </p:sp>
-      <p:sp>
-        <p:nvSpPr>
-          <p:cNvPr id="4" name="CuadroTexto 3">
-            <a:extLst>
-              <a:ext uri="{FF2B5EF4-FFF2-40B4-BE49-F238E27FC236}">
-                <a16:creationId xmlns:a16="http://schemas.microsoft.com/office/drawing/2014/main" id="{A87EF9D9-2E67-307C-C708-4F13D15ADAB1}"/>
-              </a:ext>
-            </a:extLst>
-          </p:cNvPr>
-          <p:cNvSpPr txBox="1"/>
-          <p:nvPr/>
-        </p:nvSpPr>
-        <p:spPr>
-          <a:xfrm>
-            <a:off x="508000" y="1143000"/>
-            <a:ext cx="8128000" cy="2800767"/>
-          </a:xfrm>
-          <a:prstGeom prst="rect">
-            <a:avLst/>
-          </a:prstGeom>
-          <a:noFill/>
-        </p:spPr>
-        <p:txBody>
-          <a:bodyPr vert="horz" wrap="square" rtlCol="0">
-            <a:spAutoFit/>
+          <a:bodyPr>
+            <a:noAutofit/>
           </a:bodyPr>
           <a:lstStyle/>
           <a:p>
             <a:r>
-              <a:rPr lang="es-GT" sz="1600"/>
+              <a:rPr lang="es-GT" sz="1800"/>
               <a:t>Barra de menús del contenedor (setJMenuBar). Contiene JMenu (Archivo, Catálogos, Ventana...) y cada menú tiene JMenuItem que lanzan ActionEvent.
 En MDI la barra pertenece al contenedor y controla todas las ventanas hijas. En el proyecto se agregó el menú Ventana:
-miCascada.setText("Cascada");
-miCascada.addActionListener(... -&gt; miCascadaActionPerformed)
-mnVentana.add(miCascada);
-// Mosaico, Minimizar todo, Restaurar todo
-setJMenuBar(jMenuBar1);</a:t>
+    miCascada.setText("Cascada");
+    miCascada.addActionListener(... -&gt; miCascadaActionPerformed);
+    mnVentana.add(miCascada);
+    // Mosaico, Minimizar todo, Restaurar todo
+    setJMenuBar(jMenuBar1);</a:t>
             </a:r>
           </a:p>
         </p:txBody>
@@ -4725,7 +7013,7 @@
     </p:spTree>
     <p:extLst>
       <p:ext uri="{BB962C8B-B14F-4D97-AF65-F5344CB8AC3E}">
-        <p14:creationId xmlns:p14="http://schemas.microsoft.com/office/powerpoint/2010/main" val="3138983948"/>
+        <p14:creationId xmlns:p14="http://schemas.microsoft.com/office/powerpoint/2010/main" val="2437682640"/>
       </p:ext>
     </p:extLst>
   </p:cSld>
@@ -4757,7 +7045,7 @@
           <p:cNvPr id="2" name="Título 1">
             <a:extLst>
               <a:ext uri="{FF2B5EF4-FFF2-40B4-BE49-F238E27FC236}">
-                <a16:creationId xmlns:a16="http://schemas.microsoft.com/office/drawing/2014/main" id="{074ABE38-473F-FA67-8098-447FD23A52E6}"/>
+                <a16:creationId xmlns:a16="http://schemas.microsoft.com/office/drawing/2014/main" id="{212B5994-865B-3B22-69BD-916150266777}"/>
               </a:ext>
             </a:extLst>
           </p:cNvPr>
@@ -4770,13 +7058,11 @@
         </p:nvSpPr>
         <p:spPr/>
         <p:txBody>
-          <a:bodyPr>
-            <a:normAutofit/>
-          </a:bodyPr>
-          <a:lstStyle/>
-          <a:p>
-            <a:r>
-              <a:rPr lang="es-GT" sz="3200"/>
+          <a:bodyPr/>
+          <a:lstStyle/>
+          <a:p>
+            <a:r>
+              <a:rPr lang="es-GT"/>
               <a:t>¿Cómo abrir formularios hijos desde un menú?</a:t>
             </a:r>
           </a:p>
@@ -4787,7 +7073,7 @@
           <p:cNvPr id="3" name="Subtítulo 2">
             <a:extLst>
               <a:ext uri="{FF2B5EF4-FFF2-40B4-BE49-F238E27FC236}">
-                <a16:creationId xmlns:a16="http://schemas.microsoft.com/office/drawing/2014/main" id="{2CBF7D26-E76C-1F91-944E-E7C4184D7747}"/>
+                <a16:creationId xmlns:a16="http://schemas.microsoft.com/office/drawing/2014/main" id="{A895EEB8-CAD2-473A-D189-191FA74F146A}"/>
               </a:ext>
             </a:extLst>
           </p:cNvPr>
@@ -4800,53 +7086,23 @@
         </p:nvSpPr>
         <p:spPr/>
         <p:txBody>
-          <a:bodyPr/>
-          <a:lstStyle/>
-          <a:p>
-            <a:endParaRPr lang="es-GT"/>
-          </a:p>
-        </p:txBody>
-      </p:sp>
-      <p:sp>
-        <p:nvSpPr>
-          <p:cNvPr id="4" name="CuadroTexto 3">
-            <a:extLst>
-              <a:ext uri="{FF2B5EF4-FFF2-40B4-BE49-F238E27FC236}">
-                <a16:creationId xmlns:a16="http://schemas.microsoft.com/office/drawing/2014/main" id="{75F8C168-B058-130C-D5FE-D4DC156DE921}"/>
-              </a:ext>
-            </a:extLst>
-          </p:cNvPr>
-          <p:cNvSpPr txBox="1"/>
-          <p:nvPr/>
-        </p:nvSpPr>
-        <p:spPr>
-          <a:xfrm>
-            <a:off x="508000" y="1143000"/>
-            <a:ext cx="8128000" cy="3785652"/>
-          </a:xfrm>
-          <a:prstGeom prst="rect">
-            <a:avLst/>
-          </a:prstGeom>
-          <a:noFill/>
-        </p:spPr>
-        <p:txBody>
-          <a:bodyPr vert="horz" wrap="square" rtlCol="0">
-            <a:spAutoFit/>
+          <a:bodyPr>
+            <a:noAutofit/>
           </a:bodyPr>
           <a:lstStyle/>
           <a:p>
             <a:r>
-              <a:rPr lang="es-GT" sz="1600"/>
+              <a:rPr lang="es-GT" sz="1800"/>
               <a:t>Patrón: el ActionListener del JMenuItem agrega el JInternalFrame al JDesktopPane, lo hace visible y lo selecciona. Método central en FrmPrincipal:
-private void abrirFormulario(JInternalFrame frame) {
-    if (!frame.isVisible()) {
-        jDesktopPane.add(frame);
-        frame.setVisible(true);
-        frame.setLocation(centro del escritorio);
+    private void abrirFormulario(JInternalFrame frame) {
+        if (!frame.isVisible()) {
+            jDesktopPane.add(frame);
+            frame.setVisible(true);
+            frame.setLocation(centro del escritorio);
+        }
+        frame.setSelected(true);
+        frame.toFront();
     }
-    frame.setSelected(true);
-    frame.toFront();
-}
 El menú Ventana organiza las ventanas con jDesktopPane.getAllFrames(): cascada (diagonal), mosaico (grilla), minimizar/restaurar todo.</a:t>
             </a:r>
           </a:p>
@@ -4855,7 +7111,7 @@
     </p:spTree>
     <p:extLst>
       <p:ext uri="{BB962C8B-B14F-4D97-AF65-F5344CB8AC3E}">
-        <p14:creationId xmlns:p14="http://schemas.microsoft.com/office/powerpoint/2010/main" val="21828439"/>
+        <p14:creationId xmlns:p14="http://schemas.microsoft.com/office/powerpoint/2010/main" val="1353851941"/>
       </p:ext>
     </p:extLst>
   </p:cSld>
@@ -4887,7 +7143,7 @@
           <p:cNvPr id="2" name="Título 1">
             <a:extLst>
               <a:ext uri="{FF2B5EF4-FFF2-40B4-BE49-F238E27FC236}">
-                <a16:creationId xmlns:a16="http://schemas.microsoft.com/office/drawing/2014/main" id="{C61BB4C2-9D96-A125-ED9B-DDB7684CDB53}"/>
+                <a16:creationId xmlns:a16="http://schemas.microsoft.com/office/drawing/2014/main" id="{32CE98DE-4A46-2F9C-B86B-BE96D7E7E678}"/>
               </a:ext>
             </a:extLst>
           </p:cNvPr>
@@ -4898,47 +7154,15 @@
             <p:ph type="ctrTitle"/>
           </p:nvPr>
         </p:nvSpPr>
-        <p:spPr>
-          <a:xfrm>
-            <a:off x="508000" y="897890"/>
-            <a:ext cx="8128000" cy="1910080"/>
-          </a:xfrm>
-        </p:spPr>
-        <p:txBody>
-          <a:bodyPr>
-            <a:normAutofit/>
-          </a:bodyPr>
-          <a:lstStyle/>
-          <a:p>
-            <a:r>
-              <a:rPr lang="es-GT" sz="3200"/>
+        <p:spPr/>
+        <p:txBody>
+          <a:bodyPr/>
+          <a:lstStyle/>
+          <a:p>
+            <a:r>
+              <a:rPr lang="es-GT"/>
               <a:t>App Mdi Cascada</a:t>
             </a:r>
-          </a:p>
-        </p:txBody>
-      </p:sp>
-      <p:sp>
-        <p:nvSpPr>
-          <p:cNvPr id="3" name="Subtítulo 2">
-            <a:extLst>
-              <a:ext uri="{FF2B5EF4-FFF2-40B4-BE49-F238E27FC236}">
-                <a16:creationId xmlns:a16="http://schemas.microsoft.com/office/drawing/2014/main" id="{C9F70942-E910-DDC0-8968-7648B036AB68}"/>
-              </a:ext>
-            </a:extLst>
-          </p:cNvPr>
-          <p:cNvSpPr>
-            <a:spLocks noGrp="1"/>
-          </p:cNvSpPr>
-          <p:nvPr>
-            <p:ph type="subTitle" idx="1"/>
-          </p:nvPr>
-        </p:nvSpPr>
-        <p:spPr/>
-        <p:txBody>
-          <a:bodyPr/>
-          <a:lstStyle/>
-          <a:p>
-            <a:endParaRPr lang="es-GT"/>
           </a:p>
         </p:txBody>
       </p:sp>
@@ -4947,7 +7171,7 @@
           <p:cNvPr id="5" name="Imagen 4">
             <a:extLst>
               <a:ext uri="{FF2B5EF4-FFF2-40B4-BE49-F238E27FC236}">
-                <a16:creationId xmlns:a16="http://schemas.microsoft.com/office/drawing/2014/main" id="{E19C71B3-34E2-D71B-96E0-E2794DFDF285}"/>
+                <a16:creationId xmlns:a16="http://schemas.microsoft.com/office/drawing/2014/main" id="{9957E83D-9D8E-71C9-3ABE-EAA4F291669D}"/>
               </a:ext>
             </a:extLst>
           </p:cNvPr>
@@ -4970,8 +7194,8 @@
         </p:blipFill>
         <p:spPr>
           <a:xfrm>
-            <a:off x="508000" y="1270000"/>
-            <a:ext cx="7317209" cy="3860800"/>
+            <a:off x="1219200" y="1270000"/>
+            <a:ext cx="7315200" cy="3859740"/>
           </a:xfrm>
           <a:prstGeom prst="rect">
             <a:avLst/>
@@ -4981,7 +7205,7 @@
     </p:spTree>
     <p:extLst>
       <p:ext uri="{BB962C8B-B14F-4D97-AF65-F5344CB8AC3E}">
-        <p14:creationId xmlns:p14="http://schemas.microsoft.com/office/powerpoint/2010/main" val="3038031259"/>
+        <p14:creationId xmlns:p14="http://schemas.microsoft.com/office/powerpoint/2010/main" val="12408128"/>
       </p:ext>
     </p:extLst>
   </p:cSld>
@@ -5013,7 +7237,7 @@
           <p:cNvPr id="2" name="Título 1">
             <a:extLst>
               <a:ext uri="{FF2B5EF4-FFF2-40B4-BE49-F238E27FC236}">
-                <a16:creationId xmlns:a16="http://schemas.microsoft.com/office/drawing/2014/main" id="{3F87403F-A755-7B5F-92B0-9DE0E9FE93C6}"/>
+                <a16:creationId xmlns:a16="http://schemas.microsoft.com/office/drawing/2014/main" id="{98828706-746C-FC98-DCB4-C195F1B3C5CD}"/>
               </a:ext>
             </a:extLst>
           </p:cNvPr>
@@ -5024,47 +7248,15 @@
             <p:ph type="ctrTitle"/>
           </p:nvPr>
         </p:nvSpPr>
-        <p:spPr>
-          <a:xfrm>
-            <a:off x="508000" y="897890"/>
-            <a:ext cx="8128000" cy="1910080"/>
-          </a:xfrm>
-        </p:spPr>
-        <p:txBody>
-          <a:bodyPr>
-            <a:normAutofit/>
-          </a:bodyPr>
-          <a:lstStyle/>
-          <a:p>
-            <a:r>
-              <a:rPr lang="es-GT" sz="3200"/>
+        <p:spPr/>
+        <p:txBody>
+          <a:bodyPr/>
+          <a:lstStyle/>
+          <a:p>
+            <a:r>
+              <a:rPr lang="es-GT"/>
               <a:t>Catalogo Clientes Mdi</a:t>
             </a:r>
-          </a:p>
-        </p:txBody>
-      </p:sp>
-      <p:sp>
-        <p:nvSpPr>
-          <p:cNvPr id="3" name="Subtítulo 2">
-            <a:extLst>
-              <a:ext uri="{FF2B5EF4-FFF2-40B4-BE49-F238E27FC236}">
-                <a16:creationId xmlns:a16="http://schemas.microsoft.com/office/drawing/2014/main" id="{8D770B67-1531-E419-3E15-232AD0C4DD17}"/>
-              </a:ext>
-            </a:extLst>
-          </p:cNvPr>
-          <p:cNvSpPr>
-            <a:spLocks noGrp="1"/>
-          </p:cNvSpPr>
-          <p:nvPr>
-            <p:ph type="subTitle" idx="1"/>
-          </p:nvPr>
-        </p:nvSpPr>
-        <p:spPr/>
-        <p:txBody>
-          <a:bodyPr/>
-          <a:lstStyle/>
-          <a:p>
-            <a:endParaRPr lang="es-GT"/>
           </a:p>
         </p:txBody>
       </p:sp>
@@ -5073,7 +7265,7 @@
           <p:cNvPr id="5" name="Imagen 4">
             <a:extLst>
               <a:ext uri="{FF2B5EF4-FFF2-40B4-BE49-F238E27FC236}">
-                <a16:creationId xmlns:a16="http://schemas.microsoft.com/office/drawing/2014/main" id="{213B9030-69C9-6D1D-889D-7C0A6E0AD72D}"/>
+                <a16:creationId xmlns:a16="http://schemas.microsoft.com/office/drawing/2014/main" id="{47CA6217-BA66-48E1-C9E9-95DB450AF6AE}"/>
               </a:ext>
             </a:extLst>
           </p:cNvPr>
@@ -5096,8 +7288,8 @@
         </p:blipFill>
         <p:spPr>
           <a:xfrm>
-            <a:off x="508000" y="1270000"/>
-            <a:ext cx="7319698" cy="3835400"/>
+            <a:off x="1219200" y="1270000"/>
+            <a:ext cx="7315200" cy="3833043"/>
           </a:xfrm>
           <a:prstGeom prst="rect">
             <a:avLst/>
@@ -5107,7 +7299,7 @@
     </p:spTree>
     <p:extLst>
       <p:ext uri="{BB962C8B-B14F-4D97-AF65-F5344CB8AC3E}">
-        <p14:creationId xmlns:p14="http://schemas.microsoft.com/office/powerpoint/2010/main" val="3580518549"/>
+        <p14:creationId xmlns:p14="http://schemas.microsoft.com/office/powerpoint/2010/main" val="4035926737"/>
       </p:ext>
     </p:extLst>
   </p:cSld>
@@ -5139,7 +7331,7 @@
           <p:cNvPr id="2" name="Título 1">
             <a:extLst>
               <a:ext uri="{FF2B5EF4-FFF2-40B4-BE49-F238E27FC236}">
-                <a16:creationId xmlns:a16="http://schemas.microsoft.com/office/drawing/2014/main" id="{7035628E-2909-8CA9-10A0-311830F4CDB3}"/>
+                <a16:creationId xmlns:a16="http://schemas.microsoft.com/office/drawing/2014/main" id="{A2014841-D304-69F2-C847-7EF4ECFFDB99}"/>
               </a:ext>
             </a:extLst>
           </p:cNvPr>
@@ -5150,47 +7342,15 @@
             <p:ph type="ctrTitle"/>
           </p:nvPr>
         </p:nvSpPr>
-        <p:spPr>
-          <a:xfrm>
-            <a:off x="508000" y="897890"/>
-            <a:ext cx="8128000" cy="1910080"/>
-          </a:xfrm>
-        </p:spPr>
-        <p:txBody>
-          <a:bodyPr>
-            <a:normAutofit/>
-          </a:bodyPr>
-          <a:lstStyle/>
-          <a:p>
-            <a:r>
-              <a:rPr lang="es-GT" sz="3200"/>
+        <p:spPr/>
+        <p:txBody>
+          <a:bodyPr/>
+          <a:lstStyle/>
+          <a:p>
+            <a:r>
+              <a:rPr lang="es-GT"/>
               <a:t>Menu Ventana</a:t>
             </a:r>
-          </a:p>
-        </p:txBody>
-      </p:sp>
-      <p:sp>
-        <p:nvSpPr>
-          <p:cNvPr id="3" name="Subtítulo 2">
-            <a:extLst>
-              <a:ext uri="{FF2B5EF4-FFF2-40B4-BE49-F238E27FC236}">
-                <a16:creationId xmlns:a16="http://schemas.microsoft.com/office/drawing/2014/main" id="{173BE4D6-3C27-D412-9029-E0AFD3AC70F1}"/>
-              </a:ext>
-            </a:extLst>
-          </p:cNvPr>
-          <p:cNvSpPr>
-            <a:spLocks noGrp="1"/>
-          </p:cNvSpPr>
-          <p:nvPr>
-            <p:ph type="subTitle" idx="1"/>
-          </p:nvPr>
-        </p:nvSpPr>
-        <p:spPr/>
-        <p:txBody>
-          <a:bodyPr/>
-          <a:lstStyle/>
-          <a:p>
-            <a:endParaRPr lang="es-GT"/>
           </a:p>
         </p:txBody>
       </p:sp>
@@ -5199,7 +7359,7 @@
           <p:cNvPr id="5" name="Imagen 4">
             <a:extLst>
               <a:ext uri="{FF2B5EF4-FFF2-40B4-BE49-F238E27FC236}">
-                <a16:creationId xmlns:a16="http://schemas.microsoft.com/office/drawing/2014/main" id="{C3EFB18A-4A96-C3D8-BE20-EC7DCDBCCCF2}"/>
+                <a16:creationId xmlns:a16="http://schemas.microsoft.com/office/drawing/2014/main" id="{E0EB759F-F4FF-F767-8708-DD10834446DB}"/>
               </a:ext>
             </a:extLst>
           </p:cNvPr>
@@ -5222,8 +7382,8 @@
         </p:blipFill>
         <p:spPr>
           <a:xfrm>
-            <a:off x="508000" y="1270000"/>
-            <a:ext cx="7317672" cy="3886200"/>
+            <a:off x="1219200" y="1270000"/>
+            <a:ext cx="7315200" cy="3884887"/>
           </a:xfrm>
           <a:prstGeom prst="rect">
             <a:avLst/>
@@ -5233,7 +7393,7 @@
     </p:spTree>
     <p:extLst>
       <p:ext uri="{BB962C8B-B14F-4D97-AF65-F5344CB8AC3E}">
-        <p14:creationId xmlns:p14="http://schemas.microsoft.com/office/powerpoint/2010/main" val="3712192054"/>
+        <p14:creationId xmlns:p14="http://schemas.microsoft.com/office/powerpoint/2010/main" val="1819587613"/>
       </p:ext>
     </p:extLst>
   </p:cSld>
@@ -5244,9 +7404,9 @@
 </file>
 
 <file path=ppt/theme/theme1.xml><?xml version="1.0" encoding="utf-8"?>
-<a:theme xmlns:a="http://schemas.openxmlformats.org/drawingml/2006/main" name="Tema de Office">
+<a:theme xmlns:a="http://schemas.openxmlformats.org/drawingml/2006/main" name="Ion">
   <a:themeElements>
-    <a:clrScheme name="Office">
+    <a:clrScheme name="Ion">
       <a:dk1>
         <a:sysClr val="windowText" lastClr="000000"/>
       </a:dk1>
@@ -5254,44 +7414,44 @@
         <a:sysClr val="window" lastClr="FFFFFF"/>
       </a:lt1>
       <a:dk2>
-        <a:srgbClr val="0E2841"/>
+        <a:srgbClr val="1E5155"/>
       </a:dk2>
       <a:lt2>
-        <a:srgbClr val="E8E8E8"/>
+        <a:srgbClr val="EBEBEB"/>
       </a:lt2>
       <a:accent1>
-        <a:srgbClr val="156082"/>
+        <a:srgbClr val="B01513"/>
       </a:accent1>
       <a:accent2>
-        <a:srgbClr val="E97132"/>
+        <a:srgbClr val="EA6312"/>
       </a:accent2>
       <a:accent3>
-        <a:srgbClr val="196B24"/>
+        <a:srgbClr val="E6B729"/>
       </a:accent3>
       <a:accent4>
-        <a:srgbClr val="0F9ED5"/>
+        <a:srgbClr val="6AAC90"/>
       </a:accent4>
       <a:accent5>
-        <a:srgbClr val="A02B93"/>
+        <a:srgbClr val="54849A"/>
       </a:accent5>
       <a:accent6>
-        <a:srgbClr val="4EA72E"/>
+        <a:srgbClr val="9E5E9B"/>
       </a:accent6>
       <a:hlink>
-        <a:srgbClr val="467886"/>
+        <a:srgbClr val="58C1BA"/>
       </a:hlink>
       <a:folHlink>
-        <a:srgbClr val="96607D"/>
+        <a:srgbClr val="9DFFCB"/>
       </a:folHlink>
     </a:clrScheme>
-    <a:fontScheme name="Office">
+    <a:fontScheme name="Ion">
       <a:majorFont>
-        <a:latin typeface="Aptos Display" panose="02110004020202020204"/>
+        <a:latin typeface="Century Gothic" panose="020B0502020202020204"/>
         <a:ea typeface=""/>
         <a:cs typeface=""/>
-        <a:font script="Jpan" typeface="游ゴシック Light"/>
+        <a:font script="Jpan" typeface="メイリオ"/>
         <a:font script="Hang" typeface="맑은 고딕"/>
-        <a:font script="Hans" typeface="等线 Light"/>
+        <a:font script="Hans" typeface="宋体"/>
         <a:font script="Hant" typeface="新細明體"/>
         <a:font script="Arab" typeface="Times New Roman"/>
         <a:font script="Hebr" typeface="Times New Roman"/>
@@ -5319,31 +7479,14 @@
         <a:font script="Viet" typeface="Times New Roman"/>
         <a:font script="Uigh" typeface="Microsoft Uighur"/>
         <a:font script="Geor" typeface="Sylfaen"/>
-        <a:font script="Armn" typeface="Arial"/>
-        <a:font script="Bugi" typeface="Leelawadee UI"/>
-        <a:font script="Bopo" typeface="Microsoft JhengHei"/>
-        <a:font script="Java" typeface="Javanese Text"/>
-        <a:font script="Lisu" typeface="Segoe UI"/>
-        <a:font script="Mymr" typeface="Myanmar Text"/>
-        <a:font script="Nkoo" typeface="Ebrima"/>
-        <a:font script="Olck" typeface="Nirmala UI"/>
-        <a:font script="Osma" typeface="Ebrima"/>
-        <a:font script="Phag" typeface="Phagspa"/>
-        <a:font script="Syrn" typeface="Estrangelo Edessa"/>
-        <a:font script="Syrj" typeface="Estrangelo Edessa"/>
-        <a:font script="Syre" typeface="Estrangelo Edessa"/>
-        <a:font script="Sora" typeface="Nirmala UI"/>
-        <a:font script="Tale" typeface="Microsoft Tai Le"/>
-        <a:font script="Talu" typeface="Microsoft New Tai Lue"/>
-        <a:font script="Tfng" typeface="Ebrima"/>
       </a:majorFont>
       <a:minorFont>
-        <a:latin typeface="Aptos" panose="02110004020202020204"/>
+        <a:latin typeface="Century Gothic" panose="020B0502020202020204"/>
         <a:ea typeface=""/>
         <a:cs typeface=""/>
-        <a:font script="Jpan" typeface="游ゴシック"/>
+        <a:font script="Jpan" typeface="メイリオ"/>
         <a:font script="Hang" typeface="맑은 고딕"/>
-        <a:font script="Hans" typeface="等线"/>
+        <a:font script="Hans" typeface="宋体"/>
         <a:font script="Hant" typeface="新細明體"/>
         <a:font script="Arab" typeface="Arial"/>
         <a:font script="Hebr" typeface="Arial"/>
@@ -5371,26 +7514,9 @@
         <a:font script="Viet" typeface="Arial"/>
         <a:font script="Uigh" typeface="Microsoft Uighur"/>
         <a:font script="Geor" typeface="Sylfaen"/>
-        <a:font script="Armn" typeface="Arial"/>
-        <a:font script="Bugi" typeface="Leelawadee UI"/>
-        <a:font script="Bopo" typeface="Microsoft JhengHei"/>
-        <a:font script="Java" typeface="Javanese Text"/>
-        <a:font script="Lisu" typeface="Segoe UI"/>
-        <a:font script="Mymr" typeface="Myanmar Text"/>
-        <a:font script="Nkoo" typeface="Ebrima"/>
-        <a:font script="Olck" typeface="Nirmala UI"/>
-        <a:font script="Osma" typeface="Ebrima"/>
-        <a:font script="Phag" typeface="Phagspa"/>
-        <a:font script="Syrn" typeface="Estrangelo Edessa"/>
-        <a:font script="Syrj" typeface="Estrangelo Edessa"/>
-        <a:font script="Syre" typeface="Estrangelo Edessa"/>
-        <a:font script="Sora" typeface="Nirmala UI"/>
-        <a:font script="Tale" typeface="Microsoft Tai Le"/>
-        <a:font script="Talu" typeface="Microsoft New Tai Lue"/>
-        <a:font script="Tfng" typeface="Ebrima"/>
       </a:minorFont>
     </a:fontScheme>
-    <a:fmtScheme name="Office">
+    <a:fmtScheme name="Ion">
       <a:fillStyleLst>
         <a:solidFill>
           <a:schemeClr val="phClr"/>
@@ -5399,23 +7525,15 @@
           <a:gsLst>
             <a:gs pos="0">
               <a:schemeClr val="phClr">
-                <a:lumMod val="110000"/>
-                <a:satMod val="105000"/>
-                <a:tint val="67000"/>
-              </a:schemeClr>
-            </a:gs>
-            <a:gs pos="50000">
-              <a:schemeClr val="phClr">
-                <a:lumMod val="105000"/>
-                <a:satMod val="103000"/>
-                <a:tint val="73000"/>
+                <a:tint val="64000"/>
+                <a:lumMod val="118000"/>
               </a:schemeClr>
             </a:gs>
             <a:gs pos="100000">
               <a:schemeClr val="phClr">
-                <a:lumMod val="105000"/>
-                <a:satMod val="109000"/>
-                <a:tint val="81000"/>
+                <a:tint val="92000"/>
+                <a:alpha val="100000"/>
+                <a:lumMod val="110000"/>
               </a:schemeClr>
             </a:gs>
           </a:gsLst>
@@ -5425,23 +7543,14 @@
           <a:gsLst>
             <a:gs pos="0">
               <a:schemeClr val="phClr">
-                <a:satMod val="103000"/>
-                <a:lumMod val="102000"/>
-                <a:tint val="94000"/>
-              </a:schemeClr>
-            </a:gs>
-            <a:gs pos="50000">
-              <a:schemeClr val="phClr">
-                <a:satMod val="110000"/>
-                <a:lumMod val="100000"/>
-                <a:shade val="100000"/>
+                <a:tint val="98000"/>
+                <a:lumMod val="114000"/>
               </a:schemeClr>
             </a:gs>
             <a:gs pos="100000">
               <a:schemeClr val="phClr">
-                <a:lumMod val="99000"/>
-                <a:satMod val="120000"/>
-                <a:shade val="78000"/>
+                <a:shade val="90000"/>
+                <a:lumMod val="84000"/>
               </a:schemeClr>
             </a:gs>
           </a:gsLst>
@@ -5449,26 +7558,23 @@
         </a:gradFill>
       </a:fillStyleLst>
       <a:lnStyleLst>
-        <a:ln w="12700" cap="flat" cmpd="sng" algn="ctr">
+        <a:ln w="9525" cap="rnd" cmpd="sng" algn="ctr">
           <a:solidFill>
             <a:schemeClr val="phClr"/>
           </a:solidFill>
           <a:prstDash val="solid"/>
-          <a:miter lim="800000"/>
         </a:ln>
-        <a:ln w="19050" cap="flat" cmpd="sng" algn="ctr">
+        <a:ln w="19050" cap="rnd" cmpd="sng" algn="ctr">
           <a:solidFill>
             <a:schemeClr val="phClr"/>
           </a:solidFill>
           <a:prstDash val="solid"/>
-          <a:miter lim="800000"/>
         </a:ln>
-        <a:ln w="25400" cap="flat" cmpd="sng" algn="ctr">
+        <a:ln w="28575" cap="rnd" cmpd="sng" algn="ctr">
           <a:solidFill>
             <a:schemeClr val="phClr"/>
           </a:solidFill>
           <a:prstDash val="solid"/>
-          <a:miter lim="800000"/>
         </a:ln>
       </a:lnStyleLst>
       <a:effectStyleLst>
@@ -5476,83 +7582,88 @@
           <a:effectLst/>
         </a:effectStyle>
         <a:effectStyle>
-          <a:effectLst/>
+          <a:effectLst>
+            <a:outerShdw blurRad="38100" dist="25400" dir="5400000" rotWithShape="0">
+              <a:srgbClr val="000000">
+                <a:alpha val="45000"/>
+              </a:srgbClr>
+            </a:outerShdw>
+          </a:effectLst>
         </a:effectStyle>
         <a:effectStyle>
           <a:effectLst>
-            <a:outerShdw blurRad="57150" dist="19050" dir="5400000" algn="ctr" rotWithShape="0">
+            <a:outerShdw blurRad="63500" dist="38100" dir="5400000" rotWithShape="0">
               <a:srgbClr val="000000">
-                <a:alpha val="63000"/>
+                <a:alpha val="60000"/>
               </a:srgbClr>
             </a:outerShdw>
           </a:effectLst>
+          <a:scene3d>
+            <a:camera prst="orthographicFront">
+              <a:rot lat="0" lon="0" rev="0"/>
+            </a:camera>
+            <a:lightRig rig="threePt" dir="tl"/>
+          </a:scene3d>
+          <a:sp3d prstMaterial="plastic">
+            <a:bevelT w="0" h="0"/>
+          </a:sp3d>
         </a:effectStyle>
       </a:effectStyleLst>
       <a:bgFillStyleLst>
         <a:solidFill>
           <a:schemeClr val="phClr"/>
         </a:solidFill>
-        <a:solidFill>
-          <a:schemeClr val="phClr">
-            <a:tint val="95000"/>
-            <a:satMod val="170000"/>
-          </a:schemeClr>
-        </a:solidFill>
         <a:gradFill rotWithShape="1">
           <a:gsLst>
             <a:gs pos="0">
               <a:schemeClr val="phClr">
-                <a:tint val="93000"/>
-                <a:satMod val="150000"/>
-                <a:shade val="98000"/>
-                <a:lumMod val="102000"/>
-              </a:schemeClr>
-            </a:gs>
-            <a:gs pos="50000">
-              <a:schemeClr val="phClr">
-                <a:tint val="98000"/>
+                <a:tint val="97000"/>
+                <a:hueMod val="88000"/>
                 <a:satMod val="130000"/>
-                <a:shade val="90000"/>
-                <a:lumMod val="103000"/>
+                <a:lumMod val="124000"/>
               </a:schemeClr>
             </a:gs>
             <a:gs pos="100000">
               <a:schemeClr val="phClr">
-                <a:shade val="63000"/>
-                <a:satMod val="120000"/>
+                <a:tint val="96000"/>
+                <a:shade val="88000"/>
+                <a:hueMod val="108000"/>
+                <a:satMod val="164000"/>
+                <a:lumMod val="76000"/>
               </a:schemeClr>
             </a:gs>
           </a:gsLst>
-          <a:lin ang="5400000" scaled="0"/>
+          <a:path path="circle">
+            <a:fillToRect l="45000" t="65000" r="125000" b="100000"/>
+          </a:path>
         </a:gradFill>
+        <a:blipFill rotWithShape="1">
+          <a:blip xmlns:r="http://schemas.openxmlformats.org/officeDocument/2006/relationships" r:embed="rId1">
+            <a:duotone>
+              <a:schemeClr val="phClr">
+                <a:shade val="69000"/>
+                <a:hueMod val="108000"/>
+                <a:satMod val="164000"/>
+                <a:lumMod val="74000"/>
+              </a:schemeClr>
+              <a:schemeClr val="phClr">
+                <a:tint val="96000"/>
+                <a:hueMod val="88000"/>
+                <a:satMod val="140000"/>
+                <a:lumMod val="132000"/>
+              </a:schemeClr>
+            </a:duotone>
+          </a:blip>
+          <a:stretch/>
+        </a:blipFill>
       </a:bgFillStyleLst>
     </a:fmtScheme>
   </a:themeElements>
-  <a:objectDefaults>
-    <a:lnDef>
-      <a:spPr/>
-      <a:bodyPr/>
-      <a:lstStyle/>
-      <a:style>
-        <a:lnRef idx="2">
-          <a:schemeClr val="accent1"/>
-        </a:lnRef>
-        <a:fillRef idx="0">
-          <a:schemeClr val="accent1"/>
-        </a:fillRef>
-        <a:effectRef idx="1">
-          <a:schemeClr val="accent1"/>
-        </a:effectRef>
-        <a:fontRef idx="minor">
-          <a:schemeClr val="tx1"/>
-        </a:fontRef>
-      </a:style>
-    </a:lnDef>
-  </a:objectDefaults>
+  <a:objectDefaults/>
   <a:extraClrSchemeLst/>
   <a:extLst>
     <a:ext uri="{05A4C25C-085E-4340-85A3-A5531E510DB2}">
-      <thm15:themeFamily xmlns:thm15="http://schemas.microsoft.com/office/thememl/2012/main" name="Office Theme" id="{2E142A2C-CD16-42D6-873A-C26D2A0506FA}" vid="{1BDDFF52-6CD6-40A5-AB3C-68EB2F1E4D0A}"/>
+      <thm15:themeFamily xmlns:thm15="http://schemas.microsoft.com/office/thememl/2012/main" name="Ion" id="{B8441ADB-2E43-4AF7-B97A-BD870242C6A8}" vid="{292E63A9-BB86-4E3D-B92A-7223C6510D2E}"/>
     </a:ext>
   </a:extLst>
 </a:theme>
